--- a/api/inst/plantillas/plantilla_acnur_16_9.pptx
+++ b/api/inst/plantillas/plantilla_acnur_16_9.pptx
@@ -13632,6 +13632,38 @@
           </a:prstGeom>
         </p:spPr>
       </p:pic>
+      <p:sp xmlns:p="http://schemas.openxmlformats.org/presentationml/2006/main" xmlns:a="http://schemas.openxmlformats.org/drawingml/2006/main">
+        <p:nvSpPr>
+          <p:cNvPr id="220" name="prosecnur:section:accent"/>
+          <p:cNvSpPr/>
+          <p:nvPr userDrawn="1"/>
+        </p:nvSpPr>
+        <p:spPr>
+          <a:xfrm>
+            <a:off x="740664" y="2686050"/>
+            <a:ext cx="118872" cy="1005840"/>
+          </a:xfrm>
+          <a:prstGeom prst="roundRect">
+            <a:avLst>
+              <a:gd name="adj" fmla="val 50000"/>
+            </a:avLst>
+          </a:prstGeom>
+          <a:solidFill>
+            <a:srgbClr val="0072BC"/>
+          </a:solidFill>
+          <a:ln>
+            <a:noFill/>
+          </a:ln>
+        </p:spPr>
+        <p:txBody>
+          <a:bodyPr rtlCol="0" anchor="ctr"/>
+          <a:lstStyle/>
+          <a:p>
+            <a:pPr algn="ctr"/>
+            <a:endParaRPr lang="en-US"/>
+          </a:p>
+        </p:txBody>
+      </p:sp>
     </p:spTree>
     <p:extLst>
       <p:ext uri="{BB962C8B-B14F-4D97-AF65-F5344CB8AC3E}">

--- a/api/inst/plantillas/plantilla_acnur_16_9.pptx
+++ b/api/inst/plantillas/plantilla_acnur_16_9.pptx
@@ -10542,7 +10542,7 @@
           </a:xfrm>
         </p:spPr>
         <p:txBody>
-          <a:bodyPr vert="vert270" anchor="ctr">
+          <a:bodyPr vert="vert" anchor="ctr">
             <a:normAutofit/>
           </a:bodyPr>
           <a:lstStyle>

--- a/api/inst/plantillas/plantilla_acnur_16_9.pptx
+++ b/api/inst/plantillas/plantilla_acnur_16_9.pptx
@@ -16344,6 +16344,518 @@
 </p:sldLayout>
 </file>
 
+<file path=ppt/slideLayouts/slideLayout25.xml><?xml version="1.0" encoding="utf-8"?>
+<p:sldLayout xmlns:a="http://schemas.openxmlformats.org/drawingml/2006/main" xmlns:ns3="http://schemas.microsoft.com/office/drawing/2014/main" xmlns:p="http://schemas.openxmlformats.org/presentationml/2006/main" xmlns:p14="http://schemas.microsoft.com/office/powerpoint/2010/main" xmlns:p15="http://schemas.microsoft.com/office/powerpoint/2012/main" xmlns:r="http://schemas.openxmlformats.org/officeDocument/2006/relationships" matchingName="Dos objetos" preserve="1" userDrawn="1">
+  <p:cSld name="poblacion_3">
+    <p:spTree>
+      <p:nvGrpSpPr>
+        <p:cNvPr id="1" name="Shape 84"/>
+        <p:cNvGrpSpPr/>
+        <p:nvPr/>
+      </p:nvGrpSpPr>
+      <p:grpSpPr>
+        <a:xfrm>
+          <a:off x="0" y="0"/>
+          <a:ext cx="0" cy="0"/>
+          <a:chOff x="0" y="0"/>
+          <a:chExt cx="0" cy="0"/>
+        </a:xfrm>
+      </p:grpSpPr>
+      <p:sp>
+        <p:nvSpPr>
+          <p:cNvPr id="88" name="Google Shape;88;p51"/>
+          <p:cNvSpPr txBox="1">
+            <a:spLocks noGrp="1"/>
+          </p:cNvSpPr>
+          <p:nvPr>
+            <p:ph type="title"/>
+          </p:nvPr>
+        </p:nvSpPr>
+        <p:spPr>
+          <a:xfrm>
+            <a:off x="461464" y="338268"/>
+            <a:ext cx="9626752" cy="666595"/>
+          </a:xfrm>
+          <a:prstGeom prst="rect">
+            <a:avLst/>
+          </a:prstGeom>
+          <a:noFill/>
+          <a:ln>
+            <a:noFill/>
+          </a:ln>
+        </p:spPr>
+        <p:txBody>
+          <a:bodyPr spcFirstLastPara="1" wrap="square" lIns="91425" tIns="45700" rIns="91425" bIns="45700" anchor="ctr" anchorCtr="0">
+            <a:normAutofit/>
+          </a:bodyPr>
+          <a:lstStyle>
+            <a:lvl1pPr lvl="0" algn="l">
+              <a:lnSpc>
+                <a:spcPct val="90000"/>
+              </a:lnSpc>
+              <a:spcBef>
+                <a:spcPts val="0"/>
+              </a:spcBef>
+              <a:spcAft>
+                <a:spcPts val="0"/>
+              </a:spcAft>
+              <a:buClr>
+                <a:srgbClr val="CA5651"/>
+              </a:buClr>
+              <a:buSzPts val="2400"/>
+              <a:buFont typeface="Arial"/>
+              <a:buNone/>
+              <a:defRPr sz="2400" b="1" cap="none">
+                <a:solidFill>
+                  <a:srgbClr val="CA5651"/>
+                </a:solidFill>
+                <a:latin typeface="Arial"/>
+                <a:ea typeface="Arial"/>
+                <a:cs typeface="Arial"/>
+                <a:sym typeface="Arial"/>
+              </a:defRPr>
+            </a:lvl1pPr>
+            <a:lvl2pPr lvl="1" algn="l">
+              <a:lnSpc>
+                <a:spcPct val="100000"/>
+              </a:lnSpc>
+              <a:spcBef>
+                <a:spcPts val="0"/>
+              </a:spcBef>
+              <a:spcAft>
+                <a:spcPts val="0"/>
+              </a:spcAft>
+              <a:buSzPts val="1400"/>
+              <a:buNone/>
+              <a:defRPr sz="2400" b="1">
+                <a:latin typeface="Arial"/>
+                <a:solidFill>
+                  <a:srgbClr val="CA5651"/>
+                </a:solidFill>
+              </a:defRPr>
+            </a:lvl2pPr>
+            <a:lvl3pPr lvl="2" algn="l">
+              <a:lnSpc>
+                <a:spcPct val="100000"/>
+              </a:lnSpc>
+              <a:spcBef>
+                <a:spcPts val="0"/>
+              </a:spcBef>
+              <a:spcAft>
+                <a:spcPts val="0"/>
+              </a:spcAft>
+              <a:buSzPts val="1400"/>
+              <a:buNone/>
+              <a:defRPr sz="2400" b="1">
+                <a:latin typeface="Arial"/>
+                <a:solidFill>
+                  <a:srgbClr val="CA5651"/>
+                </a:solidFill>
+              </a:defRPr>
+            </a:lvl3pPr>
+            <a:lvl4pPr lvl="3" algn="l">
+              <a:lnSpc>
+                <a:spcPct val="100000"/>
+              </a:lnSpc>
+              <a:spcBef>
+                <a:spcPts val="0"/>
+              </a:spcBef>
+              <a:spcAft>
+                <a:spcPts val="0"/>
+              </a:spcAft>
+              <a:buSzPts val="1400"/>
+              <a:buNone/>
+              <a:defRPr sz="2400" b="1">
+                <a:latin typeface="Arial"/>
+                <a:solidFill>
+                  <a:srgbClr val="CA5651"/>
+                </a:solidFill>
+              </a:defRPr>
+            </a:lvl4pPr>
+            <a:lvl5pPr lvl="4" algn="l">
+              <a:lnSpc>
+                <a:spcPct val="100000"/>
+              </a:lnSpc>
+              <a:spcBef>
+                <a:spcPts val="0"/>
+              </a:spcBef>
+              <a:spcAft>
+                <a:spcPts val="0"/>
+              </a:spcAft>
+              <a:buSzPts val="1400"/>
+              <a:buNone/>
+              <a:defRPr sz="2400" b="1">
+                <a:latin typeface="Arial"/>
+                <a:solidFill>
+                  <a:srgbClr val="CA5651"/>
+                </a:solidFill>
+              </a:defRPr>
+            </a:lvl5pPr>
+            <a:lvl6pPr lvl="5" algn="l">
+              <a:lnSpc>
+                <a:spcPct val="100000"/>
+              </a:lnSpc>
+              <a:spcBef>
+                <a:spcPts val="0"/>
+              </a:spcBef>
+              <a:spcAft>
+                <a:spcPts val="0"/>
+              </a:spcAft>
+              <a:buSzPts val="1400"/>
+              <a:buNone/>
+              <a:defRPr sz="2400" b="1">
+                <a:latin typeface="Arial"/>
+                <a:solidFill>
+                  <a:srgbClr val="CA5651"/>
+                </a:solidFill>
+              </a:defRPr>
+            </a:lvl6pPr>
+            <a:lvl7pPr lvl="6" algn="l">
+              <a:lnSpc>
+                <a:spcPct val="100000"/>
+              </a:lnSpc>
+              <a:spcBef>
+                <a:spcPts val="0"/>
+              </a:spcBef>
+              <a:spcAft>
+                <a:spcPts val="0"/>
+              </a:spcAft>
+              <a:buSzPts val="1400"/>
+              <a:buNone/>
+              <a:defRPr sz="2400" b="1">
+                <a:latin typeface="Arial"/>
+                <a:solidFill>
+                  <a:srgbClr val="CA5651"/>
+                </a:solidFill>
+              </a:defRPr>
+            </a:lvl7pPr>
+            <a:lvl8pPr lvl="7" algn="l">
+              <a:lnSpc>
+                <a:spcPct val="100000"/>
+              </a:lnSpc>
+              <a:spcBef>
+                <a:spcPts val="0"/>
+              </a:spcBef>
+              <a:spcAft>
+                <a:spcPts val="0"/>
+              </a:spcAft>
+              <a:buSzPts val="1400"/>
+              <a:buNone/>
+              <a:defRPr sz="2400" b="1">
+                <a:latin typeface="Arial"/>
+                <a:solidFill>
+                  <a:srgbClr val="CA5651"/>
+                </a:solidFill>
+              </a:defRPr>
+            </a:lvl8pPr>
+            <a:lvl9pPr lvl="8" algn="l">
+              <a:lnSpc>
+                <a:spcPct val="100000"/>
+              </a:lnSpc>
+              <a:spcBef>
+                <a:spcPts val="0"/>
+              </a:spcBef>
+              <a:spcAft>
+                <a:spcPts val="0"/>
+              </a:spcAft>
+              <a:buSzPts val="1400"/>
+              <a:buNone/>
+              <a:defRPr sz="2400" b="1">
+                <a:latin typeface="Arial"/>
+                <a:solidFill>
+                  <a:srgbClr val="CA5651"/>
+                </a:solidFill>
+              </a:defRPr>
+            </a:lvl9pPr>
+          </a:lstStyle>
+          <a:p>
+            <a:r>
+              <a:rPr lang="es-MX" sz="2400" b="1">
+                <a:latin typeface="Arial"/>
+                <a:solidFill>
+                  <a:srgbClr val="CA5651"/>
+                </a:solidFill>
+              </a:rPr>
+              <a:t>Haz clic para modificar el estilo de título del patrón</a:t>
+            </a:r>
+            <a:endParaRPr dirty="0" sz="2400" b="1">
+              <a:latin typeface="Arial"/>
+              <a:solidFill>
+                <a:srgbClr val="CA5651"/>
+              </a:solidFill>
+            </a:endParaRPr>
+          </a:p>
+        </p:txBody>
+      </p:sp>
+      <p:sp>
+        <p:nvSpPr>
+          <p:cNvPr id="6" name="Picture Placeholder 5">
+            <a:extLst>
+              <a:ext uri="{FF2B5EF4-FFF2-40B4-BE49-F238E27FC236}">
+                <ns3:creationId id="{EB977788-EA90-94F5-A207-15EBBD7FEAB5}"/>
+              </a:ext>
+            </a:extLst>
+          </p:cNvPr>
+          <p:cNvSpPr>
+            <a:spLocks noGrp="1"/>
+          </p:cNvSpPr>
+          <p:nvPr>
+            <p:ph type="pic" sz="quarter" idx="10"/>
+          </p:nvPr>
+        </p:nvSpPr>
+        <p:spPr>
+          <a:xfrm>
+            <a:off x="461962" y="1212850"/>
+            <a:ext cx="4726263" cy="2345359"/>
+          </a:xfrm>
+        </p:spPr>
+        <p:txBody>
+          <a:bodyPr/>
+          <a:lstStyle/>
+          <a:p>
+            <a:endParaRPr lang="en-PE" dirty="0"/>
+          </a:p>
+          <a:p>
+            <a:endParaRPr lang="en-PE" dirty="0"/>
+          </a:p>
+        </p:txBody>
+      </p:sp>
+      <p:sp>
+        <p:nvSpPr>
+          <p:cNvPr id="7" name="Picture Placeholder 5">
+            <a:extLst>
+              <a:ext uri="{FF2B5EF4-FFF2-40B4-BE49-F238E27FC236}">
+                <ns3:creationId id="{0519FE1F-4FD7-A2A0-81FB-8DCD6F26C4FB}"/>
+              </a:ext>
+            </a:extLst>
+          </p:cNvPr>
+          <p:cNvSpPr>
+            <a:spLocks noGrp="1"/>
+          </p:cNvSpPr>
+          <p:nvPr>
+            <p:ph type="pic" sz="quarter" idx="11"/>
+          </p:nvPr>
+        </p:nvSpPr>
+        <p:spPr>
+          <a:xfrm>
+            <a:off x="461465" y="3754437"/>
+            <a:ext cx="4726786" cy="2345359"/>
+          </a:xfrm>
+        </p:spPr>
+        <p:txBody>
+          <a:bodyPr/>
+          <a:lstStyle/>
+          <a:p>
+            <a:endParaRPr lang="en-PE" dirty="0"/>
+          </a:p>
+        </p:txBody>
+      </p:sp>
+      <p:sp>
+        <p:nvSpPr>
+          <p:cNvPr id="8" name="Picture Placeholder 5">
+            <a:extLst>
+              <a:ext uri="{FF2B5EF4-FFF2-40B4-BE49-F238E27FC236}">
+                <ns3:creationId id="{358A77CA-4946-E677-D51B-A8CE149E91B8}"/>
+              </a:ext>
+            </a:extLst>
+          </p:cNvPr>
+          <p:cNvSpPr>
+            <a:spLocks noGrp="1"/>
+          </p:cNvSpPr>
+          <p:nvPr>
+            <p:ph type="pic" sz="quarter" idx="12"/>
+          </p:nvPr>
+        </p:nvSpPr>
+        <p:spPr>
+          <a:xfrm>
+            <a:off x="7113105" y="1212494"/>
+            <a:ext cx="4726263" cy="4887468"/>
+          </a:xfrm>
+        </p:spPr>
+        <p:txBody>
+          <a:bodyPr/>
+          <a:lstStyle/>
+          <a:p>
+            <a:endParaRPr lang="en-PE" dirty="0"/>
+          </a:p>
+          <a:p>
+            <a:endParaRPr lang="en-PE" dirty="0"/>
+          </a:p>
+        </p:txBody>
+      </p:sp>
+      <p:sp>
+        <p:nvSpPr>
+          <p:cNvPr id="2" name="Text Placeholder 9">
+            <a:extLst>
+              <a:ext uri="{FF2B5EF4-FFF2-40B4-BE49-F238E27FC236}">
+                <ns3:creationId id="{0C929747-7B86-54B8-A590-1398C659B7EC}"/>
+              </a:ext>
+            </a:extLst>
+          </p:cNvPr>
+          <p:cNvSpPr>
+            <a:spLocks noGrp="1"/>
+          </p:cNvSpPr>
+          <p:nvPr>
+            <p:ph type="body" sz="quarter" idx="14"/>
+          </p:nvPr>
+        </p:nvSpPr>
+        <p:spPr>
+          <a:xfrm>
+            <a:off x="461464" y="6320500"/>
+            <a:ext cx="4503738" cy="398463"/>
+          </a:xfrm>
+        </p:spPr>
+        <p:txBody>
+          <a:bodyPr>
+            <a:noAutofit/>
+          </a:bodyPr>
+          <a:lstStyle>
+            <a:lvl1pPr>
+              <a:defRPr sz="1100"/>
+            </a:lvl1pPr>
+            <a:lvl2pPr>
+              <a:defRPr sz="1000"/>
+            </a:lvl2pPr>
+            <a:lvl3pPr>
+              <a:defRPr sz="1000"/>
+            </a:lvl3pPr>
+            <a:lvl4pPr>
+              <a:defRPr sz="1000"/>
+            </a:lvl4pPr>
+            <a:lvl5pPr>
+              <a:defRPr sz="1000"/>
+            </a:lvl5pPr>
+          </a:lstStyle>
+          <a:p>
+            <a:pPr lvl="0"/>
+            <a:r>
+              <a:rPr lang="en-US" dirty="0"/>
+              <a:t>Click to edit Master text styles</a:t>
+            </a:r>
+          </a:p>
+          <a:p>
+            <a:pPr lvl="1"/>
+            <a:r>
+              <a:rPr lang="en-US" dirty="0"/>
+              <a:t>Second level</a:t>
+            </a:r>
+          </a:p>
+          <a:p>
+            <a:pPr lvl="2"/>
+            <a:r>
+              <a:rPr lang="en-US" dirty="0"/>
+              <a:t>Third level</a:t>
+            </a:r>
+          </a:p>
+          <a:p>
+            <a:pPr lvl="3"/>
+            <a:r>
+              <a:rPr lang="en-US" dirty="0"/>
+              <a:t>Fourth level</a:t>
+            </a:r>
+          </a:p>
+          <a:p>
+            <a:pPr lvl="4"/>
+            <a:r>
+              <a:rPr lang="en-US" dirty="0"/>
+              <a:t>Fifth level</a:t>
+            </a:r>
+            <a:endParaRPr lang="en-PE" dirty="0"/>
+          </a:p>
+        </p:txBody>
+      </p:sp>
+      <p:sp>
+        <p:nvSpPr>
+          <p:cNvPr id="15" name="Content Placeholder 5">
+            <a:extLst>
+              <a:ext uri="{FF2B5EF4-FFF2-40B4-BE49-F238E27FC236}">
+                <ns3:creationId id="{90549C15-2749-16D6-FCA5-952FD115553E}"/>
+              </a:ext>
+            </a:extLst>
+          </p:cNvPr>
+          <p:cNvSpPr>
+            <a:spLocks noGrp="1"/>
+          </p:cNvSpPr>
+          <p:nvPr>
+            <p:ph sz="quarter" idx="15"/>
+          </p:nvPr>
+        </p:nvSpPr>
+        <p:spPr>
+          <a:xfrm>
+            <a:off x="5281701" y="2885037"/>
+            <a:ext cx="1737928" cy="1738800"/>
+          </a:xfrm>
+        </p:spPr>
+        <p:txBody>
+          <a:bodyPr/>
+          <a:lstStyle/>
+          <a:p>
+            <a:pPr lvl="0"/>
+            <a:r>
+              <a:rPr lang="en-US" dirty="0"/>
+              <a:t>Click to edit Master text styles</a:t>
+            </a:r>
+          </a:p>
+          <a:p>
+            <a:pPr lvl="1"/>
+            <a:r>
+              <a:rPr lang="en-US" dirty="0"/>
+              <a:t>Second level</a:t>
+            </a:r>
+          </a:p>
+          <a:p>
+            <a:pPr lvl="2"/>
+            <a:r>
+              <a:rPr lang="en-US" dirty="0"/>
+              <a:t>Third level</a:t>
+            </a:r>
+          </a:p>
+          <a:p>
+            <a:pPr lvl="3"/>
+            <a:r>
+              <a:rPr lang="en-US" dirty="0"/>
+              <a:t>Fourth level</a:t>
+            </a:r>
+          </a:p>
+          <a:p>
+            <a:pPr lvl="4"/>
+            <a:r>
+              <a:rPr lang="en-US" dirty="0"/>
+              <a:t>Fifth level</a:t>
+            </a:r>
+            <a:endParaRPr lang="en-PE" dirty="0"/>
+          </a:p>
+        </p:txBody>
+      </p:sp>
+    </p:spTree>
+    <p:extLst>
+      <p:ext uri="{BB962C8B-B14F-4D97-AF65-F5344CB8AC3E}">
+        <p14:creationId val="1490820941"/>
+      </p:ext>
+    </p:extLst>
+  </p:cSld>
+  <p:clrMapOvr>
+    <a:masterClrMapping/>
+  </p:clrMapOvr>
+  <p:extLst>
+    <p:ext uri="{DCECCB84-F9BA-43D5-87BE-67443E8EF086}">
+      <p15:sldGuideLst>
+        <p15:guide id="1" orient="horz" pos="4088">
+          <p15:clr>
+            <a:srgbClr val="E4A34C"/>
+          </p15:clr>
+        </p15:guide>
+        <p15:guide id="2" pos="7446">
+          <p15:clr>
+            <a:srgbClr val="E4A34C"/>
+          </p15:clr>
+        </p15:guide>
+      </p15:sldGuideLst>
+    </p:ext>
+  </p:extLst>
+</p:sldLayout>
+</file>
+
 <file path=ppt/slideLayouts/slideLayout3.xml><?xml version="1.0" encoding="utf-8"?>
 <p:sldLayout xmlns:a="http://schemas.openxmlformats.org/drawingml/2006/main" xmlns:ns2="http://schemas.microsoft.com/office/drawing/2014/main" xmlns:p="http://schemas.openxmlformats.org/presentationml/2006/main" xmlns:p14="http://schemas.microsoft.com/office/powerpoint/2010/main" xmlns:r="http://schemas.openxmlformats.org/officeDocument/2006/relationships" preserve="1" userDrawn="1">
   <p:cSld name="Graficos">
@@ -19473,6 +19985,7 @@
     <p:sldLayoutId id="2147483722" r:id="rId22"/>
     <p:sldLayoutId id="2147483688" r:id="rId23"/>
     <p:sldLayoutId id="2147483703" r:id="rId24"/>
+    <p:sldLayoutId id="2147483625" r:id="rId28"/>
   </p:sldLayoutIdLst>
   <p:txStyles xmlns:p="http://schemas.openxmlformats.org/presentationml/2006/main" xmlns:a="http://schemas.openxmlformats.org/drawingml/2006/main">
     <p:titleStyle>

--- a/api/inst/plantillas/plantilla_acnur_16_9.pptx
+++ b/api/inst/plantillas/plantilla_acnur_16_9.pptx
@@ -16856,6 +16856,1802 @@
 </p:sldLayout>
 </file>
 
+<file path=ppt/slideLayouts/slideLayout26.xml><?xml version="1.0" encoding="utf-8"?>
+<p:sldLayout xmlns:a="http://schemas.openxmlformats.org/drawingml/2006/main" xmlns:ns3="http://schemas.microsoft.com/office/drawing/2014/main" xmlns:p="http://schemas.openxmlformats.org/presentationml/2006/main" xmlns:p14="http://schemas.microsoft.com/office/powerpoint/2010/main" xmlns:p15="http://schemas.microsoft.com/office/powerpoint/2012/main" xmlns:r="http://schemas.openxmlformats.org/officeDocument/2006/relationships" matchingName="Dos objetos" preserve="1" userDrawn="1">
+  <p:cSld name="graficos_3_2mas1">
+    <p:spTree>
+      <p:nvGrpSpPr>
+        <p:cNvPr id="1" name="Shape 84"/>
+        <p:cNvGrpSpPr/>
+        <p:nvPr/>
+      </p:nvGrpSpPr>
+      <p:grpSpPr>
+        <a:xfrm>
+          <a:off x="0" y="0"/>
+          <a:ext cx="0" cy="0"/>
+          <a:chOff x="0" y="0"/>
+          <a:chExt cx="0" cy="0"/>
+        </a:xfrm>
+      </p:grpSpPr>
+      <p:sp>
+        <p:nvSpPr>
+          <p:cNvPr id="88" name="Google Shape;88;p51"/>
+          <p:cNvSpPr txBox="1">
+            <a:spLocks noGrp="1"/>
+          </p:cNvSpPr>
+          <p:nvPr>
+            <p:ph type="title"/>
+          </p:nvPr>
+        </p:nvSpPr>
+        <p:spPr>
+          <a:xfrm>
+            <a:off x="461464" y="338268"/>
+            <a:ext cx="9626752" cy="666595"/>
+          </a:xfrm>
+          <a:prstGeom prst="rect">
+            <a:avLst/>
+          </a:prstGeom>
+          <a:noFill/>
+          <a:ln>
+            <a:noFill/>
+          </a:ln>
+        </p:spPr>
+        <p:txBody>
+          <a:bodyPr spcFirstLastPara="1" wrap="square" lIns="91425" tIns="45700" rIns="91425" bIns="45700" anchor="ctr" anchorCtr="0">
+            <a:normAutofit/>
+          </a:bodyPr>
+          <a:lstStyle>
+            <a:lvl1pPr lvl="0" algn="l">
+              <a:lnSpc>
+                <a:spcPct val="90000"/>
+              </a:lnSpc>
+              <a:spcBef>
+                <a:spcPts val="0"/>
+              </a:spcBef>
+              <a:spcAft>
+                <a:spcPts val="0"/>
+              </a:spcAft>
+              <a:buClr>
+                <a:srgbClr val="CA5651"/>
+              </a:buClr>
+              <a:buSzPts val="2400"/>
+              <a:buFont typeface="Arial"/>
+              <a:buNone/>
+              <a:defRPr sz="2400" b="1" cap="none">
+                <a:solidFill>
+                  <a:srgbClr val="CA5651"/>
+                </a:solidFill>
+                <a:latin typeface="Arial"/>
+                <a:ea typeface="Arial"/>
+                <a:cs typeface="Arial"/>
+                <a:sym typeface="Arial"/>
+              </a:defRPr>
+            </a:lvl1pPr>
+            <a:lvl2pPr lvl="1" algn="l">
+              <a:lnSpc>
+                <a:spcPct val="100000"/>
+              </a:lnSpc>
+              <a:spcBef>
+                <a:spcPts val="0"/>
+              </a:spcBef>
+              <a:spcAft>
+                <a:spcPts val="0"/>
+              </a:spcAft>
+              <a:buSzPts val="1400"/>
+              <a:buNone/>
+              <a:defRPr sz="2400" b="1">
+                <a:latin typeface="Arial"/>
+                <a:solidFill>
+                  <a:srgbClr val="CA5651"/>
+                </a:solidFill>
+              </a:defRPr>
+            </a:lvl2pPr>
+            <a:lvl3pPr lvl="2" algn="l">
+              <a:lnSpc>
+                <a:spcPct val="100000"/>
+              </a:lnSpc>
+              <a:spcBef>
+                <a:spcPts val="0"/>
+              </a:spcBef>
+              <a:spcAft>
+                <a:spcPts val="0"/>
+              </a:spcAft>
+              <a:buSzPts val="1400"/>
+              <a:buNone/>
+              <a:defRPr sz="2400" b="1">
+                <a:latin typeface="Arial"/>
+                <a:solidFill>
+                  <a:srgbClr val="CA5651"/>
+                </a:solidFill>
+              </a:defRPr>
+            </a:lvl3pPr>
+            <a:lvl4pPr lvl="3" algn="l">
+              <a:lnSpc>
+                <a:spcPct val="100000"/>
+              </a:lnSpc>
+              <a:spcBef>
+                <a:spcPts val="0"/>
+              </a:spcBef>
+              <a:spcAft>
+                <a:spcPts val="0"/>
+              </a:spcAft>
+              <a:buSzPts val="1400"/>
+              <a:buNone/>
+              <a:defRPr sz="2400" b="1">
+                <a:latin typeface="Arial"/>
+                <a:solidFill>
+                  <a:srgbClr val="CA5651"/>
+                </a:solidFill>
+              </a:defRPr>
+            </a:lvl4pPr>
+            <a:lvl5pPr lvl="4" algn="l">
+              <a:lnSpc>
+                <a:spcPct val="100000"/>
+              </a:lnSpc>
+              <a:spcBef>
+                <a:spcPts val="0"/>
+              </a:spcBef>
+              <a:spcAft>
+                <a:spcPts val="0"/>
+              </a:spcAft>
+              <a:buSzPts val="1400"/>
+              <a:buNone/>
+              <a:defRPr sz="2400" b="1">
+                <a:latin typeface="Arial"/>
+                <a:solidFill>
+                  <a:srgbClr val="CA5651"/>
+                </a:solidFill>
+              </a:defRPr>
+            </a:lvl5pPr>
+            <a:lvl6pPr lvl="5" algn="l">
+              <a:lnSpc>
+                <a:spcPct val="100000"/>
+              </a:lnSpc>
+              <a:spcBef>
+                <a:spcPts val="0"/>
+              </a:spcBef>
+              <a:spcAft>
+                <a:spcPts val="0"/>
+              </a:spcAft>
+              <a:buSzPts val="1400"/>
+              <a:buNone/>
+              <a:defRPr sz="2400" b="1">
+                <a:latin typeface="Arial"/>
+                <a:solidFill>
+                  <a:srgbClr val="CA5651"/>
+                </a:solidFill>
+              </a:defRPr>
+            </a:lvl6pPr>
+            <a:lvl7pPr lvl="6" algn="l">
+              <a:lnSpc>
+                <a:spcPct val="100000"/>
+              </a:lnSpc>
+              <a:spcBef>
+                <a:spcPts val="0"/>
+              </a:spcBef>
+              <a:spcAft>
+                <a:spcPts val="0"/>
+              </a:spcAft>
+              <a:buSzPts val="1400"/>
+              <a:buNone/>
+              <a:defRPr sz="2400" b="1">
+                <a:latin typeface="Arial"/>
+                <a:solidFill>
+                  <a:srgbClr val="CA5651"/>
+                </a:solidFill>
+              </a:defRPr>
+            </a:lvl7pPr>
+            <a:lvl8pPr lvl="7" algn="l">
+              <a:lnSpc>
+                <a:spcPct val="100000"/>
+              </a:lnSpc>
+              <a:spcBef>
+                <a:spcPts val="0"/>
+              </a:spcBef>
+              <a:spcAft>
+                <a:spcPts val="0"/>
+              </a:spcAft>
+              <a:buSzPts val="1400"/>
+              <a:buNone/>
+              <a:defRPr sz="2400" b="1">
+                <a:latin typeface="Arial"/>
+                <a:solidFill>
+                  <a:srgbClr val="CA5651"/>
+                </a:solidFill>
+              </a:defRPr>
+            </a:lvl8pPr>
+            <a:lvl9pPr lvl="8" algn="l">
+              <a:lnSpc>
+                <a:spcPct val="100000"/>
+              </a:lnSpc>
+              <a:spcBef>
+                <a:spcPts val="0"/>
+              </a:spcBef>
+              <a:spcAft>
+                <a:spcPts val="0"/>
+              </a:spcAft>
+              <a:buSzPts val="1400"/>
+              <a:buNone/>
+              <a:defRPr sz="2400" b="1">
+                <a:latin typeface="Arial"/>
+                <a:solidFill>
+                  <a:srgbClr val="CA5651"/>
+                </a:solidFill>
+              </a:defRPr>
+            </a:lvl9pPr>
+          </a:lstStyle>
+          <a:p>
+            <a:r>
+              <a:rPr lang="es-MX" sz="2400" b="1">
+                <a:latin typeface="Arial"/>
+                <a:solidFill>
+                  <a:srgbClr val="CA5651"/>
+                </a:solidFill>
+              </a:rPr>
+              <a:t>Haz clic para modificar el estilo de título del patrón</a:t>
+            </a:r>
+            <a:endParaRPr dirty="0" sz="2400" b="1">
+              <a:latin typeface="Arial"/>
+              <a:solidFill>
+                <a:srgbClr val="CA5651"/>
+              </a:solidFill>
+            </a:endParaRPr>
+          </a:p>
+        </p:txBody>
+      </p:sp>
+      <p:sp>
+        <p:nvSpPr>
+          <p:cNvPr id="6" name="Picture Placeholder 5">
+            <a:extLst>
+              <a:ext uri="{FF2B5EF4-FFF2-40B4-BE49-F238E27FC236}">
+                <ns3:creationId id="{EB977788-EA90-94F5-A207-15EBBD7FEAB5}"/>
+              </a:ext>
+            </a:extLst>
+          </p:cNvPr>
+          <p:cNvSpPr>
+            <a:spLocks noGrp="1"/>
+          </p:cNvSpPr>
+          <p:nvPr>
+            <p:ph type="pic" sz="quarter" idx="10"/>
+          </p:nvPr>
+        </p:nvSpPr>
+        <p:spPr>
+          <a:xfrm>
+            <a:off x="461772" y="1212494"/>
+            <a:ext cx="4726534" cy="2345436"/>
+          </a:xfrm>
+        </p:spPr>
+        <p:txBody>
+          <a:bodyPr/>
+          <a:lstStyle/>
+          <a:p>
+            <a:endParaRPr lang="en-PE" dirty="0"/>
+          </a:p>
+          <a:p>
+            <a:endParaRPr lang="en-PE" dirty="0"/>
+          </a:p>
+        </p:txBody>
+      </p:sp>
+      <p:sp>
+        <p:nvSpPr>
+          <p:cNvPr id="7" name="Picture Placeholder 5">
+            <a:extLst>
+              <a:ext uri="{FF2B5EF4-FFF2-40B4-BE49-F238E27FC236}">
+                <ns3:creationId id="{0519FE1F-4FD7-A2A0-81FB-8DCD6F26C4FB}"/>
+              </a:ext>
+            </a:extLst>
+          </p:cNvPr>
+          <p:cNvSpPr>
+            <a:spLocks noGrp="1"/>
+          </p:cNvSpPr>
+          <p:nvPr>
+            <p:ph type="pic" sz="quarter" idx="11"/>
+          </p:nvPr>
+        </p:nvSpPr>
+        <p:spPr>
+          <a:xfrm>
+            <a:off x="461772" y="3754526"/>
+            <a:ext cx="4726534" cy="2345436"/>
+          </a:xfrm>
+        </p:spPr>
+        <p:txBody>
+          <a:bodyPr/>
+          <a:lstStyle/>
+          <a:p>
+            <a:endParaRPr lang="en-PE" dirty="0"/>
+          </a:p>
+        </p:txBody>
+      </p:sp>
+      <p:sp>
+        <p:nvSpPr>
+          <p:cNvPr id="8" name="Picture Placeholder 5">
+            <a:extLst>
+              <a:ext uri="{FF2B5EF4-FFF2-40B4-BE49-F238E27FC236}">
+                <ns3:creationId id="{358A77CA-4946-E677-D51B-A8CE149E91B8}"/>
+              </a:ext>
+            </a:extLst>
+          </p:cNvPr>
+          <p:cNvSpPr>
+            <a:spLocks noGrp="1"/>
+          </p:cNvSpPr>
+          <p:nvPr>
+            <p:ph type="pic" sz="quarter" idx="12"/>
+          </p:nvPr>
+        </p:nvSpPr>
+        <p:spPr>
+          <a:xfrm>
+            <a:off x="7113118" y="1212494"/>
+            <a:ext cx="4726534" cy="4887468"/>
+          </a:xfrm>
+        </p:spPr>
+        <p:txBody>
+          <a:bodyPr/>
+          <a:lstStyle/>
+          <a:p>
+            <a:endParaRPr lang="en-PE" dirty="0"/>
+          </a:p>
+          <a:p>
+            <a:endParaRPr lang="en-PE" dirty="0"/>
+          </a:p>
+        </p:txBody>
+      </p:sp>
+      <p:sp>
+        <p:nvSpPr>
+          <p:cNvPr id="2" name="Text Placeholder 9">
+            <a:extLst>
+              <a:ext uri="{FF2B5EF4-FFF2-40B4-BE49-F238E27FC236}">
+                <ns3:creationId id="{0C929747-7B86-54B8-A590-1398C659B7EC}"/>
+              </a:ext>
+            </a:extLst>
+          </p:cNvPr>
+          <p:cNvSpPr>
+            <a:spLocks noGrp="1"/>
+          </p:cNvSpPr>
+          <p:nvPr>
+            <p:ph type="body" sz="quarter" idx="14"/>
+          </p:nvPr>
+        </p:nvSpPr>
+        <p:spPr>
+          <a:xfrm>
+            <a:off x="461464" y="6320500"/>
+            <a:ext cx="4503738" cy="398463"/>
+          </a:xfrm>
+        </p:spPr>
+        <p:txBody>
+          <a:bodyPr>
+            <a:noAutofit/>
+          </a:bodyPr>
+          <a:lstStyle>
+            <a:lvl1pPr>
+              <a:defRPr sz="1100"/>
+            </a:lvl1pPr>
+            <a:lvl2pPr>
+              <a:defRPr sz="1000"/>
+            </a:lvl2pPr>
+            <a:lvl3pPr>
+              <a:defRPr sz="1000"/>
+            </a:lvl3pPr>
+            <a:lvl4pPr>
+              <a:defRPr sz="1000"/>
+            </a:lvl4pPr>
+            <a:lvl5pPr>
+              <a:defRPr sz="1000"/>
+            </a:lvl5pPr>
+          </a:lstStyle>
+          <a:p>
+            <a:pPr lvl="0"/>
+            <a:r>
+              <a:rPr lang="en-US" dirty="0"/>
+              <a:t>Click to edit Master text styles</a:t>
+            </a:r>
+          </a:p>
+          <a:p>
+            <a:pPr lvl="1"/>
+            <a:r>
+              <a:rPr lang="en-US" dirty="0"/>
+              <a:t>Second level</a:t>
+            </a:r>
+          </a:p>
+          <a:p>
+            <a:pPr lvl="2"/>
+            <a:r>
+              <a:rPr lang="en-US" dirty="0"/>
+              <a:t>Third level</a:t>
+            </a:r>
+          </a:p>
+          <a:p>
+            <a:pPr lvl="3"/>
+            <a:r>
+              <a:rPr lang="en-US" dirty="0"/>
+              <a:t>Fourth level</a:t>
+            </a:r>
+          </a:p>
+          <a:p>
+            <a:pPr lvl="4"/>
+            <a:r>
+              <a:rPr lang="en-US" dirty="0"/>
+              <a:t>Fifth level</a:t>
+            </a:r>
+            <a:endParaRPr lang="en-PE" dirty="0"/>
+          </a:p>
+        </p:txBody>
+      </p:sp>
+    </p:spTree>
+    <p:extLst>
+      <p:ext uri="{BB962C8B-B14F-4D97-AF65-F5344CB8AC3E}">
+        <p14:creationId val="1490820941"/>
+      </p:ext>
+    </p:extLst>
+  </p:cSld>
+  <p:clrMapOvr>
+    <a:masterClrMapping/>
+  </p:clrMapOvr>
+  <p:extLst>
+    <p:ext uri="{DCECCB84-F9BA-43D5-87BE-67443E8EF086}">
+      <p15:sldGuideLst>
+        <p15:guide id="1" orient="horz" pos="4088">
+          <p15:clr>
+            <a:srgbClr val="E4A34C"/>
+          </p15:clr>
+        </p15:guide>
+        <p15:guide id="2" pos="7446">
+          <p15:clr>
+            <a:srgbClr val="E4A34C"/>
+          </p15:clr>
+        </p15:guide>
+      </p15:sldGuideLst>
+    </p:ext>
+  </p:extLst>
+</p:sldLayout>
+</file>
+
+<file path=ppt/slideLayouts/slideLayout27.xml><?xml version="1.0" encoding="utf-8"?>
+<p:sldLayout xmlns:a="http://schemas.openxmlformats.org/drawingml/2006/main" xmlns:ns3="http://schemas.microsoft.com/office/drawing/2014/main" xmlns:p="http://schemas.openxmlformats.org/presentationml/2006/main" xmlns:p14="http://schemas.microsoft.com/office/powerpoint/2010/main" xmlns:p15="http://schemas.microsoft.com/office/powerpoint/2012/main" xmlns:r="http://schemas.openxmlformats.org/officeDocument/2006/relationships" matchingName="Dos objetos" preserve="1" userDrawn="1">
+  <p:cSld name="graficos_3_1mas2">
+    <p:spTree>
+      <p:nvGrpSpPr>
+        <p:cNvPr id="1" name="Shape 84"/>
+        <p:cNvGrpSpPr/>
+        <p:nvPr/>
+      </p:nvGrpSpPr>
+      <p:grpSpPr>
+        <a:xfrm>
+          <a:off x="0" y="0"/>
+          <a:ext cx="0" cy="0"/>
+          <a:chOff x="0" y="0"/>
+          <a:chExt cx="0" cy="0"/>
+        </a:xfrm>
+      </p:grpSpPr>
+      <p:sp>
+        <p:nvSpPr>
+          <p:cNvPr id="88" name="Google Shape;88;p51"/>
+          <p:cNvSpPr txBox="1">
+            <a:spLocks noGrp="1"/>
+          </p:cNvSpPr>
+          <p:nvPr>
+            <p:ph type="title"/>
+          </p:nvPr>
+        </p:nvSpPr>
+        <p:spPr>
+          <a:xfrm>
+            <a:off x="461464" y="338268"/>
+            <a:ext cx="9626752" cy="666595"/>
+          </a:xfrm>
+          <a:prstGeom prst="rect">
+            <a:avLst/>
+          </a:prstGeom>
+          <a:noFill/>
+          <a:ln>
+            <a:noFill/>
+          </a:ln>
+        </p:spPr>
+        <p:txBody>
+          <a:bodyPr spcFirstLastPara="1" wrap="square" lIns="91425" tIns="45700" rIns="91425" bIns="45700" anchor="ctr" anchorCtr="0">
+            <a:normAutofit/>
+          </a:bodyPr>
+          <a:lstStyle>
+            <a:lvl1pPr lvl="0" algn="l">
+              <a:lnSpc>
+                <a:spcPct val="90000"/>
+              </a:lnSpc>
+              <a:spcBef>
+                <a:spcPts val="0"/>
+              </a:spcBef>
+              <a:spcAft>
+                <a:spcPts val="0"/>
+              </a:spcAft>
+              <a:buClr>
+                <a:srgbClr val="CA5651"/>
+              </a:buClr>
+              <a:buSzPts val="2400"/>
+              <a:buFont typeface="Arial"/>
+              <a:buNone/>
+              <a:defRPr sz="2400" b="1" cap="none">
+                <a:solidFill>
+                  <a:srgbClr val="CA5651"/>
+                </a:solidFill>
+                <a:latin typeface="Arial"/>
+                <a:ea typeface="Arial"/>
+                <a:cs typeface="Arial"/>
+                <a:sym typeface="Arial"/>
+              </a:defRPr>
+            </a:lvl1pPr>
+            <a:lvl2pPr lvl="1" algn="l">
+              <a:lnSpc>
+                <a:spcPct val="100000"/>
+              </a:lnSpc>
+              <a:spcBef>
+                <a:spcPts val="0"/>
+              </a:spcBef>
+              <a:spcAft>
+                <a:spcPts val="0"/>
+              </a:spcAft>
+              <a:buSzPts val="1400"/>
+              <a:buNone/>
+              <a:defRPr sz="2400" b="1">
+                <a:latin typeface="Arial"/>
+                <a:solidFill>
+                  <a:srgbClr val="CA5651"/>
+                </a:solidFill>
+              </a:defRPr>
+            </a:lvl2pPr>
+            <a:lvl3pPr lvl="2" algn="l">
+              <a:lnSpc>
+                <a:spcPct val="100000"/>
+              </a:lnSpc>
+              <a:spcBef>
+                <a:spcPts val="0"/>
+              </a:spcBef>
+              <a:spcAft>
+                <a:spcPts val="0"/>
+              </a:spcAft>
+              <a:buSzPts val="1400"/>
+              <a:buNone/>
+              <a:defRPr sz="2400" b="1">
+                <a:latin typeface="Arial"/>
+                <a:solidFill>
+                  <a:srgbClr val="CA5651"/>
+                </a:solidFill>
+              </a:defRPr>
+            </a:lvl3pPr>
+            <a:lvl4pPr lvl="3" algn="l">
+              <a:lnSpc>
+                <a:spcPct val="100000"/>
+              </a:lnSpc>
+              <a:spcBef>
+                <a:spcPts val="0"/>
+              </a:spcBef>
+              <a:spcAft>
+                <a:spcPts val="0"/>
+              </a:spcAft>
+              <a:buSzPts val="1400"/>
+              <a:buNone/>
+              <a:defRPr sz="2400" b="1">
+                <a:latin typeface="Arial"/>
+                <a:solidFill>
+                  <a:srgbClr val="CA5651"/>
+                </a:solidFill>
+              </a:defRPr>
+            </a:lvl4pPr>
+            <a:lvl5pPr lvl="4" algn="l">
+              <a:lnSpc>
+                <a:spcPct val="100000"/>
+              </a:lnSpc>
+              <a:spcBef>
+                <a:spcPts val="0"/>
+              </a:spcBef>
+              <a:spcAft>
+                <a:spcPts val="0"/>
+              </a:spcAft>
+              <a:buSzPts val="1400"/>
+              <a:buNone/>
+              <a:defRPr sz="2400" b="1">
+                <a:latin typeface="Arial"/>
+                <a:solidFill>
+                  <a:srgbClr val="CA5651"/>
+                </a:solidFill>
+              </a:defRPr>
+            </a:lvl5pPr>
+            <a:lvl6pPr lvl="5" algn="l">
+              <a:lnSpc>
+                <a:spcPct val="100000"/>
+              </a:lnSpc>
+              <a:spcBef>
+                <a:spcPts val="0"/>
+              </a:spcBef>
+              <a:spcAft>
+                <a:spcPts val="0"/>
+              </a:spcAft>
+              <a:buSzPts val="1400"/>
+              <a:buNone/>
+              <a:defRPr sz="2400" b="1">
+                <a:latin typeface="Arial"/>
+                <a:solidFill>
+                  <a:srgbClr val="CA5651"/>
+                </a:solidFill>
+              </a:defRPr>
+            </a:lvl6pPr>
+            <a:lvl7pPr lvl="6" algn="l">
+              <a:lnSpc>
+                <a:spcPct val="100000"/>
+              </a:lnSpc>
+              <a:spcBef>
+                <a:spcPts val="0"/>
+              </a:spcBef>
+              <a:spcAft>
+                <a:spcPts val="0"/>
+              </a:spcAft>
+              <a:buSzPts val="1400"/>
+              <a:buNone/>
+              <a:defRPr sz="2400" b="1">
+                <a:latin typeface="Arial"/>
+                <a:solidFill>
+                  <a:srgbClr val="CA5651"/>
+                </a:solidFill>
+              </a:defRPr>
+            </a:lvl7pPr>
+            <a:lvl8pPr lvl="7" algn="l">
+              <a:lnSpc>
+                <a:spcPct val="100000"/>
+              </a:lnSpc>
+              <a:spcBef>
+                <a:spcPts val="0"/>
+              </a:spcBef>
+              <a:spcAft>
+                <a:spcPts val="0"/>
+              </a:spcAft>
+              <a:buSzPts val="1400"/>
+              <a:buNone/>
+              <a:defRPr sz="2400" b="1">
+                <a:latin typeface="Arial"/>
+                <a:solidFill>
+                  <a:srgbClr val="CA5651"/>
+                </a:solidFill>
+              </a:defRPr>
+            </a:lvl8pPr>
+            <a:lvl9pPr lvl="8" algn="l">
+              <a:lnSpc>
+                <a:spcPct val="100000"/>
+              </a:lnSpc>
+              <a:spcBef>
+                <a:spcPts val="0"/>
+              </a:spcBef>
+              <a:spcAft>
+                <a:spcPts val="0"/>
+              </a:spcAft>
+              <a:buSzPts val="1400"/>
+              <a:buNone/>
+              <a:defRPr sz="2400" b="1">
+                <a:latin typeface="Arial"/>
+                <a:solidFill>
+                  <a:srgbClr val="CA5651"/>
+                </a:solidFill>
+              </a:defRPr>
+            </a:lvl9pPr>
+          </a:lstStyle>
+          <a:p>
+            <a:r>
+              <a:rPr lang="es-MX" sz="2400" b="1">
+                <a:latin typeface="Arial"/>
+                <a:solidFill>
+                  <a:srgbClr val="CA5651"/>
+                </a:solidFill>
+              </a:rPr>
+              <a:t>Haz clic para modificar el estilo de título del patrón</a:t>
+            </a:r>
+            <a:endParaRPr dirty="0" sz="2400" b="1">
+              <a:latin typeface="Arial"/>
+              <a:solidFill>
+                <a:srgbClr val="CA5651"/>
+              </a:solidFill>
+            </a:endParaRPr>
+          </a:p>
+        </p:txBody>
+      </p:sp>
+      <p:sp>
+        <p:nvSpPr>
+          <p:cNvPr id="6" name="Picture Placeholder 5">
+            <a:extLst>
+              <a:ext uri="{FF2B5EF4-FFF2-40B4-BE49-F238E27FC236}">
+                <ns3:creationId id="{EB977788-EA90-94F5-A207-15EBBD7FEAB5}"/>
+              </a:ext>
+            </a:extLst>
+          </p:cNvPr>
+          <p:cNvSpPr>
+            <a:spLocks noGrp="1"/>
+          </p:cNvSpPr>
+          <p:nvPr>
+            <p:ph type="pic" sz="quarter" idx="10"/>
+          </p:nvPr>
+        </p:nvSpPr>
+        <p:spPr>
+          <a:xfrm>
+            <a:off x="461772" y="1212494"/>
+            <a:ext cx="4726534" cy="4887468"/>
+          </a:xfrm>
+        </p:spPr>
+        <p:txBody>
+          <a:bodyPr/>
+          <a:lstStyle/>
+          <a:p>
+            <a:endParaRPr lang="en-PE" dirty="0"/>
+          </a:p>
+          <a:p>
+            <a:endParaRPr lang="en-PE" dirty="0"/>
+          </a:p>
+        </p:txBody>
+      </p:sp>
+      <p:sp>
+        <p:nvSpPr>
+          <p:cNvPr id="7" name="Picture Placeholder 5">
+            <a:extLst>
+              <a:ext uri="{FF2B5EF4-FFF2-40B4-BE49-F238E27FC236}">
+                <ns3:creationId id="{0519FE1F-4FD7-A2A0-81FB-8DCD6F26C4FB}"/>
+              </a:ext>
+            </a:extLst>
+          </p:cNvPr>
+          <p:cNvSpPr>
+            <a:spLocks noGrp="1"/>
+          </p:cNvSpPr>
+          <p:nvPr>
+            <p:ph type="pic" sz="quarter" idx="11"/>
+          </p:nvPr>
+        </p:nvSpPr>
+        <p:spPr>
+          <a:xfrm>
+            <a:off x="7113118" y="1212494"/>
+            <a:ext cx="4726534" cy="2345436"/>
+          </a:xfrm>
+        </p:spPr>
+        <p:txBody>
+          <a:bodyPr/>
+          <a:lstStyle/>
+          <a:p>
+            <a:endParaRPr lang="en-PE" dirty="0"/>
+          </a:p>
+        </p:txBody>
+      </p:sp>
+      <p:sp>
+        <p:nvSpPr>
+          <p:cNvPr id="8" name="Picture Placeholder 5">
+            <a:extLst>
+              <a:ext uri="{FF2B5EF4-FFF2-40B4-BE49-F238E27FC236}">
+                <ns3:creationId id="{358A77CA-4946-E677-D51B-A8CE149E91B8}"/>
+              </a:ext>
+            </a:extLst>
+          </p:cNvPr>
+          <p:cNvSpPr>
+            <a:spLocks noGrp="1"/>
+          </p:cNvSpPr>
+          <p:nvPr>
+            <p:ph type="pic" sz="quarter" idx="12"/>
+          </p:nvPr>
+        </p:nvSpPr>
+        <p:spPr>
+          <a:xfrm>
+            <a:off x="7113118" y="3754526"/>
+            <a:ext cx="4726534" cy="2345436"/>
+          </a:xfrm>
+        </p:spPr>
+        <p:txBody>
+          <a:bodyPr/>
+          <a:lstStyle/>
+          <a:p>
+            <a:endParaRPr lang="en-PE" dirty="0"/>
+          </a:p>
+          <a:p>
+            <a:endParaRPr lang="en-PE" dirty="0"/>
+          </a:p>
+        </p:txBody>
+      </p:sp>
+      <p:sp>
+        <p:nvSpPr>
+          <p:cNvPr id="2" name="Text Placeholder 9">
+            <a:extLst>
+              <a:ext uri="{FF2B5EF4-FFF2-40B4-BE49-F238E27FC236}">
+                <ns3:creationId id="{0C929747-7B86-54B8-A590-1398C659B7EC}"/>
+              </a:ext>
+            </a:extLst>
+          </p:cNvPr>
+          <p:cNvSpPr>
+            <a:spLocks noGrp="1"/>
+          </p:cNvSpPr>
+          <p:nvPr>
+            <p:ph type="body" sz="quarter" idx="14"/>
+          </p:nvPr>
+        </p:nvSpPr>
+        <p:spPr>
+          <a:xfrm>
+            <a:off x="461464" y="6320500"/>
+            <a:ext cx="4503738" cy="398463"/>
+          </a:xfrm>
+        </p:spPr>
+        <p:txBody>
+          <a:bodyPr>
+            <a:noAutofit/>
+          </a:bodyPr>
+          <a:lstStyle>
+            <a:lvl1pPr>
+              <a:defRPr sz="1100"/>
+            </a:lvl1pPr>
+            <a:lvl2pPr>
+              <a:defRPr sz="1000"/>
+            </a:lvl2pPr>
+            <a:lvl3pPr>
+              <a:defRPr sz="1000"/>
+            </a:lvl3pPr>
+            <a:lvl4pPr>
+              <a:defRPr sz="1000"/>
+            </a:lvl4pPr>
+            <a:lvl5pPr>
+              <a:defRPr sz="1000"/>
+            </a:lvl5pPr>
+          </a:lstStyle>
+          <a:p>
+            <a:pPr lvl="0"/>
+            <a:r>
+              <a:rPr lang="en-US" dirty="0"/>
+              <a:t>Click to edit Master text styles</a:t>
+            </a:r>
+          </a:p>
+          <a:p>
+            <a:pPr lvl="1"/>
+            <a:r>
+              <a:rPr lang="en-US" dirty="0"/>
+              <a:t>Second level</a:t>
+            </a:r>
+          </a:p>
+          <a:p>
+            <a:pPr lvl="2"/>
+            <a:r>
+              <a:rPr lang="en-US" dirty="0"/>
+              <a:t>Third level</a:t>
+            </a:r>
+          </a:p>
+          <a:p>
+            <a:pPr lvl="3"/>
+            <a:r>
+              <a:rPr lang="en-US" dirty="0"/>
+              <a:t>Fourth level</a:t>
+            </a:r>
+          </a:p>
+          <a:p>
+            <a:pPr lvl="4"/>
+            <a:r>
+              <a:rPr lang="en-US" dirty="0"/>
+              <a:t>Fifth level</a:t>
+            </a:r>
+            <a:endParaRPr lang="en-PE" dirty="0"/>
+          </a:p>
+        </p:txBody>
+      </p:sp>
+    </p:spTree>
+    <p:extLst>
+      <p:ext uri="{BB962C8B-B14F-4D97-AF65-F5344CB8AC3E}">
+        <p14:creationId val="1490820941"/>
+      </p:ext>
+    </p:extLst>
+  </p:cSld>
+  <p:clrMapOvr>
+    <a:masterClrMapping/>
+  </p:clrMapOvr>
+  <p:extLst>
+    <p:ext uri="{DCECCB84-F9BA-43D5-87BE-67443E8EF086}">
+      <p15:sldGuideLst>
+        <p15:guide id="1" orient="horz" pos="4088">
+          <p15:clr>
+            <a:srgbClr val="E4A34C"/>
+          </p15:clr>
+        </p15:guide>
+        <p15:guide id="2" pos="7446">
+          <p15:clr>
+            <a:srgbClr val="E4A34C"/>
+          </p15:clr>
+        </p15:guide>
+      </p15:sldGuideLst>
+    </p:ext>
+  </p:extLst>
+</p:sldLayout>
+</file>
+
+<file path=ppt/slideLayouts/slideLayout28.xml><?xml version="1.0" encoding="utf-8"?>
+<p:sldLayout xmlns:a="http://schemas.openxmlformats.org/drawingml/2006/main" xmlns:ns3="http://schemas.microsoft.com/office/drawing/2014/main" xmlns:p="http://schemas.openxmlformats.org/presentationml/2006/main" xmlns:p14="http://schemas.microsoft.com/office/powerpoint/2010/main" xmlns:p15="http://schemas.microsoft.com/office/powerpoint/2012/main" xmlns:r="http://schemas.openxmlformats.org/officeDocument/2006/relationships" matchingName="Dos objetos" preserve="1" userDrawn="1">
+  <p:cSld name="graficos_3_fila">
+    <p:spTree>
+      <p:nvGrpSpPr>
+        <p:cNvPr id="1" name="Shape 84"/>
+        <p:cNvGrpSpPr/>
+        <p:nvPr/>
+      </p:nvGrpSpPr>
+      <p:grpSpPr>
+        <a:xfrm>
+          <a:off x="0" y="0"/>
+          <a:ext cx="0" cy="0"/>
+          <a:chOff x="0" y="0"/>
+          <a:chExt cx="0" cy="0"/>
+        </a:xfrm>
+      </p:grpSpPr>
+      <p:sp>
+        <p:nvSpPr>
+          <p:cNvPr id="88" name="Google Shape;88;p51"/>
+          <p:cNvSpPr txBox="1">
+            <a:spLocks noGrp="1"/>
+          </p:cNvSpPr>
+          <p:nvPr>
+            <p:ph type="title"/>
+          </p:nvPr>
+        </p:nvSpPr>
+        <p:spPr>
+          <a:xfrm>
+            <a:off x="461464" y="338268"/>
+            <a:ext cx="9626752" cy="666595"/>
+          </a:xfrm>
+          <a:prstGeom prst="rect">
+            <a:avLst/>
+          </a:prstGeom>
+          <a:noFill/>
+          <a:ln>
+            <a:noFill/>
+          </a:ln>
+        </p:spPr>
+        <p:txBody>
+          <a:bodyPr spcFirstLastPara="1" wrap="square" lIns="91425" tIns="45700" rIns="91425" bIns="45700" anchor="ctr" anchorCtr="0">
+            <a:normAutofit/>
+          </a:bodyPr>
+          <a:lstStyle>
+            <a:lvl1pPr lvl="0" algn="l">
+              <a:lnSpc>
+                <a:spcPct val="90000"/>
+              </a:lnSpc>
+              <a:spcBef>
+                <a:spcPts val="0"/>
+              </a:spcBef>
+              <a:spcAft>
+                <a:spcPts val="0"/>
+              </a:spcAft>
+              <a:buClr>
+                <a:srgbClr val="CA5651"/>
+              </a:buClr>
+              <a:buSzPts val="2400"/>
+              <a:buFont typeface="Arial"/>
+              <a:buNone/>
+              <a:defRPr sz="2400" b="1" cap="none">
+                <a:solidFill>
+                  <a:srgbClr val="CA5651"/>
+                </a:solidFill>
+                <a:latin typeface="Arial"/>
+                <a:ea typeface="Arial"/>
+                <a:cs typeface="Arial"/>
+                <a:sym typeface="Arial"/>
+              </a:defRPr>
+            </a:lvl1pPr>
+            <a:lvl2pPr lvl="1" algn="l">
+              <a:lnSpc>
+                <a:spcPct val="100000"/>
+              </a:lnSpc>
+              <a:spcBef>
+                <a:spcPts val="0"/>
+              </a:spcBef>
+              <a:spcAft>
+                <a:spcPts val="0"/>
+              </a:spcAft>
+              <a:buSzPts val="1400"/>
+              <a:buNone/>
+              <a:defRPr sz="2400" b="1">
+                <a:latin typeface="Arial"/>
+                <a:solidFill>
+                  <a:srgbClr val="CA5651"/>
+                </a:solidFill>
+              </a:defRPr>
+            </a:lvl2pPr>
+            <a:lvl3pPr lvl="2" algn="l">
+              <a:lnSpc>
+                <a:spcPct val="100000"/>
+              </a:lnSpc>
+              <a:spcBef>
+                <a:spcPts val="0"/>
+              </a:spcBef>
+              <a:spcAft>
+                <a:spcPts val="0"/>
+              </a:spcAft>
+              <a:buSzPts val="1400"/>
+              <a:buNone/>
+              <a:defRPr sz="2400" b="1">
+                <a:latin typeface="Arial"/>
+                <a:solidFill>
+                  <a:srgbClr val="CA5651"/>
+                </a:solidFill>
+              </a:defRPr>
+            </a:lvl3pPr>
+            <a:lvl4pPr lvl="3" algn="l">
+              <a:lnSpc>
+                <a:spcPct val="100000"/>
+              </a:lnSpc>
+              <a:spcBef>
+                <a:spcPts val="0"/>
+              </a:spcBef>
+              <a:spcAft>
+                <a:spcPts val="0"/>
+              </a:spcAft>
+              <a:buSzPts val="1400"/>
+              <a:buNone/>
+              <a:defRPr sz="2400" b="1">
+                <a:latin typeface="Arial"/>
+                <a:solidFill>
+                  <a:srgbClr val="CA5651"/>
+                </a:solidFill>
+              </a:defRPr>
+            </a:lvl4pPr>
+            <a:lvl5pPr lvl="4" algn="l">
+              <a:lnSpc>
+                <a:spcPct val="100000"/>
+              </a:lnSpc>
+              <a:spcBef>
+                <a:spcPts val="0"/>
+              </a:spcBef>
+              <a:spcAft>
+                <a:spcPts val="0"/>
+              </a:spcAft>
+              <a:buSzPts val="1400"/>
+              <a:buNone/>
+              <a:defRPr sz="2400" b="1">
+                <a:latin typeface="Arial"/>
+                <a:solidFill>
+                  <a:srgbClr val="CA5651"/>
+                </a:solidFill>
+              </a:defRPr>
+            </a:lvl5pPr>
+            <a:lvl6pPr lvl="5" algn="l">
+              <a:lnSpc>
+                <a:spcPct val="100000"/>
+              </a:lnSpc>
+              <a:spcBef>
+                <a:spcPts val="0"/>
+              </a:spcBef>
+              <a:spcAft>
+                <a:spcPts val="0"/>
+              </a:spcAft>
+              <a:buSzPts val="1400"/>
+              <a:buNone/>
+              <a:defRPr sz="2400" b="1">
+                <a:latin typeface="Arial"/>
+                <a:solidFill>
+                  <a:srgbClr val="CA5651"/>
+                </a:solidFill>
+              </a:defRPr>
+            </a:lvl6pPr>
+            <a:lvl7pPr lvl="6" algn="l">
+              <a:lnSpc>
+                <a:spcPct val="100000"/>
+              </a:lnSpc>
+              <a:spcBef>
+                <a:spcPts val="0"/>
+              </a:spcBef>
+              <a:spcAft>
+                <a:spcPts val="0"/>
+              </a:spcAft>
+              <a:buSzPts val="1400"/>
+              <a:buNone/>
+              <a:defRPr sz="2400" b="1">
+                <a:latin typeface="Arial"/>
+                <a:solidFill>
+                  <a:srgbClr val="CA5651"/>
+                </a:solidFill>
+              </a:defRPr>
+            </a:lvl7pPr>
+            <a:lvl8pPr lvl="7" algn="l">
+              <a:lnSpc>
+                <a:spcPct val="100000"/>
+              </a:lnSpc>
+              <a:spcBef>
+                <a:spcPts val="0"/>
+              </a:spcBef>
+              <a:spcAft>
+                <a:spcPts val="0"/>
+              </a:spcAft>
+              <a:buSzPts val="1400"/>
+              <a:buNone/>
+              <a:defRPr sz="2400" b="1">
+                <a:latin typeface="Arial"/>
+                <a:solidFill>
+                  <a:srgbClr val="CA5651"/>
+                </a:solidFill>
+              </a:defRPr>
+            </a:lvl8pPr>
+            <a:lvl9pPr lvl="8" algn="l">
+              <a:lnSpc>
+                <a:spcPct val="100000"/>
+              </a:lnSpc>
+              <a:spcBef>
+                <a:spcPts val="0"/>
+              </a:spcBef>
+              <a:spcAft>
+                <a:spcPts val="0"/>
+              </a:spcAft>
+              <a:buSzPts val="1400"/>
+              <a:buNone/>
+              <a:defRPr sz="2400" b="1">
+                <a:latin typeface="Arial"/>
+                <a:solidFill>
+                  <a:srgbClr val="CA5651"/>
+                </a:solidFill>
+              </a:defRPr>
+            </a:lvl9pPr>
+          </a:lstStyle>
+          <a:p>
+            <a:r>
+              <a:rPr lang="es-MX" sz="2400" b="1">
+                <a:latin typeface="Arial"/>
+                <a:solidFill>
+                  <a:srgbClr val="CA5651"/>
+                </a:solidFill>
+              </a:rPr>
+              <a:t>Haz clic para modificar el estilo de título del patrón</a:t>
+            </a:r>
+            <a:endParaRPr dirty="0" sz="2400" b="1">
+              <a:latin typeface="Arial"/>
+              <a:solidFill>
+                <a:srgbClr val="CA5651"/>
+              </a:solidFill>
+            </a:endParaRPr>
+          </a:p>
+        </p:txBody>
+      </p:sp>
+      <p:sp>
+        <p:nvSpPr>
+          <p:cNvPr id="6" name="Picture Placeholder 5">
+            <a:extLst>
+              <a:ext uri="{FF2B5EF4-FFF2-40B4-BE49-F238E27FC236}">
+                <ns3:creationId id="{EB977788-EA90-94F5-A207-15EBBD7FEAB5}"/>
+              </a:ext>
+            </a:extLst>
+          </p:cNvPr>
+          <p:cNvSpPr>
+            <a:spLocks noGrp="1"/>
+          </p:cNvSpPr>
+          <p:nvPr>
+            <p:ph type="pic" sz="quarter" idx="10"/>
+          </p:nvPr>
+        </p:nvSpPr>
+        <p:spPr>
+          <a:xfrm>
+            <a:off x="461772" y="1212494"/>
+            <a:ext cx="3611880" cy="4887468"/>
+          </a:xfrm>
+        </p:spPr>
+        <p:txBody>
+          <a:bodyPr/>
+          <a:lstStyle/>
+          <a:p>
+            <a:endParaRPr lang="en-PE" dirty="0"/>
+          </a:p>
+          <a:p>
+            <a:endParaRPr lang="en-PE" dirty="0"/>
+          </a:p>
+        </p:txBody>
+      </p:sp>
+      <p:sp>
+        <p:nvSpPr>
+          <p:cNvPr id="7" name="Picture Placeholder 5">
+            <a:extLst>
+              <a:ext uri="{FF2B5EF4-FFF2-40B4-BE49-F238E27FC236}">
+                <ns3:creationId id="{0519FE1F-4FD7-A2A0-81FB-8DCD6F26C4FB}"/>
+              </a:ext>
+            </a:extLst>
+          </p:cNvPr>
+          <p:cNvSpPr>
+            <a:spLocks noGrp="1"/>
+          </p:cNvSpPr>
+          <p:nvPr>
+            <p:ph type="pic" sz="quarter" idx="11"/>
+          </p:nvPr>
+        </p:nvSpPr>
+        <p:spPr>
+          <a:xfrm>
+            <a:off x="4302252" y="1212494"/>
+            <a:ext cx="3611880" cy="4887468"/>
+          </a:xfrm>
+        </p:spPr>
+        <p:txBody>
+          <a:bodyPr/>
+          <a:lstStyle/>
+          <a:p>
+            <a:endParaRPr lang="en-PE" dirty="0"/>
+          </a:p>
+        </p:txBody>
+      </p:sp>
+      <p:sp>
+        <p:nvSpPr>
+          <p:cNvPr id="8" name="Picture Placeholder 5">
+            <a:extLst>
+              <a:ext uri="{FF2B5EF4-FFF2-40B4-BE49-F238E27FC236}">
+                <ns3:creationId id="{358A77CA-4946-E677-D51B-A8CE149E91B8}"/>
+              </a:ext>
+            </a:extLst>
+          </p:cNvPr>
+          <p:cNvSpPr>
+            <a:spLocks noGrp="1"/>
+          </p:cNvSpPr>
+          <p:nvPr>
+            <p:ph type="pic" sz="quarter" idx="12"/>
+          </p:nvPr>
+        </p:nvSpPr>
+        <p:spPr>
+          <a:xfrm>
+            <a:off x="8142732" y="1212494"/>
+            <a:ext cx="3611880" cy="4887468"/>
+          </a:xfrm>
+        </p:spPr>
+        <p:txBody>
+          <a:bodyPr/>
+          <a:lstStyle/>
+          <a:p>
+            <a:endParaRPr lang="en-PE" dirty="0"/>
+          </a:p>
+          <a:p>
+            <a:endParaRPr lang="en-PE" dirty="0"/>
+          </a:p>
+        </p:txBody>
+      </p:sp>
+      <p:sp>
+        <p:nvSpPr>
+          <p:cNvPr id="2" name="Text Placeholder 9">
+            <a:extLst>
+              <a:ext uri="{FF2B5EF4-FFF2-40B4-BE49-F238E27FC236}">
+                <ns3:creationId id="{0C929747-7B86-54B8-A590-1398C659B7EC}"/>
+              </a:ext>
+            </a:extLst>
+          </p:cNvPr>
+          <p:cNvSpPr>
+            <a:spLocks noGrp="1"/>
+          </p:cNvSpPr>
+          <p:nvPr>
+            <p:ph type="body" sz="quarter" idx="14"/>
+          </p:nvPr>
+        </p:nvSpPr>
+        <p:spPr>
+          <a:xfrm>
+            <a:off x="461464" y="6320500"/>
+            <a:ext cx="4503738" cy="398463"/>
+          </a:xfrm>
+        </p:spPr>
+        <p:txBody>
+          <a:bodyPr>
+            <a:noAutofit/>
+          </a:bodyPr>
+          <a:lstStyle>
+            <a:lvl1pPr>
+              <a:defRPr sz="1100"/>
+            </a:lvl1pPr>
+            <a:lvl2pPr>
+              <a:defRPr sz="1000"/>
+            </a:lvl2pPr>
+            <a:lvl3pPr>
+              <a:defRPr sz="1000"/>
+            </a:lvl3pPr>
+            <a:lvl4pPr>
+              <a:defRPr sz="1000"/>
+            </a:lvl4pPr>
+            <a:lvl5pPr>
+              <a:defRPr sz="1000"/>
+            </a:lvl5pPr>
+          </a:lstStyle>
+          <a:p>
+            <a:pPr lvl="0"/>
+            <a:r>
+              <a:rPr lang="en-US" dirty="0"/>
+              <a:t>Click to edit Master text styles</a:t>
+            </a:r>
+          </a:p>
+          <a:p>
+            <a:pPr lvl="1"/>
+            <a:r>
+              <a:rPr lang="en-US" dirty="0"/>
+              <a:t>Second level</a:t>
+            </a:r>
+          </a:p>
+          <a:p>
+            <a:pPr lvl="2"/>
+            <a:r>
+              <a:rPr lang="en-US" dirty="0"/>
+              <a:t>Third level</a:t>
+            </a:r>
+          </a:p>
+          <a:p>
+            <a:pPr lvl="3"/>
+            <a:r>
+              <a:rPr lang="en-US" dirty="0"/>
+              <a:t>Fourth level</a:t>
+            </a:r>
+          </a:p>
+          <a:p>
+            <a:pPr lvl="4"/>
+            <a:r>
+              <a:rPr lang="en-US" dirty="0"/>
+              <a:t>Fifth level</a:t>
+            </a:r>
+            <a:endParaRPr lang="en-PE" dirty="0"/>
+          </a:p>
+        </p:txBody>
+      </p:sp>
+    </p:spTree>
+    <p:extLst>
+      <p:ext uri="{BB962C8B-B14F-4D97-AF65-F5344CB8AC3E}">
+        <p14:creationId val="1490820941"/>
+      </p:ext>
+    </p:extLst>
+  </p:cSld>
+  <p:clrMapOvr>
+    <a:masterClrMapping/>
+  </p:clrMapOvr>
+  <p:extLst>
+    <p:ext uri="{DCECCB84-F9BA-43D5-87BE-67443E8EF086}">
+      <p15:sldGuideLst>
+        <p15:guide id="1" orient="horz" pos="4088">
+          <p15:clr>
+            <a:srgbClr val="E4A34C"/>
+          </p15:clr>
+        </p15:guide>
+        <p15:guide id="2" pos="7446">
+          <p15:clr>
+            <a:srgbClr val="E4A34C"/>
+          </p15:clr>
+        </p15:guide>
+      </p15:sldGuideLst>
+    </p:ext>
+  </p:extLst>
+</p:sldLayout>
+</file>
+
+<file path=ppt/slideLayouts/slideLayout29.xml><?xml version="1.0" encoding="utf-8"?>
+<p:sldLayout xmlns:a="http://schemas.openxmlformats.org/drawingml/2006/main" xmlns:ns3="http://schemas.microsoft.com/office/drawing/2014/main" xmlns:p="http://schemas.openxmlformats.org/presentationml/2006/main" xmlns:p14="http://schemas.microsoft.com/office/powerpoint/2010/main" xmlns:p15="http://schemas.microsoft.com/office/powerpoint/2012/main" xmlns:r="http://schemas.openxmlformats.org/officeDocument/2006/relationships" matchingName="Dos objetos" preserve="1" userDrawn="1">
+  <p:cSld name="graficos_3_1arriba">
+    <p:spTree>
+      <p:nvGrpSpPr>
+        <p:cNvPr id="1" name="Shape 84"/>
+        <p:cNvGrpSpPr/>
+        <p:nvPr/>
+      </p:nvGrpSpPr>
+      <p:grpSpPr>
+        <a:xfrm>
+          <a:off x="0" y="0"/>
+          <a:ext cx="0" cy="0"/>
+          <a:chOff x="0" y="0"/>
+          <a:chExt cx="0" cy="0"/>
+        </a:xfrm>
+      </p:grpSpPr>
+      <p:sp>
+        <p:nvSpPr>
+          <p:cNvPr id="88" name="Google Shape;88;p51"/>
+          <p:cNvSpPr txBox="1">
+            <a:spLocks noGrp="1"/>
+          </p:cNvSpPr>
+          <p:nvPr>
+            <p:ph type="title"/>
+          </p:nvPr>
+        </p:nvSpPr>
+        <p:spPr>
+          <a:xfrm>
+            <a:off x="461464" y="338268"/>
+            <a:ext cx="9626752" cy="666595"/>
+          </a:xfrm>
+          <a:prstGeom prst="rect">
+            <a:avLst/>
+          </a:prstGeom>
+          <a:noFill/>
+          <a:ln>
+            <a:noFill/>
+          </a:ln>
+        </p:spPr>
+        <p:txBody>
+          <a:bodyPr spcFirstLastPara="1" wrap="square" lIns="91425" tIns="45700" rIns="91425" bIns="45700" anchor="ctr" anchorCtr="0">
+            <a:normAutofit/>
+          </a:bodyPr>
+          <a:lstStyle>
+            <a:lvl1pPr lvl="0" algn="l">
+              <a:lnSpc>
+                <a:spcPct val="90000"/>
+              </a:lnSpc>
+              <a:spcBef>
+                <a:spcPts val="0"/>
+              </a:spcBef>
+              <a:spcAft>
+                <a:spcPts val="0"/>
+              </a:spcAft>
+              <a:buClr>
+                <a:srgbClr val="CA5651"/>
+              </a:buClr>
+              <a:buSzPts val="2400"/>
+              <a:buFont typeface="Arial"/>
+              <a:buNone/>
+              <a:defRPr sz="2400" b="1" cap="none">
+                <a:solidFill>
+                  <a:srgbClr val="CA5651"/>
+                </a:solidFill>
+                <a:latin typeface="Arial"/>
+                <a:ea typeface="Arial"/>
+                <a:cs typeface="Arial"/>
+                <a:sym typeface="Arial"/>
+              </a:defRPr>
+            </a:lvl1pPr>
+            <a:lvl2pPr lvl="1" algn="l">
+              <a:lnSpc>
+                <a:spcPct val="100000"/>
+              </a:lnSpc>
+              <a:spcBef>
+                <a:spcPts val="0"/>
+              </a:spcBef>
+              <a:spcAft>
+                <a:spcPts val="0"/>
+              </a:spcAft>
+              <a:buSzPts val="1400"/>
+              <a:buNone/>
+              <a:defRPr sz="2400" b="1">
+                <a:latin typeface="Arial"/>
+                <a:solidFill>
+                  <a:srgbClr val="CA5651"/>
+                </a:solidFill>
+              </a:defRPr>
+            </a:lvl2pPr>
+            <a:lvl3pPr lvl="2" algn="l">
+              <a:lnSpc>
+                <a:spcPct val="100000"/>
+              </a:lnSpc>
+              <a:spcBef>
+                <a:spcPts val="0"/>
+              </a:spcBef>
+              <a:spcAft>
+                <a:spcPts val="0"/>
+              </a:spcAft>
+              <a:buSzPts val="1400"/>
+              <a:buNone/>
+              <a:defRPr sz="2400" b="1">
+                <a:latin typeface="Arial"/>
+                <a:solidFill>
+                  <a:srgbClr val="CA5651"/>
+                </a:solidFill>
+              </a:defRPr>
+            </a:lvl3pPr>
+            <a:lvl4pPr lvl="3" algn="l">
+              <a:lnSpc>
+                <a:spcPct val="100000"/>
+              </a:lnSpc>
+              <a:spcBef>
+                <a:spcPts val="0"/>
+              </a:spcBef>
+              <a:spcAft>
+                <a:spcPts val="0"/>
+              </a:spcAft>
+              <a:buSzPts val="1400"/>
+              <a:buNone/>
+              <a:defRPr sz="2400" b="1">
+                <a:latin typeface="Arial"/>
+                <a:solidFill>
+                  <a:srgbClr val="CA5651"/>
+                </a:solidFill>
+              </a:defRPr>
+            </a:lvl4pPr>
+            <a:lvl5pPr lvl="4" algn="l">
+              <a:lnSpc>
+                <a:spcPct val="100000"/>
+              </a:lnSpc>
+              <a:spcBef>
+                <a:spcPts val="0"/>
+              </a:spcBef>
+              <a:spcAft>
+                <a:spcPts val="0"/>
+              </a:spcAft>
+              <a:buSzPts val="1400"/>
+              <a:buNone/>
+              <a:defRPr sz="2400" b="1">
+                <a:latin typeface="Arial"/>
+                <a:solidFill>
+                  <a:srgbClr val="CA5651"/>
+                </a:solidFill>
+              </a:defRPr>
+            </a:lvl5pPr>
+            <a:lvl6pPr lvl="5" algn="l">
+              <a:lnSpc>
+                <a:spcPct val="100000"/>
+              </a:lnSpc>
+              <a:spcBef>
+                <a:spcPts val="0"/>
+              </a:spcBef>
+              <a:spcAft>
+                <a:spcPts val="0"/>
+              </a:spcAft>
+              <a:buSzPts val="1400"/>
+              <a:buNone/>
+              <a:defRPr sz="2400" b="1">
+                <a:latin typeface="Arial"/>
+                <a:solidFill>
+                  <a:srgbClr val="CA5651"/>
+                </a:solidFill>
+              </a:defRPr>
+            </a:lvl6pPr>
+            <a:lvl7pPr lvl="6" algn="l">
+              <a:lnSpc>
+                <a:spcPct val="100000"/>
+              </a:lnSpc>
+              <a:spcBef>
+                <a:spcPts val="0"/>
+              </a:spcBef>
+              <a:spcAft>
+                <a:spcPts val="0"/>
+              </a:spcAft>
+              <a:buSzPts val="1400"/>
+              <a:buNone/>
+              <a:defRPr sz="2400" b="1">
+                <a:latin typeface="Arial"/>
+                <a:solidFill>
+                  <a:srgbClr val="CA5651"/>
+                </a:solidFill>
+              </a:defRPr>
+            </a:lvl7pPr>
+            <a:lvl8pPr lvl="7" algn="l">
+              <a:lnSpc>
+                <a:spcPct val="100000"/>
+              </a:lnSpc>
+              <a:spcBef>
+                <a:spcPts val="0"/>
+              </a:spcBef>
+              <a:spcAft>
+                <a:spcPts val="0"/>
+              </a:spcAft>
+              <a:buSzPts val="1400"/>
+              <a:buNone/>
+              <a:defRPr sz="2400" b="1">
+                <a:latin typeface="Arial"/>
+                <a:solidFill>
+                  <a:srgbClr val="CA5651"/>
+                </a:solidFill>
+              </a:defRPr>
+            </a:lvl8pPr>
+            <a:lvl9pPr lvl="8" algn="l">
+              <a:lnSpc>
+                <a:spcPct val="100000"/>
+              </a:lnSpc>
+              <a:spcBef>
+                <a:spcPts val="0"/>
+              </a:spcBef>
+              <a:spcAft>
+                <a:spcPts val="0"/>
+              </a:spcAft>
+              <a:buSzPts val="1400"/>
+              <a:buNone/>
+              <a:defRPr sz="2400" b="1">
+                <a:latin typeface="Arial"/>
+                <a:solidFill>
+                  <a:srgbClr val="CA5651"/>
+                </a:solidFill>
+              </a:defRPr>
+            </a:lvl9pPr>
+          </a:lstStyle>
+          <a:p>
+            <a:r>
+              <a:rPr lang="es-MX" sz="2400" b="1">
+                <a:latin typeface="Arial"/>
+                <a:solidFill>
+                  <a:srgbClr val="CA5651"/>
+                </a:solidFill>
+              </a:rPr>
+              <a:t>Haz clic para modificar el estilo de título del patrón</a:t>
+            </a:r>
+            <a:endParaRPr dirty="0" sz="2400" b="1">
+              <a:latin typeface="Arial"/>
+              <a:solidFill>
+                <a:srgbClr val="CA5651"/>
+              </a:solidFill>
+            </a:endParaRPr>
+          </a:p>
+        </p:txBody>
+      </p:sp>
+      <p:sp>
+        <p:nvSpPr>
+          <p:cNvPr id="6" name="Picture Placeholder 5">
+            <a:extLst>
+              <a:ext uri="{FF2B5EF4-FFF2-40B4-BE49-F238E27FC236}">
+                <ns3:creationId id="{EB977788-EA90-94F5-A207-15EBBD7FEAB5}"/>
+              </a:ext>
+            </a:extLst>
+          </p:cNvPr>
+          <p:cNvSpPr>
+            <a:spLocks noGrp="1"/>
+          </p:cNvSpPr>
+          <p:nvPr>
+            <p:ph type="pic" sz="quarter" idx="10"/>
+          </p:nvPr>
+        </p:nvSpPr>
+        <p:spPr>
+          <a:xfrm>
+            <a:off x="461772" y="1212494"/>
+            <a:ext cx="11377879" cy="2345436"/>
+          </a:xfrm>
+        </p:spPr>
+        <p:txBody>
+          <a:bodyPr/>
+          <a:lstStyle/>
+          <a:p>
+            <a:endParaRPr lang="en-PE" dirty="0"/>
+          </a:p>
+          <a:p>
+            <a:endParaRPr lang="en-PE" dirty="0"/>
+          </a:p>
+        </p:txBody>
+      </p:sp>
+      <p:sp>
+        <p:nvSpPr>
+          <p:cNvPr id="7" name="Picture Placeholder 5">
+            <a:extLst>
+              <a:ext uri="{FF2B5EF4-FFF2-40B4-BE49-F238E27FC236}">
+                <ns3:creationId id="{0519FE1F-4FD7-A2A0-81FB-8DCD6F26C4FB}"/>
+              </a:ext>
+            </a:extLst>
+          </p:cNvPr>
+          <p:cNvSpPr>
+            <a:spLocks noGrp="1"/>
+          </p:cNvSpPr>
+          <p:nvPr>
+            <p:ph type="pic" sz="quarter" idx="11"/>
+          </p:nvPr>
+        </p:nvSpPr>
+        <p:spPr>
+          <a:xfrm>
+            <a:off x="461772" y="3754526"/>
+            <a:ext cx="5577840" cy="2345436"/>
+          </a:xfrm>
+        </p:spPr>
+        <p:txBody>
+          <a:bodyPr/>
+          <a:lstStyle/>
+          <a:p>
+            <a:endParaRPr lang="en-PE" dirty="0"/>
+          </a:p>
+        </p:txBody>
+      </p:sp>
+      <p:sp>
+        <p:nvSpPr>
+          <p:cNvPr id="8" name="Picture Placeholder 5">
+            <a:extLst>
+              <a:ext uri="{FF2B5EF4-FFF2-40B4-BE49-F238E27FC236}">
+                <ns3:creationId id="{358A77CA-4946-E677-D51B-A8CE149E91B8}"/>
+              </a:ext>
+            </a:extLst>
+          </p:cNvPr>
+          <p:cNvSpPr>
+            <a:spLocks noGrp="1"/>
+          </p:cNvSpPr>
+          <p:nvPr>
+            <p:ph type="pic" sz="quarter" idx="12"/>
+          </p:nvPr>
+        </p:nvSpPr>
+        <p:spPr>
+          <a:xfrm>
+            <a:off x="6268212" y="3754526"/>
+            <a:ext cx="5577840" cy="2345436"/>
+          </a:xfrm>
+        </p:spPr>
+        <p:txBody>
+          <a:bodyPr/>
+          <a:lstStyle/>
+          <a:p>
+            <a:endParaRPr lang="en-PE" dirty="0"/>
+          </a:p>
+          <a:p>
+            <a:endParaRPr lang="en-PE" dirty="0"/>
+          </a:p>
+        </p:txBody>
+      </p:sp>
+      <p:sp>
+        <p:nvSpPr>
+          <p:cNvPr id="2" name="Text Placeholder 9">
+            <a:extLst>
+              <a:ext uri="{FF2B5EF4-FFF2-40B4-BE49-F238E27FC236}">
+                <ns3:creationId id="{0C929747-7B86-54B8-A590-1398C659B7EC}"/>
+              </a:ext>
+            </a:extLst>
+          </p:cNvPr>
+          <p:cNvSpPr>
+            <a:spLocks noGrp="1"/>
+          </p:cNvSpPr>
+          <p:nvPr>
+            <p:ph type="body" sz="quarter" idx="14"/>
+          </p:nvPr>
+        </p:nvSpPr>
+        <p:spPr>
+          <a:xfrm>
+            <a:off x="461464" y="6320500"/>
+            <a:ext cx="4503738" cy="398463"/>
+          </a:xfrm>
+        </p:spPr>
+        <p:txBody>
+          <a:bodyPr>
+            <a:noAutofit/>
+          </a:bodyPr>
+          <a:lstStyle>
+            <a:lvl1pPr>
+              <a:defRPr sz="1100"/>
+            </a:lvl1pPr>
+            <a:lvl2pPr>
+              <a:defRPr sz="1000"/>
+            </a:lvl2pPr>
+            <a:lvl3pPr>
+              <a:defRPr sz="1000"/>
+            </a:lvl3pPr>
+            <a:lvl4pPr>
+              <a:defRPr sz="1000"/>
+            </a:lvl4pPr>
+            <a:lvl5pPr>
+              <a:defRPr sz="1000"/>
+            </a:lvl5pPr>
+          </a:lstStyle>
+          <a:p>
+            <a:pPr lvl="0"/>
+            <a:r>
+              <a:rPr lang="en-US" dirty="0"/>
+              <a:t>Click to edit Master text styles</a:t>
+            </a:r>
+          </a:p>
+          <a:p>
+            <a:pPr lvl="1"/>
+            <a:r>
+              <a:rPr lang="en-US" dirty="0"/>
+              <a:t>Second level</a:t>
+            </a:r>
+          </a:p>
+          <a:p>
+            <a:pPr lvl="2"/>
+            <a:r>
+              <a:rPr lang="en-US" dirty="0"/>
+              <a:t>Third level</a:t>
+            </a:r>
+          </a:p>
+          <a:p>
+            <a:pPr lvl="3"/>
+            <a:r>
+              <a:rPr lang="en-US" dirty="0"/>
+              <a:t>Fourth level</a:t>
+            </a:r>
+          </a:p>
+          <a:p>
+            <a:pPr lvl="4"/>
+            <a:r>
+              <a:rPr lang="en-US" dirty="0"/>
+              <a:t>Fifth level</a:t>
+            </a:r>
+            <a:endParaRPr lang="en-PE" dirty="0"/>
+          </a:p>
+        </p:txBody>
+      </p:sp>
+    </p:spTree>
+    <p:extLst>
+      <p:ext uri="{BB962C8B-B14F-4D97-AF65-F5344CB8AC3E}">
+        <p14:creationId val="1490820941"/>
+      </p:ext>
+    </p:extLst>
+  </p:cSld>
+  <p:clrMapOvr>
+    <a:masterClrMapping/>
+  </p:clrMapOvr>
+  <p:extLst>
+    <p:ext uri="{DCECCB84-F9BA-43D5-87BE-67443E8EF086}">
+      <p15:sldGuideLst>
+        <p15:guide id="1" orient="horz" pos="4088">
+          <p15:clr>
+            <a:srgbClr val="E4A34C"/>
+          </p15:clr>
+        </p15:guide>
+        <p15:guide id="2" pos="7446">
+          <p15:clr>
+            <a:srgbClr val="E4A34C"/>
+          </p15:clr>
+        </p15:guide>
+      </p15:sldGuideLst>
+    </p:ext>
+  </p:extLst>
+</p:sldLayout>
+</file>
+
 <file path=ppt/slideLayouts/slideLayout3.xml><?xml version="1.0" encoding="utf-8"?>
 <p:sldLayout xmlns:a="http://schemas.openxmlformats.org/drawingml/2006/main" xmlns:ns2="http://schemas.microsoft.com/office/drawing/2014/main" xmlns:p="http://schemas.openxmlformats.org/presentationml/2006/main" xmlns:p14="http://schemas.microsoft.com/office/powerpoint/2010/main" xmlns:r="http://schemas.openxmlformats.org/officeDocument/2006/relationships" preserve="1" userDrawn="1">
   <p:cSld name="Graficos">
@@ -17037,6 +18833,838 @@
   <p:clrMapOvr>
     <a:masterClrMapping/>
   </p:clrMapOvr>
+</p:sldLayout>
+</file>
+
+<file path=ppt/slideLayouts/slideLayout30.xml><?xml version="1.0" encoding="utf-8"?>
+<p:sldLayout xmlns:a="http://schemas.openxmlformats.org/drawingml/2006/main" xmlns:ns3="http://schemas.microsoft.com/office/drawing/2014/main" xmlns:p="http://schemas.openxmlformats.org/presentationml/2006/main" xmlns:p14="http://schemas.microsoft.com/office/powerpoint/2010/main" xmlns:p15="http://schemas.microsoft.com/office/powerpoint/2012/main" xmlns:r="http://schemas.openxmlformats.org/officeDocument/2006/relationships" matchingName="Dos objetos" preserve="1" userDrawn="1">
+  <p:cSld name="graficos_2_vertical">
+    <p:spTree>
+      <p:nvGrpSpPr>
+        <p:cNvPr id="1" name="Shape 84"/>
+        <p:cNvGrpSpPr/>
+        <p:nvPr/>
+      </p:nvGrpSpPr>
+      <p:grpSpPr>
+        <a:xfrm>
+          <a:off x="0" y="0"/>
+          <a:ext cx="0" cy="0"/>
+          <a:chOff x="0" y="0"/>
+          <a:chExt cx="0" cy="0"/>
+        </a:xfrm>
+      </p:grpSpPr>
+      <p:sp>
+        <p:nvSpPr>
+          <p:cNvPr id="88" name="Google Shape;88;p51"/>
+          <p:cNvSpPr txBox="1">
+            <a:spLocks noGrp="1"/>
+          </p:cNvSpPr>
+          <p:nvPr>
+            <p:ph type="title"/>
+          </p:nvPr>
+        </p:nvSpPr>
+        <p:spPr>
+          <a:xfrm>
+            <a:off x="461464" y="338268"/>
+            <a:ext cx="9626752" cy="666595"/>
+          </a:xfrm>
+          <a:prstGeom prst="rect">
+            <a:avLst/>
+          </a:prstGeom>
+          <a:noFill/>
+          <a:ln>
+            <a:noFill/>
+          </a:ln>
+        </p:spPr>
+        <p:txBody>
+          <a:bodyPr spcFirstLastPara="1" wrap="square" lIns="91425" tIns="45700" rIns="91425" bIns="45700" anchor="ctr" anchorCtr="0">
+            <a:normAutofit/>
+          </a:bodyPr>
+          <a:lstStyle>
+            <a:lvl1pPr lvl="0" algn="l">
+              <a:lnSpc>
+                <a:spcPct val="90000"/>
+              </a:lnSpc>
+              <a:spcBef>
+                <a:spcPts val="0"/>
+              </a:spcBef>
+              <a:spcAft>
+                <a:spcPts val="0"/>
+              </a:spcAft>
+              <a:buClr>
+                <a:srgbClr val="CA5651"/>
+              </a:buClr>
+              <a:buSzPts val="2400"/>
+              <a:buFont typeface="Arial"/>
+              <a:buNone/>
+              <a:defRPr sz="2400" b="1" cap="none">
+                <a:solidFill>
+                  <a:srgbClr val="CA5651"/>
+                </a:solidFill>
+                <a:latin typeface="Arial"/>
+                <a:ea typeface="Arial"/>
+                <a:cs typeface="Arial"/>
+                <a:sym typeface="Arial"/>
+              </a:defRPr>
+            </a:lvl1pPr>
+            <a:lvl2pPr lvl="1" algn="l">
+              <a:lnSpc>
+                <a:spcPct val="100000"/>
+              </a:lnSpc>
+              <a:spcBef>
+                <a:spcPts val="0"/>
+              </a:spcBef>
+              <a:spcAft>
+                <a:spcPts val="0"/>
+              </a:spcAft>
+              <a:buSzPts val="1400"/>
+              <a:buNone/>
+              <a:defRPr sz="2400" b="1">
+                <a:latin typeface="Arial"/>
+                <a:solidFill>
+                  <a:srgbClr val="CA5651"/>
+                </a:solidFill>
+              </a:defRPr>
+            </a:lvl2pPr>
+            <a:lvl3pPr lvl="2" algn="l">
+              <a:lnSpc>
+                <a:spcPct val="100000"/>
+              </a:lnSpc>
+              <a:spcBef>
+                <a:spcPts val="0"/>
+              </a:spcBef>
+              <a:spcAft>
+                <a:spcPts val="0"/>
+              </a:spcAft>
+              <a:buSzPts val="1400"/>
+              <a:buNone/>
+              <a:defRPr sz="2400" b="1">
+                <a:latin typeface="Arial"/>
+                <a:solidFill>
+                  <a:srgbClr val="CA5651"/>
+                </a:solidFill>
+              </a:defRPr>
+            </a:lvl3pPr>
+            <a:lvl4pPr lvl="3" algn="l">
+              <a:lnSpc>
+                <a:spcPct val="100000"/>
+              </a:lnSpc>
+              <a:spcBef>
+                <a:spcPts val="0"/>
+              </a:spcBef>
+              <a:spcAft>
+                <a:spcPts val="0"/>
+              </a:spcAft>
+              <a:buSzPts val="1400"/>
+              <a:buNone/>
+              <a:defRPr sz="2400" b="1">
+                <a:latin typeface="Arial"/>
+                <a:solidFill>
+                  <a:srgbClr val="CA5651"/>
+                </a:solidFill>
+              </a:defRPr>
+            </a:lvl4pPr>
+            <a:lvl5pPr lvl="4" algn="l">
+              <a:lnSpc>
+                <a:spcPct val="100000"/>
+              </a:lnSpc>
+              <a:spcBef>
+                <a:spcPts val="0"/>
+              </a:spcBef>
+              <a:spcAft>
+                <a:spcPts val="0"/>
+              </a:spcAft>
+              <a:buSzPts val="1400"/>
+              <a:buNone/>
+              <a:defRPr sz="2400" b="1">
+                <a:latin typeface="Arial"/>
+                <a:solidFill>
+                  <a:srgbClr val="CA5651"/>
+                </a:solidFill>
+              </a:defRPr>
+            </a:lvl5pPr>
+            <a:lvl6pPr lvl="5" algn="l">
+              <a:lnSpc>
+                <a:spcPct val="100000"/>
+              </a:lnSpc>
+              <a:spcBef>
+                <a:spcPts val="0"/>
+              </a:spcBef>
+              <a:spcAft>
+                <a:spcPts val="0"/>
+              </a:spcAft>
+              <a:buSzPts val="1400"/>
+              <a:buNone/>
+              <a:defRPr sz="2400" b="1">
+                <a:latin typeface="Arial"/>
+                <a:solidFill>
+                  <a:srgbClr val="CA5651"/>
+                </a:solidFill>
+              </a:defRPr>
+            </a:lvl6pPr>
+            <a:lvl7pPr lvl="6" algn="l">
+              <a:lnSpc>
+                <a:spcPct val="100000"/>
+              </a:lnSpc>
+              <a:spcBef>
+                <a:spcPts val="0"/>
+              </a:spcBef>
+              <a:spcAft>
+                <a:spcPts val="0"/>
+              </a:spcAft>
+              <a:buSzPts val="1400"/>
+              <a:buNone/>
+              <a:defRPr sz="2400" b="1">
+                <a:latin typeface="Arial"/>
+                <a:solidFill>
+                  <a:srgbClr val="CA5651"/>
+                </a:solidFill>
+              </a:defRPr>
+            </a:lvl7pPr>
+            <a:lvl8pPr lvl="7" algn="l">
+              <a:lnSpc>
+                <a:spcPct val="100000"/>
+              </a:lnSpc>
+              <a:spcBef>
+                <a:spcPts val="0"/>
+              </a:spcBef>
+              <a:spcAft>
+                <a:spcPts val="0"/>
+              </a:spcAft>
+              <a:buSzPts val="1400"/>
+              <a:buNone/>
+              <a:defRPr sz="2400" b="1">
+                <a:latin typeface="Arial"/>
+                <a:solidFill>
+                  <a:srgbClr val="CA5651"/>
+                </a:solidFill>
+              </a:defRPr>
+            </a:lvl8pPr>
+            <a:lvl9pPr lvl="8" algn="l">
+              <a:lnSpc>
+                <a:spcPct val="100000"/>
+              </a:lnSpc>
+              <a:spcBef>
+                <a:spcPts val="0"/>
+              </a:spcBef>
+              <a:spcAft>
+                <a:spcPts val="0"/>
+              </a:spcAft>
+              <a:buSzPts val="1400"/>
+              <a:buNone/>
+              <a:defRPr sz="2400" b="1">
+                <a:latin typeface="Arial"/>
+                <a:solidFill>
+                  <a:srgbClr val="CA5651"/>
+                </a:solidFill>
+              </a:defRPr>
+            </a:lvl9pPr>
+          </a:lstStyle>
+          <a:p>
+            <a:r>
+              <a:rPr lang="es-MX" sz="2400" b="1">
+                <a:latin typeface="Arial"/>
+                <a:solidFill>
+                  <a:srgbClr val="CA5651"/>
+                </a:solidFill>
+              </a:rPr>
+              <a:t>Haz clic para modificar el estilo de título del patrón</a:t>
+            </a:r>
+            <a:endParaRPr dirty="0" sz="2400" b="1">
+              <a:latin typeface="Arial"/>
+              <a:solidFill>
+                <a:srgbClr val="CA5651"/>
+              </a:solidFill>
+            </a:endParaRPr>
+          </a:p>
+        </p:txBody>
+      </p:sp>
+      <p:sp>
+        <p:nvSpPr>
+          <p:cNvPr id="6" name="Picture Placeholder 5">
+            <a:extLst>
+              <a:ext uri="{FF2B5EF4-FFF2-40B4-BE49-F238E27FC236}">
+                <ns3:creationId id="{EB977788-EA90-94F5-A207-15EBBD7FEAB5}"/>
+              </a:ext>
+            </a:extLst>
+          </p:cNvPr>
+          <p:cNvSpPr>
+            <a:spLocks noGrp="1"/>
+          </p:cNvSpPr>
+          <p:nvPr>
+            <p:ph type="pic" sz="quarter" idx="10"/>
+          </p:nvPr>
+        </p:nvSpPr>
+        <p:spPr>
+          <a:xfrm>
+            <a:off x="1559052" y="1212494"/>
+            <a:ext cx="9189720" cy="2345436"/>
+          </a:xfrm>
+        </p:spPr>
+        <p:txBody>
+          <a:bodyPr/>
+          <a:lstStyle/>
+          <a:p>
+            <a:endParaRPr lang="en-PE" dirty="0"/>
+          </a:p>
+          <a:p>
+            <a:endParaRPr lang="en-PE" dirty="0"/>
+          </a:p>
+        </p:txBody>
+      </p:sp>
+      <p:sp>
+        <p:nvSpPr>
+          <p:cNvPr id="7" name="Picture Placeholder 5">
+            <a:extLst>
+              <a:ext uri="{FF2B5EF4-FFF2-40B4-BE49-F238E27FC236}">
+                <ns3:creationId id="{0519FE1F-4FD7-A2A0-81FB-8DCD6F26C4FB}"/>
+              </a:ext>
+            </a:extLst>
+          </p:cNvPr>
+          <p:cNvSpPr>
+            <a:spLocks noGrp="1"/>
+          </p:cNvSpPr>
+          <p:nvPr>
+            <p:ph type="pic" sz="quarter" idx="11"/>
+          </p:nvPr>
+        </p:nvSpPr>
+        <p:spPr>
+          <a:xfrm>
+            <a:off x="1559052" y="3754526"/>
+            <a:ext cx="9189720" cy="2345436"/>
+          </a:xfrm>
+        </p:spPr>
+        <p:txBody>
+          <a:bodyPr/>
+          <a:lstStyle/>
+          <a:p>
+            <a:endParaRPr lang="en-PE" dirty="0"/>
+          </a:p>
+        </p:txBody>
+      </p:sp>
+      <p:sp>
+        <p:nvSpPr>
+          <p:cNvPr id="2" name="Text Placeholder 9">
+            <a:extLst>
+              <a:ext uri="{FF2B5EF4-FFF2-40B4-BE49-F238E27FC236}">
+                <ns3:creationId id="{0C929747-7B86-54B8-A590-1398C659B7EC}"/>
+              </a:ext>
+            </a:extLst>
+          </p:cNvPr>
+          <p:cNvSpPr>
+            <a:spLocks noGrp="1"/>
+          </p:cNvSpPr>
+          <p:nvPr>
+            <p:ph type="body" sz="quarter" idx="14"/>
+          </p:nvPr>
+        </p:nvSpPr>
+        <p:spPr>
+          <a:xfrm>
+            <a:off x="461464" y="6320500"/>
+            <a:ext cx="4503738" cy="398463"/>
+          </a:xfrm>
+        </p:spPr>
+        <p:txBody>
+          <a:bodyPr>
+            <a:noAutofit/>
+          </a:bodyPr>
+          <a:lstStyle>
+            <a:lvl1pPr>
+              <a:defRPr sz="1100"/>
+            </a:lvl1pPr>
+            <a:lvl2pPr>
+              <a:defRPr sz="1000"/>
+            </a:lvl2pPr>
+            <a:lvl3pPr>
+              <a:defRPr sz="1000"/>
+            </a:lvl3pPr>
+            <a:lvl4pPr>
+              <a:defRPr sz="1000"/>
+            </a:lvl4pPr>
+            <a:lvl5pPr>
+              <a:defRPr sz="1000"/>
+            </a:lvl5pPr>
+          </a:lstStyle>
+          <a:p>
+            <a:pPr lvl="0"/>
+            <a:r>
+              <a:rPr lang="en-US" dirty="0"/>
+              <a:t>Click to edit Master text styles</a:t>
+            </a:r>
+          </a:p>
+          <a:p>
+            <a:pPr lvl="1"/>
+            <a:r>
+              <a:rPr lang="en-US" dirty="0"/>
+              <a:t>Second level</a:t>
+            </a:r>
+          </a:p>
+          <a:p>
+            <a:pPr lvl="2"/>
+            <a:r>
+              <a:rPr lang="en-US" dirty="0"/>
+              <a:t>Third level</a:t>
+            </a:r>
+          </a:p>
+          <a:p>
+            <a:pPr lvl="3"/>
+            <a:r>
+              <a:rPr lang="en-US" dirty="0"/>
+              <a:t>Fourth level</a:t>
+            </a:r>
+          </a:p>
+          <a:p>
+            <a:pPr lvl="4"/>
+            <a:r>
+              <a:rPr lang="en-US" dirty="0"/>
+              <a:t>Fifth level</a:t>
+            </a:r>
+            <a:endParaRPr lang="en-PE" dirty="0"/>
+          </a:p>
+        </p:txBody>
+      </p:sp>
+    </p:spTree>
+    <p:extLst>
+      <p:ext uri="{BB962C8B-B14F-4D97-AF65-F5344CB8AC3E}">
+        <p14:creationId val="1490820941"/>
+      </p:ext>
+    </p:extLst>
+  </p:cSld>
+  <p:clrMapOvr>
+    <a:masterClrMapping/>
+  </p:clrMapOvr>
+  <p:extLst>
+    <p:ext uri="{DCECCB84-F9BA-43D5-87BE-67443E8EF086}">
+      <p15:sldGuideLst>
+        <p15:guide id="1" orient="horz" pos="4088">
+          <p15:clr>
+            <a:srgbClr val="E4A34C"/>
+          </p15:clr>
+        </p15:guide>
+        <p15:guide id="2" pos="7446">
+          <p15:clr>
+            <a:srgbClr val="E4A34C"/>
+          </p15:clr>
+        </p15:guide>
+      </p15:sldGuideLst>
+    </p:ext>
+  </p:extLst>
+</p:sldLayout>
+</file>
+
+<file path=ppt/slideLayouts/slideLayout31.xml><?xml version="1.0" encoding="utf-8"?>
+<p:sldLayout xmlns:a="http://schemas.openxmlformats.org/drawingml/2006/main" xmlns:ns3="http://schemas.microsoft.com/office/drawing/2014/main" xmlns:p="http://schemas.openxmlformats.org/presentationml/2006/main" xmlns:p14="http://schemas.microsoft.com/office/powerpoint/2010/main" xmlns:p15="http://schemas.microsoft.com/office/powerpoint/2012/main" xmlns:r="http://schemas.openxmlformats.org/officeDocument/2006/relationships" matchingName="Dos objetos" preserve="1" userDrawn="1">
+  <p:cSld name="graficos_2_asimetrico">
+    <p:spTree>
+      <p:nvGrpSpPr>
+        <p:cNvPr id="1" name="Shape 84"/>
+        <p:cNvGrpSpPr/>
+        <p:nvPr/>
+      </p:nvGrpSpPr>
+      <p:grpSpPr>
+        <a:xfrm>
+          <a:off x="0" y="0"/>
+          <a:ext cx="0" cy="0"/>
+          <a:chOff x="0" y="0"/>
+          <a:chExt cx="0" cy="0"/>
+        </a:xfrm>
+      </p:grpSpPr>
+      <p:sp>
+        <p:nvSpPr>
+          <p:cNvPr id="88" name="Google Shape;88;p51"/>
+          <p:cNvSpPr txBox="1">
+            <a:spLocks noGrp="1"/>
+          </p:cNvSpPr>
+          <p:nvPr>
+            <p:ph type="title"/>
+          </p:nvPr>
+        </p:nvSpPr>
+        <p:spPr>
+          <a:xfrm>
+            <a:off x="461464" y="338268"/>
+            <a:ext cx="9626752" cy="666595"/>
+          </a:xfrm>
+          <a:prstGeom prst="rect">
+            <a:avLst/>
+          </a:prstGeom>
+          <a:noFill/>
+          <a:ln>
+            <a:noFill/>
+          </a:ln>
+        </p:spPr>
+        <p:txBody>
+          <a:bodyPr spcFirstLastPara="1" wrap="square" lIns="91425" tIns="45700" rIns="91425" bIns="45700" anchor="ctr" anchorCtr="0">
+            <a:normAutofit/>
+          </a:bodyPr>
+          <a:lstStyle>
+            <a:lvl1pPr lvl="0" algn="l">
+              <a:lnSpc>
+                <a:spcPct val="90000"/>
+              </a:lnSpc>
+              <a:spcBef>
+                <a:spcPts val="0"/>
+              </a:spcBef>
+              <a:spcAft>
+                <a:spcPts val="0"/>
+              </a:spcAft>
+              <a:buClr>
+                <a:srgbClr val="CA5651"/>
+              </a:buClr>
+              <a:buSzPts val="2400"/>
+              <a:buFont typeface="Arial"/>
+              <a:buNone/>
+              <a:defRPr sz="2400" b="1" cap="none">
+                <a:solidFill>
+                  <a:srgbClr val="CA5651"/>
+                </a:solidFill>
+                <a:latin typeface="Arial"/>
+                <a:ea typeface="Arial"/>
+                <a:cs typeface="Arial"/>
+                <a:sym typeface="Arial"/>
+              </a:defRPr>
+            </a:lvl1pPr>
+            <a:lvl2pPr lvl="1" algn="l">
+              <a:lnSpc>
+                <a:spcPct val="100000"/>
+              </a:lnSpc>
+              <a:spcBef>
+                <a:spcPts val="0"/>
+              </a:spcBef>
+              <a:spcAft>
+                <a:spcPts val="0"/>
+              </a:spcAft>
+              <a:buSzPts val="1400"/>
+              <a:buNone/>
+              <a:defRPr sz="2400" b="1">
+                <a:latin typeface="Arial"/>
+                <a:solidFill>
+                  <a:srgbClr val="CA5651"/>
+                </a:solidFill>
+              </a:defRPr>
+            </a:lvl2pPr>
+            <a:lvl3pPr lvl="2" algn="l">
+              <a:lnSpc>
+                <a:spcPct val="100000"/>
+              </a:lnSpc>
+              <a:spcBef>
+                <a:spcPts val="0"/>
+              </a:spcBef>
+              <a:spcAft>
+                <a:spcPts val="0"/>
+              </a:spcAft>
+              <a:buSzPts val="1400"/>
+              <a:buNone/>
+              <a:defRPr sz="2400" b="1">
+                <a:latin typeface="Arial"/>
+                <a:solidFill>
+                  <a:srgbClr val="CA5651"/>
+                </a:solidFill>
+              </a:defRPr>
+            </a:lvl3pPr>
+            <a:lvl4pPr lvl="3" algn="l">
+              <a:lnSpc>
+                <a:spcPct val="100000"/>
+              </a:lnSpc>
+              <a:spcBef>
+                <a:spcPts val="0"/>
+              </a:spcBef>
+              <a:spcAft>
+                <a:spcPts val="0"/>
+              </a:spcAft>
+              <a:buSzPts val="1400"/>
+              <a:buNone/>
+              <a:defRPr sz="2400" b="1">
+                <a:latin typeface="Arial"/>
+                <a:solidFill>
+                  <a:srgbClr val="CA5651"/>
+                </a:solidFill>
+              </a:defRPr>
+            </a:lvl4pPr>
+            <a:lvl5pPr lvl="4" algn="l">
+              <a:lnSpc>
+                <a:spcPct val="100000"/>
+              </a:lnSpc>
+              <a:spcBef>
+                <a:spcPts val="0"/>
+              </a:spcBef>
+              <a:spcAft>
+                <a:spcPts val="0"/>
+              </a:spcAft>
+              <a:buSzPts val="1400"/>
+              <a:buNone/>
+              <a:defRPr sz="2400" b="1">
+                <a:latin typeface="Arial"/>
+                <a:solidFill>
+                  <a:srgbClr val="CA5651"/>
+                </a:solidFill>
+              </a:defRPr>
+            </a:lvl5pPr>
+            <a:lvl6pPr lvl="5" algn="l">
+              <a:lnSpc>
+                <a:spcPct val="100000"/>
+              </a:lnSpc>
+              <a:spcBef>
+                <a:spcPts val="0"/>
+              </a:spcBef>
+              <a:spcAft>
+                <a:spcPts val="0"/>
+              </a:spcAft>
+              <a:buSzPts val="1400"/>
+              <a:buNone/>
+              <a:defRPr sz="2400" b="1">
+                <a:latin typeface="Arial"/>
+                <a:solidFill>
+                  <a:srgbClr val="CA5651"/>
+                </a:solidFill>
+              </a:defRPr>
+            </a:lvl6pPr>
+            <a:lvl7pPr lvl="6" algn="l">
+              <a:lnSpc>
+                <a:spcPct val="100000"/>
+              </a:lnSpc>
+              <a:spcBef>
+                <a:spcPts val="0"/>
+              </a:spcBef>
+              <a:spcAft>
+                <a:spcPts val="0"/>
+              </a:spcAft>
+              <a:buSzPts val="1400"/>
+              <a:buNone/>
+              <a:defRPr sz="2400" b="1">
+                <a:latin typeface="Arial"/>
+                <a:solidFill>
+                  <a:srgbClr val="CA5651"/>
+                </a:solidFill>
+              </a:defRPr>
+            </a:lvl7pPr>
+            <a:lvl8pPr lvl="7" algn="l">
+              <a:lnSpc>
+                <a:spcPct val="100000"/>
+              </a:lnSpc>
+              <a:spcBef>
+                <a:spcPts val="0"/>
+              </a:spcBef>
+              <a:spcAft>
+                <a:spcPts val="0"/>
+              </a:spcAft>
+              <a:buSzPts val="1400"/>
+              <a:buNone/>
+              <a:defRPr sz="2400" b="1">
+                <a:latin typeface="Arial"/>
+                <a:solidFill>
+                  <a:srgbClr val="CA5651"/>
+                </a:solidFill>
+              </a:defRPr>
+            </a:lvl8pPr>
+            <a:lvl9pPr lvl="8" algn="l">
+              <a:lnSpc>
+                <a:spcPct val="100000"/>
+              </a:lnSpc>
+              <a:spcBef>
+                <a:spcPts val="0"/>
+              </a:spcBef>
+              <a:spcAft>
+                <a:spcPts val="0"/>
+              </a:spcAft>
+              <a:buSzPts val="1400"/>
+              <a:buNone/>
+              <a:defRPr sz="2400" b="1">
+                <a:latin typeface="Arial"/>
+                <a:solidFill>
+                  <a:srgbClr val="CA5651"/>
+                </a:solidFill>
+              </a:defRPr>
+            </a:lvl9pPr>
+          </a:lstStyle>
+          <a:p>
+            <a:r>
+              <a:rPr lang="es-MX" sz="2400" b="1">
+                <a:latin typeface="Arial"/>
+                <a:solidFill>
+                  <a:srgbClr val="CA5651"/>
+                </a:solidFill>
+              </a:rPr>
+              <a:t>Haz clic para modificar el estilo de título del patrón</a:t>
+            </a:r>
+            <a:endParaRPr dirty="0" sz="2400" b="1">
+              <a:latin typeface="Arial"/>
+              <a:solidFill>
+                <a:srgbClr val="CA5651"/>
+              </a:solidFill>
+            </a:endParaRPr>
+          </a:p>
+        </p:txBody>
+      </p:sp>
+      <p:sp>
+        <p:nvSpPr>
+          <p:cNvPr id="6" name="Picture Placeholder 5">
+            <a:extLst>
+              <a:ext uri="{FF2B5EF4-FFF2-40B4-BE49-F238E27FC236}">
+                <ns3:creationId id="{EB977788-EA90-94F5-A207-15EBBD7FEAB5}"/>
+              </a:ext>
+            </a:extLst>
+          </p:cNvPr>
+          <p:cNvSpPr>
+            <a:spLocks noGrp="1"/>
+          </p:cNvSpPr>
+          <p:nvPr>
+            <p:ph type="pic" sz="quarter" idx="10"/>
+          </p:nvPr>
+        </p:nvSpPr>
+        <p:spPr>
+          <a:xfrm>
+            <a:off x="461772" y="1212494"/>
+            <a:ext cx="6949440" cy="4887468"/>
+          </a:xfrm>
+        </p:spPr>
+        <p:txBody>
+          <a:bodyPr/>
+          <a:lstStyle/>
+          <a:p>
+            <a:endParaRPr lang="en-PE" dirty="0"/>
+          </a:p>
+          <a:p>
+            <a:endParaRPr lang="en-PE" dirty="0"/>
+          </a:p>
+        </p:txBody>
+      </p:sp>
+      <p:sp>
+        <p:nvSpPr>
+          <p:cNvPr id="7" name="Picture Placeholder 5">
+            <a:extLst>
+              <a:ext uri="{FF2B5EF4-FFF2-40B4-BE49-F238E27FC236}">
+                <ns3:creationId id="{0519FE1F-4FD7-A2A0-81FB-8DCD6F26C4FB}"/>
+              </a:ext>
+            </a:extLst>
+          </p:cNvPr>
+          <p:cNvSpPr>
+            <a:spLocks noGrp="1"/>
+          </p:cNvSpPr>
+          <p:nvPr>
+            <p:ph type="pic" sz="quarter" idx="11"/>
+          </p:nvPr>
+        </p:nvSpPr>
+        <p:spPr>
+          <a:xfrm>
+            <a:off x="7731252" y="1920240"/>
+            <a:ext cx="4114800" cy="3474720"/>
+          </a:xfrm>
+        </p:spPr>
+        <p:txBody>
+          <a:bodyPr/>
+          <a:lstStyle/>
+          <a:p>
+            <a:endParaRPr lang="en-PE" dirty="0"/>
+          </a:p>
+        </p:txBody>
+      </p:sp>
+      <p:sp>
+        <p:nvSpPr>
+          <p:cNvPr id="2" name="Text Placeholder 9">
+            <a:extLst>
+              <a:ext uri="{FF2B5EF4-FFF2-40B4-BE49-F238E27FC236}">
+                <ns3:creationId id="{0C929747-7B86-54B8-A590-1398C659B7EC}"/>
+              </a:ext>
+            </a:extLst>
+          </p:cNvPr>
+          <p:cNvSpPr>
+            <a:spLocks noGrp="1"/>
+          </p:cNvSpPr>
+          <p:nvPr>
+            <p:ph type="body" sz="quarter" idx="14"/>
+          </p:nvPr>
+        </p:nvSpPr>
+        <p:spPr>
+          <a:xfrm>
+            <a:off x="461464" y="6320500"/>
+            <a:ext cx="4503738" cy="398463"/>
+          </a:xfrm>
+        </p:spPr>
+        <p:txBody>
+          <a:bodyPr>
+            <a:noAutofit/>
+          </a:bodyPr>
+          <a:lstStyle>
+            <a:lvl1pPr>
+              <a:defRPr sz="1100"/>
+            </a:lvl1pPr>
+            <a:lvl2pPr>
+              <a:defRPr sz="1000"/>
+            </a:lvl2pPr>
+            <a:lvl3pPr>
+              <a:defRPr sz="1000"/>
+            </a:lvl3pPr>
+            <a:lvl4pPr>
+              <a:defRPr sz="1000"/>
+            </a:lvl4pPr>
+            <a:lvl5pPr>
+              <a:defRPr sz="1000"/>
+            </a:lvl5pPr>
+          </a:lstStyle>
+          <a:p>
+            <a:pPr lvl="0"/>
+            <a:r>
+              <a:rPr lang="en-US" dirty="0"/>
+              <a:t>Click to edit Master text styles</a:t>
+            </a:r>
+          </a:p>
+          <a:p>
+            <a:pPr lvl="1"/>
+            <a:r>
+              <a:rPr lang="en-US" dirty="0"/>
+              <a:t>Second level</a:t>
+            </a:r>
+          </a:p>
+          <a:p>
+            <a:pPr lvl="2"/>
+            <a:r>
+              <a:rPr lang="en-US" dirty="0"/>
+              <a:t>Third level</a:t>
+            </a:r>
+          </a:p>
+          <a:p>
+            <a:pPr lvl="3"/>
+            <a:r>
+              <a:rPr lang="en-US" dirty="0"/>
+              <a:t>Fourth level</a:t>
+            </a:r>
+          </a:p>
+          <a:p>
+            <a:pPr lvl="4"/>
+            <a:r>
+              <a:rPr lang="en-US" dirty="0"/>
+              <a:t>Fifth level</a:t>
+            </a:r>
+            <a:endParaRPr lang="en-PE" dirty="0"/>
+          </a:p>
+        </p:txBody>
+      </p:sp>
+    </p:spTree>
+    <p:extLst>
+      <p:ext uri="{BB962C8B-B14F-4D97-AF65-F5344CB8AC3E}">
+        <p14:creationId val="1490820941"/>
+      </p:ext>
+    </p:extLst>
+  </p:cSld>
+  <p:clrMapOvr>
+    <a:masterClrMapping/>
+  </p:clrMapOvr>
+  <p:extLst>
+    <p:ext uri="{DCECCB84-F9BA-43D5-87BE-67443E8EF086}">
+      <p15:sldGuideLst>
+        <p15:guide id="1" orient="horz" pos="4088">
+          <p15:clr>
+            <a:srgbClr val="E4A34C"/>
+          </p15:clr>
+        </p15:guide>
+        <p15:guide id="2" pos="7446">
+          <p15:clr>
+            <a:srgbClr val="E4A34C"/>
+          </p15:clr>
+        </p15:guide>
+      </p15:sldGuideLst>
+    </p:ext>
+  </p:extLst>
 </p:sldLayout>
 </file>
 
@@ -19986,6 +22614,12 @@
     <p:sldLayoutId id="2147483688" r:id="rId23"/>
     <p:sldLayoutId id="2147483703" r:id="rId24"/>
     <p:sldLayoutId id="2147483625" r:id="rId28"/>
+    <p:sldLayoutId id="2147483726" r:id="rId29"/>
+    <p:sldLayoutId id="2147483727" r:id="rId30"/>
+    <p:sldLayoutId id="2147483728" r:id="rId31"/>
+    <p:sldLayoutId id="2147483729" r:id="rId32"/>
+    <p:sldLayoutId id="2147483730" r:id="rId33"/>
+    <p:sldLayoutId id="2147483731" r:id="rId34"/>
   </p:sldLayoutIdLst>
   <p:txStyles xmlns:p="http://schemas.openxmlformats.org/presentationml/2006/main" xmlns:a="http://schemas.openxmlformats.org/drawingml/2006/main">
     <p:titleStyle>

--- a/api/inst/plantillas/plantilla_acnur_16_9.pptx
+++ b/api/inst/plantillas/plantilla_acnur_16_9.pptx
@@ -19668,6 +19668,2117 @@
 </p:sldLayout>
 </file>
 
+<file path=ppt/slideLayouts/slideLayout32.xml><?xml version="1.0" encoding="utf-8"?>
+<p:sldLayout xmlns:a="http://schemas.openxmlformats.org/drawingml/2006/main" xmlns:ns3="http://schemas.microsoft.com/office/drawing/2014/main" xmlns:p="http://schemas.openxmlformats.org/presentationml/2006/main" xmlns:p14="http://schemas.microsoft.com/office/powerpoint/2010/main" xmlns:p15="http://schemas.microsoft.com/office/powerpoint/2012/main" xmlns:r="http://schemas.openxmlformats.org/officeDocument/2006/relationships" matchingName="Dos objetos" preserve="1" userDrawn="1">
+  <p:cSld name="poblacion_3_tira">
+    <p:spTree>
+      <p:nvGrpSpPr>
+        <p:cNvPr id="1" name="Shape 84"/>
+        <p:cNvGrpSpPr/>
+        <p:nvPr/>
+      </p:nvGrpSpPr>
+      <p:grpSpPr>
+        <a:xfrm>
+          <a:off x="0" y="0"/>
+          <a:ext cx="0" cy="0"/>
+          <a:chOff x="0" y="0"/>
+          <a:chExt cx="0" cy="0"/>
+        </a:xfrm>
+      </p:grpSpPr>
+      <p:sp>
+        <p:nvSpPr>
+          <p:cNvPr id="88" name="Google Shape;88;p51"/>
+          <p:cNvSpPr txBox="1">
+            <a:spLocks noGrp="1"/>
+          </p:cNvSpPr>
+          <p:nvPr>
+            <p:ph type="title"/>
+          </p:nvPr>
+        </p:nvSpPr>
+        <p:spPr>
+          <a:xfrm>
+            <a:off x="461464" y="338268"/>
+            <a:ext cx="9626752" cy="666595"/>
+          </a:xfrm>
+          <a:prstGeom prst="rect">
+            <a:avLst/>
+          </a:prstGeom>
+          <a:noFill/>
+          <a:ln>
+            <a:noFill/>
+          </a:ln>
+        </p:spPr>
+        <p:txBody>
+          <a:bodyPr spcFirstLastPara="1" wrap="square" lIns="91425" tIns="45700" rIns="91425" bIns="45700" anchor="ctr" anchorCtr="0">
+            <a:normAutofit/>
+          </a:bodyPr>
+          <a:lstStyle>
+            <a:lvl1pPr lvl="0" algn="l">
+              <a:lnSpc>
+                <a:spcPct val="90000"/>
+              </a:lnSpc>
+              <a:spcBef>
+                <a:spcPts val="0"/>
+              </a:spcBef>
+              <a:spcAft>
+                <a:spcPts val="0"/>
+              </a:spcAft>
+              <a:buClr>
+                <a:srgbClr val="CA5651"/>
+              </a:buClr>
+              <a:buSzPts val="2400"/>
+              <a:buFont typeface="Arial"/>
+              <a:buNone/>
+              <a:defRPr sz="2400" b="1" cap="none">
+                <a:solidFill>
+                  <a:srgbClr val="CA5651"/>
+                </a:solidFill>
+                <a:latin typeface="Arial"/>
+                <a:ea typeface="Arial"/>
+                <a:cs typeface="Arial"/>
+                <a:sym typeface="Arial"/>
+              </a:defRPr>
+            </a:lvl1pPr>
+            <a:lvl2pPr lvl="1" algn="l">
+              <a:lnSpc>
+                <a:spcPct val="100000"/>
+              </a:lnSpc>
+              <a:spcBef>
+                <a:spcPts val="0"/>
+              </a:spcBef>
+              <a:spcAft>
+                <a:spcPts val="0"/>
+              </a:spcAft>
+              <a:buSzPts val="1400"/>
+              <a:buNone/>
+              <a:defRPr sz="2400" b="1">
+                <a:latin typeface="Arial"/>
+                <a:solidFill>
+                  <a:srgbClr val="CA5651"/>
+                </a:solidFill>
+              </a:defRPr>
+            </a:lvl2pPr>
+            <a:lvl3pPr lvl="2" algn="l">
+              <a:lnSpc>
+                <a:spcPct val="100000"/>
+              </a:lnSpc>
+              <a:spcBef>
+                <a:spcPts val="0"/>
+              </a:spcBef>
+              <a:spcAft>
+                <a:spcPts val="0"/>
+              </a:spcAft>
+              <a:buSzPts val="1400"/>
+              <a:buNone/>
+              <a:defRPr sz="2400" b="1">
+                <a:latin typeface="Arial"/>
+                <a:solidFill>
+                  <a:srgbClr val="CA5651"/>
+                </a:solidFill>
+              </a:defRPr>
+            </a:lvl3pPr>
+            <a:lvl4pPr lvl="3" algn="l">
+              <a:lnSpc>
+                <a:spcPct val="100000"/>
+              </a:lnSpc>
+              <a:spcBef>
+                <a:spcPts val="0"/>
+              </a:spcBef>
+              <a:spcAft>
+                <a:spcPts val="0"/>
+              </a:spcAft>
+              <a:buSzPts val="1400"/>
+              <a:buNone/>
+              <a:defRPr sz="2400" b="1">
+                <a:latin typeface="Arial"/>
+                <a:solidFill>
+                  <a:srgbClr val="CA5651"/>
+                </a:solidFill>
+              </a:defRPr>
+            </a:lvl4pPr>
+            <a:lvl5pPr lvl="4" algn="l">
+              <a:lnSpc>
+                <a:spcPct val="100000"/>
+              </a:lnSpc>
+              <a:spcBef>
+                <a:spcPts val="0"/>
+              </a:spcBef>
+              <a:spcAft>
+                <a:spcPts val="0"/>
+              </a:spcAft>
+              <a:buSzPts val="1400"/>
+              <a:buNone/>
+              <a:defRPr sz="2400" b="1">
+                <a:latin typeface="Arial"/>
+                <a:solidFill>
+                  <a:srgbClr val="CA5651"/>
+                </a:solidFill>
+              </a:defRPr>
+            </a:lvl5pPr>
+            <a:lvl6pPr lvl="5" algn="l">
+              <a:lnSpc>
+                <a:spcPct val="100000"/>
+              </a:lnSpc>
+              <a:spcBef>
+                <a:spcPts val="0"/>
+              </a:spcBef>
+              <a:spcAft>
+                <a:spcPts val="0"/>
+              </a:spcAft>
+              <a:buSzPts val="1400"/>
+              <a:buNone/>
+              <a:defRPr sz="2400" b="1">
+                <a:latin typeface="Arial"/>
+                <a:solidFill>
+                  <a:srgbClr val="CA5651"/>
+                </a:solidFill>
+              </a:defRPr>
+            </a:lvl6pPr>
+            <a:lvl7pPr lvl="6" algn="l">
+              <a:lnSpc>
+                <a:spcPct val="100000"/>
+              </a:lnSpc>
+              <a:spcBef>
+                <a:spcPts val="0"/>
+              </a:spcBef>
+              <a:spcAft>
+                <a:spcPts val="0"/>
+              </a:spcAft>
+              <a:buSzPts val="1400"/>
+              <a:buNone/>
+              <a:defRPr sz="2400" b="1">
+                <a:latin typeface="Arial"/>
+                <a:solidFill>
+                  <a:srgbClr val="CA5651"/>
+                </a:solidFill>
+              </a:defRPr>
+            </a:lvl7pPr>
+            <a:lvl8pPr lvl="7" algn="l">
+              <a:lnSpc>
+                <a:spcPct val="100000"/>
+              </a:lnSpc>
+              <a:spcBef>
+                <a:spcPts val="0"/>
+              </a:spcBef>
+              <a:spcAft>
+                <a:spcPts val="0"/>
+              </a:spcAft>
+              <a:buSzPts val="1400"/>
+              <a:buNone/>
+              <a:defRPr sz="2400" b="1">
+                <a:latin typeface="Arial"/>
+                <a:solidFill>
+                  <a:srgbClr val="CA5651"/>
+                </a:solidFill>
+              </a:defRPr>
+            </a:lvl8pPr>
+            <a:lvl9pPr lvl="8" algn="l">
+              <a:lnSpc>
+                <a:spcPct val="100000"/>
+              </a:lnSpc>
+              <a:spcBef>
+                <a:spcPts val="0"/>
+              </a:spcBef>
+              <a:spcAft>
+                <a:spcPts val="0"/>
+              </a:spcAft>
+              <a:buSzPts val="1400"/>
+              <a:buNone/>
+              <a:defRPr sz="2400" b="1">
+                <a:latin typeface="Arial"/>
+                <a:solidFill>
+                  <a:srgbClr val="CA5651"/>
+                </a:solidFill>
+              </a:defRPr>
+            </a:lvl9pPr>
+          </a:lstStyle>
+          <a:p>
+            <a:r>
+              <a:rPr lang="es-MX" sz="2400" b="1">
+                <a:latin typeface="Arial"/>
+                <a:solidFill>
+                  <a:srgbClr val="CA5651"/>
+                </a:solidFill>
+              </a:rPr>
+              <a:t>Haz clic para modificar el estilo de título del patrón</a:t>
+            </a:r>
+            <a:endParaRPr dirty="0" sz="2400" b="1">
+              <a:latin typeface="Arial"/>
+              <a:solidFill>
+                <a:srgbClr val="CA5651"/>
+              </a:solidFill>
+            </a:endParaRPr>
+          </a:p>
+        </p:txBody>
+      </p:sp>
+      <p:sp>
+        <p:nvSpPr>
+          <p:cNvPr id="6" name="Picture Placeholder 5">
+            <a:extLst>
+              <a:ext uri="{FF2B5EF4-FFF2-40B4-BE49-F238E27FC236}">
+                <ns3:creationId id="{EB977788-EA90-94F5-A207-15EBBD7FEAB5}"/>
+              </a:ext>
+            </a:extLst>
+          </p:cNvPr>
+          <p:cNvSpPr>
+            <a:spLocks noGrp="1"/>
+          </p:cNvSpPr>
+          <p:nvPr>
+            <p:ph type="pic" sz="quarter" idx="10"/>
+          </p:nvPr>
+        </p:nvSpPr>
+        <p:spPr>
+          <a:xfrm>
+            <a:off x="2011680" y="1212494"/>
+            <a:ext cx="9802368" cy="1417320"/>
+          </a:xfrm>
+        </p:spPr>
+        <p:txBody>
+          <a:bodyPr/>
+          <a:lstStyle/>
+          <a:p>
+            <a:endParaRPr lang="en-PE" dirty="0"/>
+          </a:p>
+          <a:p>
+            <a:endParaRPr lang="en-PE" dirty="0"/>
+          </a:p>
+        </p:txBody>
+      </p:sp>
+      <p:sp>
+        <p:nvSpPr>
+          <p:cNvPr id="7" name="Picture Placeholder 5">
+            <a:extLst>
+              <a:ext uri="{FF2B5EF4-FFF2-40B4-BE49-F238E27FC236}">
+                <ns3:creationId id="{0519FE1F-4FD7-A2A0-81FB-8DCD6F26C4FB}"/>
+              </a:ext>
+            </a:extLst>
+          </p:cNvPr>
+          <p:cNvSpPr>
+            <a:spLocks noGrp="1"/>
+          </p:cNvSpPr>
+          <p:nvPr>
+            <p:ph type="pic" sz="quarter" idx="11"/>
+          </p:nvPr>
+        </p:nvSpPr>
+        <p:spPr>
+          <a:xfrm>
+            <a:off x="2011680" y="2926080"/>
+            <a:ext cx="9802368" cy="1417320"/>
+          </a:xfrm>
+        </p:spPr>
+        <p:txBody>
+          <a:bodyPr/>
+          <a:lstStyle/>
+          <a:p>
+            <a:endParaRPr lang="en-PE" dirty="0"/>
+          </a:p>
+        </p:txBody>
+      </p:sp>
+      <p:sp>
+        <p:nvSpPr>
+          <p:cNvPr id="8" name="Picture Placeholder 5">
+            <a:extLst>
+              <a:ext uri="{FF2B5EF4-FFF2-40B4-BE49-F238E27FC236}">
+                <ns3:creationId id="{358A77CA-4946-E677-D51B-A8CE149E91B8}"/>
+              </a:ext>
+            </a:extLst>
+          </p:cNvPr>
+          <p:cNvSpPr>
+            <a:spLocks noGrp="1"/>
+          </p:cNvSpPr>
+          <p:nvPr>
+            <p:ph type="pic" sz="quarter" idx="12"/>
+          </p:nvPr>
+        </p:nvSpPr>
+        <p:spPr>
+          <a:xfrm>
+            <a:off x="2011680" y="4663440"/>
+            <a:ext cx="9802368" cy="1417320"/>
+          </a:xfrm>
+        </p:spPr>
+        <p:txBody>
+          <a:bodyPr/>
+          <a:lstStyle/>
+          <a:p>
+            <a:endParaRPr lang="en-PE" dirty="0"/>
+          </a:p>
+          <a:p>
+            <a:endParaRPr lang="en-PE" dirty="0"/>
+          </a:p>
+        </p:txBody>
+      </p:sp>
+      <p:sp>
+        <p:nvSpPr>
+          <p:cNvPr id="2" name="Text Placeholder 9">
+            <a:extLst>
+              <a:ext uri="{FF2B5EF4-FFF2-40B4-BE49-F238E27FC236}">
+                <ns3:creationId id="{0C929747-7B86-54B8-A590-1398C659B7EC}"/>
+              </a:ext>
+            </a:extLst>
+          </p:cNvPr>
+          <p:cNvSpPr>
+            <a:spLocks noGrp="1"/>
+          </p:cNvSpPr>
+          <p:nvPr>
+            <p:ph type="body" sz="quarter" idx="14"/>
+          </p:nvPr>
+        </p:nvSpPr>
+        <p:spPr>
+          <a:xfrm>
+            <a:off x="461464" y="6320500"/>
+            <a:ext cx="4503738" cy="398463"/>
+          </a:xfrm>
+        </p:spPr>
+        <p:txBody>
+          <a:bodyPr>
+            <a:noAutofit/>
+          </a:bodyPr>
+          <a:lstStyle>
+            <a:lvl1pPr>
+              <a:defRPr sz="1100"/>
+            </a:lvl1pPr>
+            <a:lvl2pPr>
+              <a:defRPr sz="1000"/>
+            </a:lvl2pPr>
+            <a:lvl3pPr>
+              <a:defRPr sz="1000"/>
+            </a:lvl3pPr>
+            <a:lvl4pPr>
+              <a:defRPr sz="1000"/>
+            </a:lvl4pPr>
+            <a:lvl5pPr>
+              <a:defRPr sz="1000"/>
+            </a:lvl5pPr>
+          </a:lstStyle>
+          <a:p>
+            <a:pPr lvl="0"/>
+            <a:r>
+              <a:rPr lang="en-US" dirty="0"/>
+              <a:t>Click to edit Master text styles</a:t>
+            </a:r>
+          </a:p>
+          <a:p>
+            <a:pPr lvl="1"/>
+            <a:r>
+              <a:rPr lang="en-US" dirty="0"/>
+              <a:t>Second level</a:t>
+            </a:r>
+          </a:p>
+          <a:p>
+            <a:pPr lvl="2"/>
+            <a:r>
+              <a:rPr lang="en-US" dirty="0"/>
+              <a:t>Third level</a:t>
+            </a:r>
+          </a:p>
+          <a:p>
+            <a:pPr lvl="3"/>
+            <a:r>
+              <a:rPr lang="en-US" dirty="0"/>
+              <a:t>Fourth level</a:t>
+            </a:r>
+          </a:p>
+          <a:p>
+            <a:pPr lvl="4"/>
+            <a:r>
+              <a:rPr lang="en-US" dirty="0"/>
+              <a:t>Fifth level</a:t>
+            </a:r>
+            <a:endParaRPr lang="en-PE" dirty="0"/>
+          </a:p>
+        </p:txBody>
+      </p:sp>
+      <p:sp>
+        <p:nvSpPr>
+          <p:cNvPr id="15" name="Content Placeholder 5">
+            <a:extLst>
+              <a:ext uri="{FF2B5EF4-FFF2-40B4-BE49-F238E27FC236}">
+                <ns3:creationId id="{90549C15-2749-16D6-FCA5-952FD115553E}"/>
+              </a:ext>
+            </a:extLst>
+          </p:cNvPr>
+          <p:cNvSpPr>
+            <a:spLocks noGrp="1"/>
+          </p:cNvSpPr>
+          <p:nvPr>
+            <p:ph sz="quarter" idx="15"/>
+          </p:nvPr>
+        </p:nvSpPr>
+        <p:spPr>
+          <a:xfrm>
+            <a:off x="502920" y="2834640"/>
+            <a:ext cx="1234440" cy="1234440"/>
+          </a:xfrm>
+        </p:spPr>
+        <p:txBody>
+          <a:bodyPr/>
+          <a:lstStyle/>
+          <a:p>
+            <a:pPr lvl="0"/>
+            <a:r>
+              <a:rPr lang="en-US" dirty="0"/>
+              <a:t>Click to edit Master text styles</a:t>
+            </a:r>
+          </a:p>
+          <a:p>
+            <a:pPr lvl="1"/>
+            <a:r>
+              <a:rPr lang="en-US" dirty="0"/>
+              <a:t>Second level</a:t>
+            </a:r>
+          </a:p>
+          <a:p>
+            <a:pPr lvl="2"/>
+            <a:r>
+              <a:rPr lang="en-US" dirty="0"/>
+              <a:t>Third level</a:t>
+            </a:r>
+          </a:p>
+          <a:p>
+            <a:pPr lvl="3"/>
+            <a:r>
+              <a:rPr lang="en-US" dirty="0"/>
+              <a:t>Fourth level</a:t>
+            </a:r>
+          </a:p>
+          <a:p>
+            <a:pPr lvl="4"/>
+            <a:r>
+              <a:rPr lang="en-US" dirty="0"/>
+              <a:t>Fifth level</a:t>
+            </a:r>
+            <a:endParaRPr lang="en-PE" dirty="0"/>
+          </a:p>
+        </p:txBody>
+      </p:sp>
+    </p:spTree>
+    <p:extLst>
+      <p:ext uri="{BB962C8B-B14F-4D97-AF65-F5344CB8AC3E}">
+        <p14:creationId val="1490820941"/>
+      </p:ext>
+    </p:extLst>
+  </p:cSld>
+  <p:clrMapOvr>
+    <a:masterClrMapping/>
+  </p:clrMapOvr>
+  <p:extLst>
+    <p:ext uri="{DCECCB84-F9BA-43D5-87BE-67443E8EF086}">
+      <p15:sldGuideLst>
+        <p15:guide id="1" orient="horz" pos="4088">
+          <p15:clr>
+            <a:srgbClr val="E4A34C"/>
+          </p15:clr>
+        </p15:guide>
+        <p15:guide id="2" pos="7446">
+          <p15:clr>
+            <a:srgbClr val="E4A34C"/>
+          </p15:clr>
+        </p15:guide>
+      </p15:sldGuideLst>
+    </p:ext>
+  </p:extLst>
+</p:sldLayout>
+</file>
+
+<file path=ppt/slideLayouts/slideLayout33.xml><?xml version="1.0" encoding="utf-8"?>
+<p:sldLayout xmlns:a="http://schemas.openxmlformats.org/drawingml/2006/main" xmlns:ns3="http://schemas.microsoft.com/office/drawing/2014/main" xmlns:p="http://schemas.openxmlformats.org/presentationml/2006/main" xmlns:p14="http://schemas.microsoft.com/office/powerpoint/2010/main" xmlns:p15="http://schemas.microsoft.com/office/powerpoint/2012/main" xmlns:r="http://schemas.openxmlformats.org/officeDocument/2006/relationships" matchingName="Dos objetos" preserve="1" userDrawn="1">
+  <p:cSld name="poblacion_3_corona">
+    <p:spTree>
+      <p:nvGrpSpPr>
+        <p:cNvPr id="1" name="Shape 84"/>
+        <p:cNvGrpSpPr/>
+        <p:nvPr/>
+      </p:nvGrpSpPr>
+      <p:grpSpPr>
+        <a:xfrm>
+          <a:off x="0" y="0"/>
+          <a:ext cx="0" cy="0"/>
+          <a:chOff x="0" y="0"/>
+          <a:chExt cx="0" cy="0"/>
+        </a:xfrm>
+      </p:grpSpPr>
+      <p:sp>
+        <p:nvSpPr>
+          <p:cNvPr id="88" name="Google Shape;88;p51"/>
+          <p:cNvSpPr txBox="1">
+            <a:spLocks noGrp="1"/>
+          </p:cNvSpPr>
+          <p:nvPr>
+            <p:ph type="title"/>
+          </p:nvPr>
+        </p:nvSpPr>
+        <p:spPr>
+          <a:xfrm>
+            <a:off x="461464" y="338268"/>
+            <a:ext cx="9626752" cy="666595"/>
+          </a:xfrm>
+          <a:prstGeom prst="rect">
+            <a:avLst/>
+          </a:prstGeom>
+          <a:noFill/>
+          <a:ln>
+            <a:noFill/>
+          </a:ln>
+        </p:spPr>
+        <p:txBody>
+          <a:bodyPr spcFirstLastPara="1" wrap="square" lIns="91425" tIns="45700" rIns="91425" bIns="45700" anchor="ctr" anchorCtr="0">
+            <a:normAutofit/>
+          </a:bodyPr>
+          <a:lstStyle>
+            <a:lvl1pPr lvl="0" algn="l">
+              <a:lnSpc>
+                <a:spcPct val="90000"/>
+              </a:lnSpc>
+              <a:spcBef>
+                <a:spcPts val="0"/>
+              </a:spcBef>
+              <a:spcAft>
+                <a:spcPts val="0"/>
+              </a:spcAft>
+              <a:buClr>
+                <a:srgbClr val="CA5651"/>
+              </a:buClr>
+              <a:buSzPts val="2400"/>
+              <a:buFont typeface="Arial"/>
+              <a:buNone/>
+              <a:defRPr sz="2400" b="1" cap="none">
+                <a:solidFill>
+                  <a:srgbClr val="CA5651"/>
+                </a:solidFill>
+                <a:latin typeface="Arial"/>
+                <a:ea typeface="Arial"/>
+                <a:cs typeface="Arial"/>
+                <a:sym typeface="Arial"/>
+              </a:defRPr>
+            </a:lvl1pPr>
+            <a:lvl2pPr lvl="1" algn="l">
+              <a:lnSpc>
+                <a:spcPct val="100000"/>
+              </a:lnSpc>
+              <a:spcBef>
+                <a:spcPts val="0"/>
+              </a:spcBef>
+              <a:spcAft>
+                <a:spcPts val="0"/>
+              </a:spcAft>
+              <a:buSzPts val="1400"/>
+              <a:buNone/>
+              <a:defRPr sz="2400" b="1">
+                <a:latin typeface="Arial"/>
+                <a:solidFill>
+                  <a:srgbClr val="CA5651"/>
+                </a:solidFill>
+              </a:defRPr>
+            </a:lvl2pPr>
+            <a:lvl3pPr lvl="2" algn="l">
+              <a:lnSpc>
+                <a:spcPct val="100000"/>
+              </a:lnSpc>
+              <a:spcBef>
+                <a:spcPts val="0"/>
+              </a:spcBef>
+              <a:spcAft>
+                <a:spcPts val="0"/>
+              </a:spcAft>
+              <a:buSzPts val="1400"/>
+              <a:buNone/>
+              <a:defRPr sz="2400" b="1">
+                <a:latin typeface="Arial"/>
+                <a:solidFill>
+                  <a:srgbClr val="CA5651"/>
+                </a:solidFill>
+              </a:defRPr>
+            </a:lvl3pPr>
+            <a:lvl4pPr lvl="3" algn="l">
+              <a:lnSpc>
+                <a:spcPct val="100000"/>
+              </a:lnSpc>
+              <a:spcBef>
+                <a:spcPts val="0"/>
+              </a:spcBef>
+              <a:spcAft>
+                <a:spcPts val="0"/>
+              </a:spcAft>
+              <a:buSzPts val="1400"/>
+              <a:buNone/>
+              <a:defRPr sz="2400" b="1">
+                <a:latin typeface="Arial"/>
+                <a:solidFill>
+                  <a:srgbClr val="CA5651"/>
+                </a:solidFill>
+              </a:defRPr>
+            </a:lvl4pPr>
+            <a:lvl5pPr lvl="4" algn="l">
+              <a:lnSpc>
+                <a:spcPct val="100000"/>
+              </a:lnSpc>
+              <a:spcBef>
+                <a:spcPts val="0"/>
+              </a:spcBef>
+              <a:spcAft>
+                <a:spcPts val="0"/>
+              </a:spcAft>
+              <a:buSzPts val="1400"/>
+              <a:buNone/>
+              <a:defRPr sz="2400" b="1">
+                <a:latin typeface="Arial"/>
+                <a:solidFill>
+                  <a:srgbClr val="CA5651"/>
+                </a:solidFill>
+              </a:defRPr>
+            </a:lvl5pPr>
+            <a:lvl6pPr lvl="5" algn="l">
+              <a:lnSpc>
+                <a:spcPct val="100000"/>
+              </a:lnSpc>
+              <a:spcBef>
+                <a:spcPts val="0"/>
+              </a:spcBef>
+              <a:spcAft>
+                <a:spcPts val="0"/>
+              </a:spcAft>
+              <a:buSzPts val="1400"/>
+              <a:buNone/>
+              <a:defRPr sz="2400" b="1">
+                <a:latin typeface="Arial"/>
+                <a:solidFill>
+                  <a:srgbClr val="CA5651"/>
+                </a:solidFill>
+              </a:defRPr>
+            </a:lvl6pPr>
+            <a:lvl7pPr lvl="6" algn="l">
+              <a:lnSpc>
+                <a:spcPct val="100000"/>
+              </a:lnSpc>
+              <a:spcBef>
+                <a:spcPts val="0"/>
+              </a:spcBef>
+              <a:spcAft>
+                <a:spcPts val="0"/>
+              </a:spcAft>
+              <a:buSzPts val="1400"/>
+              <a:buNone/>
+              <a:defRPr sz="2400" b="1">
+                <a:latin typeface="Arial"/>
+                <a:solidFill>
+                  <a:srgbClr val="CA5651"/>
+                </a:solidFill>
+              </a:defRPr>
+            </a:lvl7pPr>
+            <a:lvl8pPr lvl="7" algn="l">
+              <a:lnSpc>
+                <a:spcPct val="100000"/>
+              </a:lnSpc>
+              <a:spcBef>
+                <a:spcPts val="0"/>
+              </a:spcBef>
+              <a:spcAft>
+                <a:spcPts val="0"/>
+              </a:spcAft>
+              <a:buSzPts val="1400"/>
+              <a:buNone/>
+              <a:defRPr sz="2400" b="1">
+                <a:latin typeface="Arial"/>
+                <a:solidFill>
+                  <a:srgbClr val="CA5651"/>
+                </a:solidFill>
+              </a:defRPr>
+            </a:lvl8pPr>
+            <a:lvl9pPr lvl="8" algn="l">
+              <a:lnSpc>
+                <a:spcPct val="100000"/>
+              </a:lnSpc>
+              <a:spcBef>
+                <a:spcPts val="0"/>
+              </a:spcBef>
+              <a:spcAft>
+                <a:spcPts val="0"/>
+              </a:spcAft>
+              <a:buSzPts val="1400"/>
+              <a:buNone/>
+              <a:defRPr sz="2400" b="1">
+                <a:latin typeface="Arial"/>
+                <a:solidFill>
+                  <a:srgbClr val="CA5651"/>
+                </a:solidFill>
+              </a:defRPr>
+            </a:lvl9pPr>
+          </a:lstStyle>
+          <a:p>
+            <a:r>
+              <a:rPr lang="es-MX" sz="2400" b="1">
+                <a:latin typeface="Arial"/>
+                <a:solidFill>
+                  <a:srgbClr val="CA5651"/>
+                </a:solidFill>
+              </a:rPr>
+              <a:t>Haz clic para modificar el estilo de título del patrón</a:t>
+            </a:r>
+            <a:endParaRPr dirty="0" sz="2400" b="1">
+              <a:latin typeface="Arial"/>
+              <a:solidFill>
+                <a:srgbClr val="CA5651"/>
+              </a:solidFill>
+            </a:endParaRPr>
+          </a:p>
+        </p:txBody>
+      </p:sp>
+      <p:sp>
+        <p:nvSpPr>
+          <p:cNvPr id="6" name="Picture Placeholder 5">
+            <a:extLst>
+              <a:ext uri="{FF2B5EF4-FFF2-40B4-BE49-F238E27FC236}">
+                <ns3:creationId id="{EB977788-EA90-94F5-A207-15EBBD7FEAB5}"/>
+              </a:ext>
+            </a:extLst>
+          </p:cNvPr>
+          <p:cNvSpPr>
+            <a:spLocks noGrp="1"/>
+          </p:cNvSpPr>
+          <p:nvPr>
+            <p:ph type="pic" sz="quarter" idx="10"/>
+          </p:nvPr>
+        </p:nvSpPr>
+        <p:spPr>
+          <a:xfrm>
+            <a:off x="461772" y="1212494"/>
+            <a:ext cx="4206240" cy="2011680"/>
+          </a:xfrm>
+        </p:spPr>
+        <p:txBody>
+          <a:bodyPr/>
+          <a:lstStyle/>
+          <a:p>
+            <a:endParaRPr lang="en-PE" dirty="0"/>
+          </a:p>
+          <a:p>
+            <a:endParaRPr lang="en-PE" dirty="0"/>
+          </a:p>
+        </p:txBody>
+      </p:sp>
+      <p:sp>
+        <p:nvSpPr>
+          <p:cNvPr id="7" name="Picture Placeholder 5">
+            <a:extLst>
+              <a:ext uri="{FF2B5EF4-FFF2-40B4-BE49-F238E27FC236}">
+                <ns3:creationId id="{0519FE1F-4FD7-A2A0-81FB-8DCD6F26C4FB}"/>
+              </a:ext>
+            </a:extLst>
+          </p:cNvPr>
+          <p:cNvSpPr>
+            <a:spLocks noGrp="1"/>
+          </p:cNvSpPr>
+          <p:nvPr>
+            <p:ph type="pic" sz="quarter" idx="11"/>
+          </p:nvPr>
+        </p:nvSpPr>
+        <p:spPr>
+          <a:xfrm>
+            <a:off x="7607808" y="1212494"/>
+            <a:ext cx="4206240" cy="2011680"/>
+          </a:xfrm>
+        </p:spPr>
+        <p:txBody>
+          <a:bodyPr/>
+          <a:lstStyle/>
+          <a:p>
+            <a:endParaRPr lang="en-PE" dirty="0"/>
+          </a:p>
+        </p:txBody>
+      </p:sp>
+      <p:sp>
+        <p:nvSpPr>
+          <p:cNvPr id="8" name="Picture Placeholder 5">
+            <a:extLst>
+              <a:ext uri="{FF2B5EF4-FFF2-40B4-BE49-F238E27FC236}">
+                <ns3:creationId id="{358A77CA-4946-E677-D51B-A8CE149E91B8}"/>
+              </a:ext>
+            </a:extLst>
+          </p:cNvPr>
+          <p:cNvSpPr>
+            <a:spLocks noGrp="1"/>
+          </p:cNvSpPr>
+          <p:nvPr>
+            <p:ph type="pic" sz="quarter" idx="12"/>
+          </p:nvPr>
+        </p:nvSpPr>
+        <p:spPr>
+          <a:xfrm>
+            <a:off x="2926080" y="4617720"/>
+            <a:ext cx="6400800" cy="1463040"/>
+          </a:xfrm>
+        </p:spPr>
+        <p:txBody>
+          <a:bodyPr/>
+          <a:lstStyle/>
+          <a:p>
+            <a:endParaRPr lang="en-PE" dirty="0"/>
+          </a:p>
+          <a:p>
+            <a:endParaRPr lang="en-PE" dirty="0"/>
+          </a:p>
+        </p:txBody>
+      </p:sp>
+      <p:sp>
+        <p:nvSpPr>
+          <p:cNvPr id="2" name="Text Placeholder 9">
+            <a:extLst>
+              <a:ext uri="{FF2B5EF4-FFF2-40B4-BE49-F238E27FC236}">
+                <ns3:creationId id="{0C929747-7B86-54B8-A590-1398C659B7EC}"/>
+              </a:ext>
+            </a:extLst>
+          </p:cNvPr>
+          <p:cNvSpPr>
+            <a:spLocks noGrp="1"/>
+          </p:cNvSpPr>
+          <p:nvPr>
+            <p:ph type="body" sz="quarter" idx="14"/>
+          </p:nvPr>
+        </p:nvSpPr>
+        <p:spPr>
+          <a:xfrm>
+            <a:off x="461464" y="6320500"/>
+            <a:ext cx="4503738" cy="398463"/>
+          </a:xfrm>
+        </p:spPr>
+        <p:txBody>
+          <a:bodyPr>
+            <a:noAutofit/>
+          </a:bodyPr>
+          <a:lstStyle>
+            <a:lvl1pPr>
+              <a:defRPr sz="1100"/>
+            </a:lvl1pPr>
+            <a:lvl2pPr>
+              <a:defRPr sz="1000"/>
+            </a:lvl2pPr>
+            <a:lvl3pPr>
+              <a:defRPr sz="1000"/>
+            </a:lvl3pPr>
+            <a:lvl4pPr>
+              <a:defRPr sz="1000"/>
+            </a:lvl4pPr>
+            <a:lvl5pPr>
+              <a:defRPr sz="1000"/>
+            </a:lvl5pPr>
+          </a:lstStyle>
+          <a:p>
+            <a:pPr lvl="0"/>
+            <a:r>
+              <a:rPr lang="en-US" dirty="0"/>
+              <a:t>Click to edit Master text styles</a:t>
+            </a:r>
+          </a:p>
+          <a:p>
+            <a:pPr lvl="1"/>
+            <a:r>
+              <a:rPr lang="en-US" dirty="0"/>
+              <a:t>Second level</a:t>
+            </a:r>
+          </a:p>
+          <a:p>
+            <a:pPr lvl="2"/>
+            <a:r>
+              <a:rPr lang="en-US" dirty="0"/>
+              <a:t>Third level</a:t>
+            </a:r>
+          </a:p>
+          <a:p>
+            <a:pPr lvl="3"/>
+            <a:r>
+              <a:rPr lang="en-US" dirty="0"/>
+              <a:t>Fourth level</a:t>
+            </a:r>
+          </a:p>
+          <a:p>
+            <a:pPr lvl="4"/>
+            <a:r>
+              <a:rPr lang="en-US" dirty="0"/>
+              <a:t>Fifth level</a:t>
+            </a:r>
+            <a:endParaRPr lang="en-PE" dirty="0"/>
+          </a:p>
+        </p:txBody>
+      </p:sp>
+      <p:sp>
+        <p:nvSpPr>
+          <p:cNvPr id="15" name="Content Placeholder 5">
+            <a:extLst>
+              <a:ext uri="{FF2B5EF4-FFF2-40B4-BE49-F238E27FC236}">
+                <ns3:creationId id="{90549C15-2749-16D6-FCA5-952FD115553E}"/>
+              </a:ext>
+            </a:extLst>
+          </p:cNvPr>
+          <p:cNvSpPr>
+            <a:spLocks noGrp="1"/>
+          </p:cNvSpPr>
+          <p:nvPr>
+            <p:ph sz="quarter" idx="15"/>
+          </p:nvPr>
+        </p:nvSpPr>
+        <p:spPr>
+          <a:xfrm>
+            <a:off x="5285232" y="2889504"/>
+            <a:ext cx="1737360" cy="1737360"/>
+          </a:xfrm>
+        </p:spPr>
+        <p:txBody>
+          <a:bodyPr/>
+          <a:lstStyle/>
+          <a:p>
+            <a:pPr lvl="0"/>
+            <a:r>
+              <a:rPr lang="en-US" dirty="0"/>
+              <a:t>Click to edit Master text styles</a:t>
+            </a:r>
+          </a:p>
+          <a:p>
+            <a:pPr lvl="1"/>
+            <a:r>
+              <a:rPr lang="en-US" dirty="0"/>
+              <a:t>Second level</a:t>
+            </a:r>
+          </a:p>
+          <a:p>
+            <a:pPr lvl="2"/>
+            <a:r>
+              <a:rPr lang="en-US" dirty="0"/>
+              <a:t>Third level</a:t>
+            </a:r>
+          </a:p>
+          <a:p>
+            <a:pPr lvl="3"/>
+            <a:r>
+              <a:rPr lang="en-US" dirty="0"/>
+              <a:t>Fourth level</a:t>
+            </a:r>
+          </a:p>
+          <a:p>
+            <a:pPr lvl="4"/>
+            <a:r>
+              <a:rPr lang="en-US" dirty="0"/>
+              <a:t>Fifth level</a:t>
+            </a:r>
+            <a:endParaRPr lang="en-PE" dirty="0"/>
+          </a:p>
+        </p:txBody>
+      </p:sp>
+    </p:spTree>
+    <p:extLst>
+      <p:ext uri="{BB962C8B-B14F-4D97-AF65-F5344CB8AC3E}">
+        <p14:creationId val="1490820941"/>
+      </p:ext>
+    </p:extLst>
+  </p:cSld>
+  <p:clrMapOvr>
+    <a:masterClrMapping/>
+  </p:clrMapOvr>
+  <p:extLst>
+    <p:ext uri="{DCECCB84-F9BA-43D5-87BE-67443E8EF086}">
+      <p15:sldGuideLst>
+        <p15:guide id="1" orient="horz" pos="4088">
+          <p15:clr>
+            <a:srgbClr val="E4A34C"/>
+          </p15:clr>
+        </p15:guide>
+        <p15:guide id="2" pos="7446">
+          <p15:clr>
+            <a:srgbClr val="E4A34C"/>
+          </p15:clr>
+        </p15:guide>
+      </p15:sldGuideLst>
+    </p:ext>
+  </p:extLst>
+</p:sldLayout>
+</file>
+
+<file path=ppt/slideLayouts/slideLayout34.xml><?xml version="1.0" encoding="utf-8"?>
+<p:sldLayout xmlns:a="http://schemas.openxmlformats.org/drawingml/2006/main" xmlns:ns3="http://schemas.microsoft.com/office/drawing/2014/main" xmlns:p="http://schemas.openxmlformats.org/presentationml/2006/main" xmlns:p14="http://schemas.microsoft.com/office/powerpoint/2010/main" xmlns:p15="http://schemas.microsoft.com/office/powerpoint/2012/main" xmlns:r="http://schemas.openxmlformats.org/officeDocument/2006/relationships" matchingName="Dos objetos" preserve="1" userDrawn="1">
+  <p:cSld name="poblacion_3_cifras">
+    <p:spTree>
+      <p:nvGrpSpPr>
+        <p:cNvPr id="1" name="Shape 84"/>
+        <p:cNvGrpSpPr/>
+        <p:nvPr/>
+      </p:nvGrpSpPr>
+      <p:grpSpPr>
+        <a:xfrm>
+          <a:off x="0" y="0"/>
+          <a:ext cx="0" cy="0"/>
+          <a:chOff x="0" y="0"/>
+          <a:chExt cx="0" cy="0"/>
+        </a:xfrm>
+      </p:grpSpPr>
+      <p:sp>
+        <p:nvSpPr>
+          <p:cNvPr id="88" name="Google Shape;88;p51"/>
+          <p:cNvSpPr txBox="1">
+            <a:spLocks noGrp="1"/>
+          </p:cNvSpPr>
+          <p:nvPr>
+            <p:ph type="title"/>
+          </p:nvPr>
+        </p:nvSpPr>
+        <p:spPr>
+          <a:xfrm>
+            <a:off x="461464" y="338268"/>
+            <a:ext cx="9626752" cy="666595"/>
+          </a:xfrm>
+          <a:prstGeom prst="rect">
+            <a:avLst/>
+          </a:prstGeom>
+          <a:noFill/>
+          <a:ln>
+            <a:noFill/>
+          </a:ln>
+        </p:spPr>
+        <p:txBody>
+          <a:bodyPr spcFirstLastPara="1" wrap="square" lIns="91425" tIns="45700" rIns="91425" bIns="45700" anchor="ctr" anchorCtr="0">
+            <a:normAutofit/>
+          </a:bodyPr>
+          <a:lstStyle>
+            <a:lvl1pPr lvl="0" algn="l">
+              <a:lnSpc>
+                <a:spcPct val="90000"/>
+              </a:lnSpc>
+              <a:spcBef>
+                <a:spcPts val="0"/>
+              </a:spcBef>
+              <a:spcAft>
+                <a:spcPts val="0"/>
+              </a:spcAft>
+              <a:buClr>
+                <a:srgbClr val="CA5651"/>
+              </a:buClr>
+              <a:buSzPts val="2400"/>
+              <a:buFont typeface="Arial"/>
+              <a:buNone/>
+              <a:defRPr sz="2400" b="1" cap="none">
+                <a:solidFill>
+                  <a:srgbClr val="CA5651"/>
+                </a:solidFill>
+                <a:latin typeface="Arial"/>
+                <a:ea typeface="Arial"/>
+                <a:cs typeface="Arial"/>
+                <a:sym typeface="Arial"/>
+              </a:defRPr>
+            </a:lvl1pPr>
+            <a:lvl2pPr lvl="1" algn="l">
+              <a:lnSpc>
+                <a:spcPct val="100000"/>
+              </a:lnSpc>
+              <a:spcBef>
+                <a:spcPts val="0"/>
+              </a:spcBef>
+              <a:spcAft>
+                <a:spcPts val="0"/>
+              </a:spcAft>
+              <a:buSzPts val="1400"/>
+              <a:buNone/>
+              <a:defRPr sz="2400" b="1">
+                <a:latin typeface="Arial"/>
+                <a:solidFill>
+                  <a:srgbClr val="CA5651"/>
+                </a:solidFill>
+              </a:defRPr>
+            </a:lvl2pPr>
+            <a:lvl3pPr lvl="2" algn="l">
+              <a:lnSpc>
+                <a:spcPct val="100000"/>
+              </a:lnSpc>
+              <a:spcBef>
+                <a:spcPts val="0"/>
+              </a:spcBef>
+              <a:spcAft>
+                <a:spcPts val="0"/>
+              </a:spcAft>
+              <a:buSzPts val="1400"/>
+              <a:buNone/>
+              <a:defRPr sz="2400" b="1">
+                <a:latin typeface="Arial"/>
+                <a:solidFill>
+                  <a:srgbClr val="CA5651"/>
+                </a:solidFill>
+              </a:defRPr>
+            </a:lvl3pPr>
+            <a:lvl4pPr lvl="3" algn="l">
+              <a:lnSpc>
+                <a:spcPct val="100000"/>
+              </a:lnSpc>
+              <a:spcBef>
+                <a:spcPts val="0"/>
+              </a:spcBef>
+              <a:spcAft>
+                <a:spcPts val="0"/>
+              </a:spcAft>
+              <a:buSzPts val="1400"/>
+              <a:buNone/>
+              <a:defRPr sz="2400" b="1">
+                <a:latin typeface="Arial"/>
+                <a:solidFill>
+                  <a:srgbClr val="CA5651"/>
+                </a:solidFill>
+              </a:defRPr>
+            </a:lvl4pPr>
+            <a:lvl5pPr lvl="4" algn="l">
+              <a:lnSpc>
+                <a:spcPct val="100000"/>
+              </a:lnSpc>
+              <a:spcBef>
+                <a:spcPts val="0"/>
+              </a:spcBef>
+              <a:spcAft>
+                <a:spcPts val="0"/>
+              </a:spcAft>
+              <a:buSzPts val="1400"/>
+              <a:buNone/>
+              <a:defRPr sz="2400" b="1">
+                <a:latin typeface="Arial"/>
+                <a:solidFill>
+                  <a:srgbClr val="CA5651"/>
+                </a:solidFill>
+              </a:defRPr>
+            </a:lvl5pPr>
+            <a:lvl6pPr lvl="5" algn="l">
+              <a:lnSpc>
+                <a:spcPct val="100000"/>
+              </a:lnSpc>
+              <a:spcBef>
+                <a:spcPts val="0"/>
+              </a:spcBef>
+              <a:spcAft>
+                <a:spcPts val="0"/>
+              </a:spcAft>
+              <a:buSzPts val="1400"/>
+              <a:buNone/>
+              <a:defRPr sz="2400" b="1">
+                <a:latin typeface="Arial"/>
+                <a:solidFill>
+                  <a:srgbClr val="CA5651"/>
+                </a:solidFill>
+              </a:defRPr>
+            </a:lvl6pPr>
+            <a:lvl7pPr lvl="6" algn="l">
+              <a:lnSpc>
+                <a:spcPct val="100000"/>
+              </a:lnSpc>
+              <a:spcBef>
+                <a:spcPts val="0"/>
+              </a:spcBef>
+              <a:spcAft>
+                <a:spcPts val="0"/>
+              </a:spcAft>
+              <a:buSzPts val="1400"/>
+              <a:buNone/>
+              <a:defRPr sz="2400" b="1">
+                <a:latin typeface="Arial"/>
+                <a:solidFill>
+                  <a:srgbClr val="CA5651"/>
+                </a:solidFill>
+              </a:defRPr>
+            </a:lvl7pPr>
+            <a:lvl8pPr lvl="7" algn="l">
+              <a:lnSpc>
+                <a:spcPct val="100000"/>
+              </a:lnSpc>
+              <a:spcBef>
+                <a:spcPts val="0"/>
+              </a:spcBef>
+              <a:spcAft>
+                <a:spcPts val="0"/>
+              </a:spcAft>
+              <a:buSzPts val="1400"/>
+              <a:buNone/>
+              <a:defRPr sz="2400" b="1">
+                <a:latin typeface="Arial"/>
+                <a:solidFill>
+                  <a:srgbClr val="CA5651"/>
+                </a:solidFill>
+              </a:defRPr>
+            </a:lvl8pPr>
+            <a:lvl9pPr lvl="8" algn="l">
+              <a:lnSpc>
+                <a:spcPct val="100000"/>
+              </a:lnSpc>
+              <a:spcBef>
+                <a:spcPts val="0"/>
+              </a:spcBef>
+              <a:spcAft>
+                <a:spcPts val="0"/>
+              </a:spcAft>
+              <a:buSzPts val="1400"/>
+              <a:buNone/>
+              <a:defRPr sz="2400" b="1">
+                <a:latin typeface="Arial"/>
+                <a:solidFill>
+                  <a:srgbClr val="CA5651"/>
+                </a:solidFill>
+              </a:defRPr>
+            </a:lvl9pPr>
+          </a:lstStyle>
+          <a:p>
+            <a:r>
+              <a:rPr lang="es-MX" sz="2400" b="1">
+                <a:latin typeface="Arial"/>
+                <a:solidFill>
+                  <a:srgbClr val="CA5651"/>
+                </a:solidFill>
+              </a:rPr>
+              <a:t>Haz clic para modificar el estilo de título del patrón</a:t>
+            </a:r>
+            <a:endParaRPr dirty="0" sz="2400" b="1">
+              <a:latin typeface="Arial"/>
+              <a:solidFill>
+                <a:srgbClr val="CA5651"/>
+              </a:solidFill>
+            </a:endParaRPr>
+          </a:p>
+        </p:txBody>
+      </p:sp>
+      <p:sp>
+        <p:nvSpPr>
+          <p:cNvPr id="6" name="Picture Placeholder 5">
+            <a:extLst>
+              <a:ext uri="{FF2B5EF4-FFF2-40B4-BE49-F238E27FC236}">
+                <ns3:creationId id="{EB977788-EA90-94F5-A207-15EBBD7FEAB5}"/>
+              </a:ext>
+            </a:extLst>
+          </p:cNvPr>
+          <p:cNvSpPr>
+            <a:spLocks noGrp="1" noChangeAspect="1"/>
+          </p:cNvSpPr>
+          <p:nvPr>
+            <p:ph type="pic" sz="quarter" idx="10"/>
+          </p:nvPr>
+        </p:nvSpPr>
+        <p:spPr>
+          <a:xfrm>
+            <a:off x="502920" y="3017520"/>
+            <a:ext cx="1417320" cy="777240"/>
+          </a:xfrm>
+        </p:spPr>
+        <p:txBody>
+          <a:bodyPr/>
+          <a:lstStyle/>
+          <a:p>
+            <a:endParaRPr lang="en-PE" dirty="0"/>
+          </a:p>
+          <a:p>
+            <a:endParaRPr lang="en-PE" dirty="0"/>
+          </a:p>
+        </p:txBody>
+      </p:sp>
+      <p:sp>
+        <p:nvSpPr>
+          <p:cNvPr id="7" name="Picture Placeholder 5">
+            <a:extLst>
+              <a:ext uri="{FF2B5EF4-FFF2-40B4-BE49-F238E27FC236}">
+                <ns3:creationId id="{0519FE1F-4FD7-A2A0-81FB-8DCD6F26C4FB}"/>
+              </a:ext>
+            </a:extLst>
+          </p:cNvPr>
+          <p:cNvSpPr>
+            <a:spLocks noGrp="1" noChangeAspect="1"/>
+          </p:cNvSpPr>
+          <p:nvPr>
+            <p:ph type="pic" sz="quarter" idx="11"/>
+          </p:nvPr>
+        </p:nvSpPr>
+        <p:spPr>
+          <a:xfrm>
+            <a:off x="502920" y="3977640"/>
+            <a:ext cx="1417320" cy="777240"/>
+          </a:xfrm>
+        </p:spPr>
+        <p:txBody>
+          <a:bodyPr/>
+          <a:lstStyle/>
+          <a:p>
+            <a:endParaRPr lang="en-PE" dirty="0"/>
+          </a:p>
+        </p:txBody>
+      </p:sp>
+      <p:sp>
+        <p:nvSpPr>
+          <p:cNvPr id="8" name="Picture Placeholder 5">
+            <a:extLst>
+              <a:ext uri="{FF2B5EF4-FFF2-40B4-BE49-F238E27FC236}">
+                <ns3:creationId id="{358A77CA-4946-E677-D51B-A8CE149E91B8}"/>
+              </a:ext>
+            </a:extLst>
+          </p:cNvPr>
+          <p:cNvSpPr>
+            <a:spLocks noGrp="1" noChangeAspect="1"/>
+          </p:cNvSpPr>
+          <p:nvPr>
+            <p:ph type="pic" sz="quarter" idx="12"/>
+          </p:nvPr>
+        </p:nvSpPr>
+        <p:spPr>
+          <a:xfrm>
+            <a:off x="2240280" y="1212494"/>
+            <a:ext cx="4160520" cy="2286000"/>
+          </a:xfrm>
+        </p:spPr>
+        <p:txBody>
+          <a:bodyPr/>
+          <a:lstStyle/>
+          <a:p>
+            <a:endParaRPr lang="en-PE" dirty="0"/>
+          </a:p>
+          <a:p>
+            <a:endParaRPr lang="en-PE" dirty="0"/>
+          </a:p>
+        </p:txBody>
+      </p:sp>
+      <p:sp>
+        <p:nvSpPr>
+          <p:cNvPr id="9" name="Picture Placeholder 5">
+            <a:extLst>
+              <a:ext uri="{FF2B5EF4-FFF2-40B4-BE49-F238E27FC236}">
+                <ns3:creationId id="{BCB5FD43-B8F1-2FB4-7780-90EF06D911E6}"/>
+              </a:ext>
+            </a:extLst>
+          </p:cNvPr>
+          <p:cNvSpPr>
+            <a:spLocks noGrp="1" noChangeAspect="1"/>
+          </p:cNvSpPr>
+          <p:nvPr>
+            <p:ph type="pic" sz="quarter" idx="13"/>
+          </p:nvPr>
+        </p:nvSpPr>
+        <p:spPr>
+          <a:xfrm>
+            <a:off x="2240280" y="3749040"/>
+            <a:ext cx="4160520" cy="2286000"/>
+          </a:xfrm>
+        </p:spPr>
+        <p:txBody>
+          <a:bodyPr/>
+          <a:lstStyle/>
+          <a:p>
+            <a:endParaRPr lang="en-PE"/>
+          </a:p>
+        </p:txBody>
+      </p:sp>
+      <p:sp>
+        <p:nvSpPr>
+          <p:cNvPr id="2" name="Text Placeholder 9">
+            <a:extLst>
+              <a:ext uri="{FF2B5EF4-FFF2-40B4-BE49-F238E27FC236}">
+                <ns3:creationId id="{0C929747-7B86-54B8-A590-1398C659B7EC}"/>
+              </a:ext>
+            </a:extLst>
+          </p:cNvPr>
+          <p:cNvSpPr>
+            <a:spLocks noGrp="1"/>
+          </p:cNvSpPr>
+          <p:nvPr>
+            <p:ph type="body" sz="quarter" idx="14"/>
+          </p:nvPr>
+        </p:nvSpPr>
+        <p:spPr>
+          <a:xfrm>
+            <a:off x="461464" y="6320500"/>
+            <a:ext cx="4503738" cy="398463"/>
+          </a:xfrm>
+        </p:spPr>
+        <p:txBody>
+          <a:bodyPr>
+            <a:noAutofit/>
+          </a:bodyPr>
+          <a:lstStyle>
+            <a:lvl1pPr>
+              <a:defRPr sz="1100"/>
+            </a:lvl1pPr>
+            <a:lvl2pPr>
+              <a:defRPr sz="1000"/>
+            </a:lvl2pPr>
+            <a:lvl3pPr>
+              <a:defRPr sz="1000"/>
+            </a:lvl3pPr>
+            <a:lvl4pPr>
+              <a:defRPr sz="1000"/>
+            </a:lvl4pPr>
+            <a:lvl5pPr>
+              <a:defRPr sz="1000"/>
+            </a:lvl5pPr>
+          </a:lstStyle>
+          <a:p>
+            <a:pPr lvl="0"/>
+            <a:r>
+              <a:rPr lang="en-US" dirty="0"/>
+              <a:t>Click to edit Master text styles</a:t>
+            </a:r>
+          </a:p>
+          <a:p>
+            <a:pPr lvl="1"/>
+            <a:r>
+              <a:rPr lang="en-US" dirty="0"/>
+              <a:t>Second level</a:t>
+            </a:r>
+          </a:p>
+          <a:p>
+            <a:pPr lvl="2"/>
+            <a:r>
+              <a:rPr lang="en-US" dirty="0"/>
+              <a:t>Third level</a:t>
+            </a:r>
+          </a:p>
+          <a:p>
+            <a:pPr lvl="3"/>
+            <a:r>
+              <a:rPr lang="en-US" dirty="0"/>
+              <a:t>Fourth level</a:t>
+            </a:r>
+          </a:p>
+          <a:p>
+            <a:pPr lvl="4"/>
+            <a:r>
+              <a:rPr lang="en-US" dirty="0"/>
+              <a:t>Fifth level</a:t>
+            </a:r>
+            <a:endParaRPr lang="en-PE" dirty="0"/>
+          </a:p>
+        </p:txBody>
+      </p:sp>
+      <p:sp>
+        <p:nvSpPr>
+          <p:cNvPr id="3" name="Picture Placeholder 5">
+            <a:extLst>
+              <a:ext uri="{FF2B5EF4-FFF2-40B4-BE49-F238E27FC236}">
+                <ns3:creationId id="{FF13B1B5-6F5F-20EC-604A-862023AA30E4}"/>
+              </a:ext>
+            </a:extLst>
+          </p:cNvPr>
+          <p:cNvSpPr>
+            <a:spLocks noGrp="1" noChangeAspect="1"/>
+          </p:cNvSpPr>
+          <p:nvPr>
+            <p:ph type="pic" sz="quarter" idx="15"/>
+          </p:nvPr>
+        </p:nvSpPr>
+        <p:spPr>
+          <a:xfrm>
+            <a:off x="6812280" y="1212494"/>
+            <a:ext cx="5001768" cy="4887468"/>
+          </a:xfrm>
+        </p:spPr>
+        <p:txBody>
+          <a:bodyPr/>
+          <a:lstStyle/>
+          <a:p>
+            <a:endParaRPr lang="en-PE" dirty="0"/>
+          </a:p>
+          <a:p>
+            <a:endParaRPr lang="en-PE" dirty="0"/>
+          </a:p>
+        </p:txBody>
+      </p:sp>
+      <p:sp>
+        <p:nvSpPr>
+          <p:cNvPr id="10" name="Content Placeholder 5">
+            <a:extLst>
+              <a:ext uri="{FF2B5EF4-FFF2-40B4-BE49-F238E27FC236}">
+                <ns3:creationId id="{B8FEC6FD-D71E-66DB-2E66-38C3CF383E38}"/>
+              </a:ext>
+            </a:extLst>
+          </p:cNvPr>
+          <p:cNvSpPr>
+            <a:spLocks noGrp="1"/>
+          </p:cNvSpPr>
+          <p:nvPr>
+            <p:ph sz="quarter" idx="17"/>
+          </p:nvPr>
+        </p:nvSpPr>
+        <p:spPr>
+          <a:xfrm>
+            <a:off x="502920" y="1280160"/>
+            <a:ext cx="1417320" cy="1417320"/>
+          </a:xfrm>
+        </p:spPr>
+        <p:txBody>
+          <a:bodyPr/>
+          <a:lstStyle/>
+          <a:p>
+            <a:pPr lvl="0"/>
+            <a:r>
+              <a:rPr lang="en-US" dirty="0"/>
+              <a:t>Click to edit Master text styles</a:t>
+            </a:r>
+          </a:p>
+          <a:p>
+            <a:pPr lvl="1"/>
+            <a:r>
+              <a:rPr lang="en-US" dirty="0"/>
+              <a:t>Second level</a:t>
+            </a:r>
+          </a:p>
+          <a:p>
+            <a:pPr lvl="2"/>
+            <a:r>
+              <a:rPr lang="en-US" dirty="0"/>
+              <a:t>Third level</a:t>
+            </a:r>
+          </a:p>
+          <a:p>
+            <a:pPr lvl="3"/>
+            <a:r>
+              <a:rPr lang="en-US" dirty="0"/>
+              <a:t>Fourth level</a:t>
+            </a:r>
+          </a:p>
+          <a:p>
+            <a:pPr lvl="4"/>
+            <a:r>
+              <a:rPr lang="en-US" dirty="0"/>
+              <a:t>Fifth level</a:t>
+            </a:r>
+            <a:endParaRPr lang="en-PE" dirty="0"/>
+          </a:p>
+        </p:txBody>
+      </p:sp>
+    </p:spTree>
+    <p:extLst>
+      <p:ext uri="{BB962C8B-B14F-4D97-AF65-F5344CB8AC3E}">
+        <p14:creationId val="4015789953"/>
+      </p:ext>
+    </p:extLst>
+  </p:cSld>
+  <p:clrMapOvr>
+    <a:masterClrMapping/>
+  </p:clrMapOvr>
+  <p:extLst>
+    <p:ext uri="{DCECCB84-F9BA-43D5-87BE-67443E8EF086}">
+      <p15:sldGuideLst>
+        <p15:guide id="1" orient="horz" pos="4088">
+          <p15:clr>
+            <a:srgbClr val="E4A34C"/>
+          </p15:clr>
+        </p15:guide>
+        <p15:guide id="2" pos="7446">
+          <p15:clr>
+            <a:srgbClr val="E4A34C"/>
+          </p15:clr>
+        </p15:guide>
+      </p15:sldGuideLst>
+    </p:ext>
+  </p:extLst>
+</p:sldLayout>
+</file>
+
+<file path=ppt/slideLayouts/slideLayout35.xml><?xml version="1.0" encoding="utf-8"?>
+<p:sldLayout xmlns:a="http://schemas.openxmlformats.org/drawingml/2006/main" xmlns:ns3="http://schemas.microsoft.com/office/drawing/2014/main" xmlns:p="http://schemas.openxmlformats.org/presentationml/2006/main" xmlns:p14="http://schemas.microsoft.com/office/powerpoint/2010/main" xmlns:p15="http://schemas.microsoft.com/office/powerpoint/2012/main" xmlns:r="http://schemas.openxmlformats.org/officeDocument/2006/relationships" matchingName="Dos objetos" preserve="1" userDrawn="1">
+  <p:cSld name="cifras_y_graficos">
+    <p:spTree>
+      <p:nvGrpSpPr>
+        <p:cNvPr id="1" name="Shape 84"/>
+        <p:cNvGrpSpPr/>
+        <p:nvPr/>
+      </p:nvGrpSpPr>
+      <p:grpSpPr>
+        <a:xfrm>
+          <a:off x="0" y="0"/>
+          <a:ext cx="0" cy="0"/>
+          <a:chOff x="0" y="0"/>
+          <a:chExt cx="0" cy="0"/>
+        </a:xfrm>
+      </p:grpSpPr>
+      <p:sp>
+        <p:nvSpPr>
+          <p:cNvPr id="88" name="Google Shape;88;p51"/>
+          <p:cNvSpPr txBox="1">
+            <a:spLocks noGrp="1"/>
+          </p:cNvSpPr>
+          <p:nvPr>
+            <p:ph type="title"/>
+          </p:nvPr>
+        </p:nvSpPr>
+        <p:spPr>
+          <a:xfrm>
+            <a:off x="461464" y="338268"/>
+            <a:ext cx="9626752" cy="666595"/>
+          </a:xfrm>
+          <a:prstGeom prst="rect">
+            <a:avLst/>
+          </a:prstGeom>
+          <a:noFill/>
+          <a:ln>
+            <a:noFill/>
+          </a:ln>
+        </p:spPr>
+        <p:txBody>
+          <a:bodyPr spcFirstLastPara="1" wrap="square" lIns="91425" tIns="45700" rIns="91425" bIns="45700" anchor="ctr" anchorCtr="0">
+            <a:normAutofit/>
+          </a:bodyPr>
+          <a:lstStyle>
+            <a:lvl1pPr lvl="0" algn="l">
+              <a:lnSpc>
+                <a:spcPct val="90000"/>
+              </a:lnSpc>
+              <a:spcBef>
+                <a:spcPts val="0"/>
+              </a:spcBef>
+              <a:spcAft>
+                <a:spcPts val="0"/>
+              </a:spcAft>
+              <a:buClr>
+                <a:srgbClr val="CA5651"/>
+              </a:buClr>
+              <a:buSzPts val="2400"/>
+              <a:buFont typeface="Arial"/>
+              <a:buNone/>
+              <a:defRPr sz="2400" b="1" cap="none">
+                <a:solidFill>
+                  <a:srgbClr val="CA5651"/>
+                </a:solidFill>
+                <a:latin typeface="Arial"/>
+                <a:ea typeface="Arial"/>
+                <a:cs typeface="Arial"/>
+                <a:sym typeface="Arial"/>
+              </a:defRPr>
+            </a:lvl1pPr>
+            <a:lvl2pPr lvl="1" algn="l">
+              <a:lnSpc>
+                <a:spcPct val="100000"/>
+              </a:lnSpc>
+              <a:spcBef>
+                <a:spcPts val="0"/>
+              </a:spcBef>
+              <a:spcAft>
+                <a:spcPts val="0"/>
+              </a:spcAft>
+              <a:buSzPts val="1400"/>
+              <a:buNone/>
+              <a:defRPr sz="2400" b="1">
+                <a:latin typeface="Arial"/>
+                <a:solidFill>
+                  <a:srgbClr val="CA5651"/>
+                </a:solidFill>
+              </a:defRPr>
+            </a:lvl2pPr>
+            <a:lvl3pPr lvl="2" algn="l">
+              <a:lnSpc>
+                <a:spcPct val="100000"/>
+              </a:lnSpc>
+              <a:spcBef>
+                <a:spcPts val="0"/>
+              </a:spcBef>
+              <a:spcAft>
+                <a:spcPts val="0"/>
+              </a:spcAft>
+              <a:buSzPts val="1400"/>
+              <a:buNone/>
+              <a:defRPr sz="2400" b="1">
+                <a:latin typeface="Arial"/>
+                <a:solidFill>
+                  <a:srgbClr val="CA5651"/>
+                </a:solidFill>
+              </a:defRPr>
+            </a:lvl3pPr>
+            <a:lvl4pPr lvl="3" algn="l">
+              <a:lnSpc>
+                <a:spcPct val="100000"/>
+              </a:lnSpc>
+              <a:spcBef>
+                <a:spcPts val="0"/>
+              </a:spcBef>
+              <a:spcAft>
+                <a:spcPts val="0"/>
+              </a:spcAft>
+              <a:buSzPts val="1400"/>
+              <a:buNone/>
+              <a:defRPr sz="2400" b="1">
+                <a:latin typeface="Arial"/>
+                <a:solidFill>
+                  <a:srgbClr val="CA5651"/>
+                </a:solidFill>
+              </a:defRPr>
+            </a:lvl4pPr>
+            <a:lvl5pPr lvl="4" algn="l">
+              <a:lnSpc>
+                <a:spcPct val="100000"/>
+              </a:lnSpc>
+              <a:spcBef>
+                <a:spcPts val="0"/>
+              </a:spcBef>
+              <a:spcAft>
+                <a:spcPts val="0"/>
+              </a:spcAft>
+              <a:buSzPts val="1400"/>
+              <a:buNone/>
+              <a:defRPr sz="2400" b="1">
+                <a:latin typeface="Arial"/>
+                <a:solidFill>
+                  <a:srgbClr val="CA5651"/>
+                </a:solidFill>
+              </a:defRPr>
+            </a:lvl5pPr>
+            <a:lvl6pPr lvl="5" algn="l">
+              <a:lnSpc>
+                <a:spcPct val="100000"/>
+              </a:lnSpc>
+              <a:spcBef>
+                <a:spcPts val="0"/>
+              </a:spcBef>
+              <a:spcAft>
+                <a:spcPts val="0"/>
+              </a:spcAft>
+              <a:buSzPts val="1400"/>
+              <a:buNone/>
+              <a:defRPr sz="2400" b="1">
+                <a:latin typeface="Arial"/>
+                <a:solidFill>
+                  <a:srgbClr val="CA5651"/>
+                </a:solidFill>
+              </a:defRPr>
+            </a:lvl6pPr>
+            <a:lvl7pPr lvl="6" algn="l">
+              <a:lnSpc>
+                <a:spcPct val="100000"/>
+              </a:lnSpc>
+              <a:spcBef>
+                <a:spcPts val="0"/>
+              </a:spcBef>
+              <a:spcAft>
+                <a:spcPts val="0"/>
+              </a:spcAft>
+              <a:buSzPts val="1400"/>
+              <a:buNone/>
+              <a:defRPr sz="2400" b="1">
+                <a:latin typeface="Arial"/>
+                <a:solidFill>
+                  <a:srgbClr val="CA5651"/>
+                </a:solidFill>
+              </a:defRPr>
+            </a:lvl7pPr>
+            <a:lvl8pPr lvl="7" algn="l">
+              <a:lnSpc>
+                <a:spcPct val="100000"/>
+              </a:lnSpc>
+              <a:spcBef>
+                <a:spcPts val="0"/>
+              </a:spcBef>
+              <a:spcAft>
+                <a:spcPts val="0"/>
+              </a:spcAft>
+              <a:buSzPts val="1400"/>
+              <a:buNone/>
+              <a:defRPr sz="2400" b="1">
+                <a:latin typeface="Arial"/>
+                <a:solidFill>
+                  <a:srgbClr val="CA5651"/>
+                </a:solidFill>
+              </a:defRPr>
+            </a:lvl8pPr>
+            <a:lvl9pPr lvl="8" algn="l">
+              <a:lnSpc>
+                <a:spcPct val="100000"/>
+              </a:lnSpc>
+              <a:spcBef>
+                <a:spcPts val="0"/>
+              </a:spcBef>
+              <a:spcAft>
+                <a:spcPts val="0"/>
+              </a:spcAft>
+              <a:buSzPts val="1400"/>
+              <a:buNone/>
+              <a:defRPr sz="2400" b="1">
+                <a:latin typeface="Arial"/>
+                <a:solidFill>
+                  <a:srgbClr val="CA5651"/>
+                </a:solidFill>
+              </a:defRPr>
+            </a:lvl9pPr>
+          </a:lstStyle>
+          <a:p>
+            <a:r>
+              <a:rPr lang="es-MX" sz="2400" b="1">
+                <a:latin typeface="Arial"/>
+                <a:solidFill>
+                  <a:srgbClr val="CA5651"/>
+                </a:solidFill>
+              </a:rPr>
+              <a:t>Haz clic para modificar el estilo de título del patrón</a:t>
+            </a:r>
+            <a:endParaRPr dirty="0" sz="2400" b="1">
+              <a:latin typeface="Arial"/>
+              <a:solidFill>
+                <a:srgbClr val="CA5651"/>
+              </a:solidFill>
+            </a:endParaRPr>
+          </a:p>
+        </p:txBody>
+      </p:sp>
+      <p:sp>
+        <p:nvSpPr>
+          <p:cNvPr id="6" name="Picture Placeholder 5">
+            <a:extLst>
+              <a:ext uri="{FF2B5EF4-FFF2-40B4-BE49-F238E27FC236}">
+                <ns3:creationId id="{EB977788-EA90-94F5-A207-15EBBD7FEAB5}"/>
+              </a:ext>
+            </a:extLst>
+          </p:cNvPr>
+          <p:cNvSpPr>
+            <a:spLocks noGrp="1" noChangeAspect="1"/>
+          </p:cNvSpPr>
+          <p:nvPr>
+            <p:ph type="pic" sz="quarter" idx="10"/>
+          </p:nvPr>
+        </p:nvSpPr>
+        <p:spPr>
+          <a:xfrm>
+            <a:off x="461772" y="1212494"/>
+            <a:ext cx="3611880" cy="1051560"/>
+          </a:xfrm>
+        </p:spPr>
+        <p:txBody>
+          <a:bodyPr/>
+          <a:lstStyle/>
+          <a:p>
+            <a:endParaRPr lang="en-PE" dirty="0"/>
+          </a:p>
+          <a:p>
+            <a:endParaRPr lang="en-PE" dirty="0"/>
+          </a:p>
+        </p:txBody>
+      </p:sp>
+      <p:sp>
+        <p:nvSpPr>
+          <p:cNvPr id="7" name="Picture Placeholder 5">
+            <a:extLst>
+              <a:ext uri="{FF2B5EF4-FFF2-40B4-BE49-F238E27FC236}">
+                <ns3:creationId id="{0519FE1F-4FD7-A2A0-81FB-8DCD6F26C4FB}"/>
+              </a:ext>
+            </a:extLst>
+          </p:cNvPr>
+          <p:cNvSpPr>
+            <a:spLocks noGrp="1" noChangeAspect="1"/>
+          </p:cNvSpPr>
+          <p:nvPr>
+            <p:ph type="pic" sz="quarter" idx="11"/>
+          </p:nvPr>
+        </p:nvSpPr>
+        <p:spPr>
+          <a:xfrm>
+            <a:off x="4343400" y="1212494"/>
+            <a:ext cx="3611880" cy="1051560"/>
+          </a:xfrm>
+        </p:spPr>
+        <p:txBody>
+          <a:bodyPr/>
+          <a:lstStyle/>
+          <a:p>
+            <a:endParaRPr lang="en-PE" dirty="0"/>
+          </a:p>
+        </p:txBody>
+      </p:sp>
+      <p:sp>
+        <p:nvSpPr>
+          <p:cNvPr id="8" name="Picture Placeholder 5">
+            <a:extLst>
+              <a:ext uri="{FF2B5EF4-FFF2-40B4-BE49-F238E27FC236}">
+                <ns3:creationId id="{358A77CA-4946-E677-D51B-A8CE149E91B8}"/>
+              </a:ext>
+            </a:extLst>
+          </p:cNvPr>
+          <p:cNvSpPr>
+            <a:spLocks noGrp="1" noChangeAspect="1"/>
+          </p:cNvSpPr>
+          <p:nvPr>
+            <p:ph type="pic" sz="quarter" idx="12"/>
+          </p:nvPr>
+        </p:nvSpPr>
+        <p:spPr>
+          <a:xfrm>
+            <a:off x="8183880" y="1212494"/>
+            <a:ext cx="3611880" cy="1051560"/>
+          </a:xfrm>
+        </p:spPr>
+        <p:txBody>
+          <a:bodyPr/>
+          <a:lstStyle/>
+          <a:p>
+            <a:endParaRPr lang="en-PE" dirty="0"/>
+          </a:p>
+          <a:p>
+            <a:endParaRPr lang="en-PE" dirty="0"/>
+          </a:p>
+        </p:txBody>
+      </p:sp>
+      <p:sp>
+        <p:nvSpPr>
+          <p:cNvPr id="9" name="Picture Placeholder 5">
+            <a:extLst>
+              <a:ext uri="{FF2B5EF4-FFF2-40B4-BE49-F238E27FC236}">
+                <ns3:creationId id="{BCB5FD43-B8F1-2FB4-7780-90EF06D911E6}"/>
+              </a:ext>
+            </a:extLst>
+          </p:cNvPr>
+          <p:cNvSpPr>
+            <a:spLocks noGrp="1" noChangeAspect="1"/>
+          </p:cNvSpPr>
+          <p:nvPr>
+            <p:ph type="pic" sz="quarter" idx="13"/>
+          </p:nvPr>
+        </p:nvSpPr>
+        <p:spPr>
+          <a:xfrm>
+            <a:off x="461772" y="2606040"/>
+            <a:ext cx="5577840" cy="3474720"/>
+          </a:xfrm>
+        </p:spPr>
+        <p:txBody>
+          <a:bodyPr/>
+          <a:lstStyle/>
+          <a:p>
+            <a:endParaRPr lang="en-PE"/>
+          </a:p>
+        </p:txBody>
+      </p:sp>
+      <p:sp>
+        <p:nvSpPr>
+          <p:cNvPr id="2" name="Text Placeholder 9">
+            <a:extLst>
+              <a:ext uri="{FF2B5EF4-FFF2-40B4-BE49-F238E27FC236}">
+                <ns3:creationId id="{0C929747-7B86-54B8-A590-1398C659B7EC}"/>
+              </a:ext>
+            </a:extLst>
+          </p:cNvPr>
+          <p:cNvSpPr>
+            <a:spLocks noGrp="1"/>
+          </p:cNvSpPr>
+          <p:nvPr>
+            <p:ph type="body" sz="quarter" idx="14"/>
+          </p:nvPr>
+        </p:nvSpPr>
+        <p:spPr>
+          <a:xfrm>
+            <a:off x="461464" y="6320500"/>
+            <a:ext cx="4503738" cy="398463"/>
+          </a:xfrm>
+        </p:spPr>
+        <p:txBody>
+          <a:bodyPr>
+            <a:noAutofit/>
+          </a:bodyPr>
+          <a:lstStyle>
+            <a:lvl1pPr>
+              <a:defRPr sz="1100"/>
+            </a:lvl1pPr>
+            <a:lvl2pPr>
+              <a:defRPr sz="1000"/>
+            </a:lvl2pPr>
+            <a:lvl3pPr>
+              <a:defRPr sz="1000"/>
+            </a:lvl3pPr>
+            <a:lvl4pPr>
+              <a:defRPr sz="1000"/>
+            </a:lvl4pPr>
+            <a:lvl5pPr>
+              <a:defRPr sz="1000"/>
+            </a:lvl5pPr>
+          </a:lstStyle>
+          <a:p>
+            <a:pPr lvl="0"/>
+            <a:r>
+              <a:rPr lang="en-US" dirty="0"/>
+              <a:t>Click to edit Master text styles</a:t>
+            </a:r>
+          </a:p>
+          <a:p>
+            <a:pPr lvl="1"/>
+            <a:r>
+              <a:rPr lang="en-US" dirty="0"/>
+              <a:t>Second level</a:t>
+            </a:r>
+          </a:p>
+          <a:p>
+            <a:pPr lvl="2"/>
+            <a:r>
+              <a:rPr lang="en-US" dirty="0"/>
+              <a:t>Third level</a:t>
+            </a:r>
+          </a:p>
+          <a:p>
+            <a:pPr lvl="3"/>
+            <a:r>
+              <a:rPr lang="en-US" dirty="0"/>
+              <a:t>Fourth level</a:t>
+            </a:r>
+          </a:p>
+          <a:p>
+            <a:pPr lvl="4"/>
+            <a:r>
+              <a:rPr lang="en-US" dirty="0"/>
+              <a:t>Fifth level</a:t>
+            </a:r>
+            <a:endParaRPr lang="en-PE" dirty="0"/>
+          </a:p>
+        </p:txBody>
+      </p:sp>
+      <p:sp>
+        <p:nvSpPr>
+          <p:cNvPr id="3" name="Picture Placeholder 5">
+            <a:extLst>
+              <a:ext uri="{FF2B5EF4-FFF2-40B4-BE49-F238E27FC236}">
+                <ns3:creationId id="{FF13B1B5-6F5F-20EC-604A-862023AA30E4}"/>
+              </a:ext>
+            </a:extLst>
+          </p:cNvPr>
+          <p:cNvSpPr>
+            <a:spLocks noGrp="1" noChangeAspect="1"/>
+          </p:cNvSpPr>
+          <p:nvPr>
+            <p:ph type="pic" sz="quarter" idx="15"/>
+          </p:nvPr>
+        </p:nvSpPr>
+        <p:spPr>
+          <a:xfrm>
+            <a:off x="6263640" y="2606040"/>
+            <a:ext cx="5577840" cy="3474720"/>
+          </a:xfrm>
+        </p:spPr>
+        <p:txBody>
+          <a:bodyPr/>
+          <a:lstStyle/>
+          <a:p>
+            <a:endParaRPr lang="en-PE" dirty="0"/>
+          </a:p>
+          <a:p>
+            <a:endParaRPr lang="en-PE" dirty="0"/>
+          </a:p>
+        </p:txBody>
+      </p:sp>
+    </p:spTree>
+    <p:extLst>
+      <p:ext uri="{BB962C8B-B14F-4D97-AF65-F5344CB8AC3E}">
+        <p14:creationId val="4015789953"/>
+      </p:ext>
+    </p:extLst>
+  </p:cSld>
+  <p:clrMapOvr>
+    <a:masterClrMapping/>
+  </p:clrMapOvr>
+  <p:extLst>
+    <p:ext uri="{DCECCB84-F9BA-43D5-87BE-67443E8EF086}">
+      <p15:sldGuideLst>
+        <p15:guide id="1" orient="horz" pos="4088">
+          <p15:clr>
+            <a:srgbClr val="E4A34C"/>
+          </p15:clr>
+        </p15:guide>
+        <p15:guide id="2" pos="7446">
+          <p15:clr>
+            <a:srgbClr val="E4A34C"/>
+          </p15:clr>
+        </p15:guide>
+      </p15:sldGuideLst>
+    </p:ext>
+  </p:extLst>
+</p:sldLayout>
+</file>
+
 <file path=ppt/slideLayouts/slideLayout4.xml><?xml version="1.0" encoding="utf-8"?>
 <p:sldLayout xmlns:a="http://schemas.openxmlformats.org/drawingml/2006/main" xmlns:ns2="http://schemas.microsoft.com/office/drawing/2014/main" xmlns:p="http://schemas.openxmlformats.org/presentationml/2006/main" xmlns:p14="http://schemas.microsoft.com/office/powerpoint/2010/main" xmlns:r="http://schemas.openxmlformats.org/officeDocument/2006/relationships" preserve="1" userDrawn="1">
   <p:cSld name="Graficos2">
@@ -22620,6 +24731,10 @@
     <p:sldLayoutId id="2147483729" r:id="rId32"/>
     <p:sldLayoutId id="2147483730" r:id="rId33"/>
     <p:sldLayoutId id="2147483731" r:id="rId34"/>
+    <p:sldLayoutId id="2147483732" r:id="rId35"/>
+    <p:sldLayoutId id="2147483733" r:id="rId36"/>
+    <p:sldLayoutId id="2147483734" r:id="rId37"/>
+    <p:sldLayoutId id="2147483735" r:id="rId38"/>
   </p:sldLayoutIdLst>
   <p:txStyles xmlns:p="http://schemas.openxmlformats.org/presentationml/2006/main" xmlns:a="http://schemas.openxmlformats.org/drawingml/2006/main">
     <p:titleStyle>

--- a/api/inst/plantillas/plantilla_acnur_16_9.pptx
+++ b/api/inst/plantillas/plantilla_acnur_16_9.pptx
@@ -24725,8 +24725,8 @@
     <p:sldLayoutId id="2147483688" r:id="rId23"/>
     <p:sldLayoutId id="2147483703" r:id="rId24"/>
     <p:sldLayoutId id="2147483625" r:id="rId28"/>
-    <p:sldLayoutId id="2147483726" r:id="rId29"/>
-    <p:sldLayoutId id="2147483727" r:id="rId30"/>
+    <p:sldLayoutId id="2147483736" r:id="rId29"/>
+    <p:sldLayoutId id="2147483737" r:id="rId30"/>
     <p:sldLayoutId id="2147483728" r:id="rId31"/>
     <p:sldLayoutId id="2147483729" r:id="rId32"/>
     <p:sldLayoutId id="2147483730" r:id="rId33"/>

--- a/api/inst/plantillas/plantilla_acnur_16_9.pptx
+++ b/api/inst/plantillas/plantilla_acnur_16_9.pptx
@@ -1223,7 +1223,7 @@
               <a:rPr lang="en-US" dirty="0" sz="2400" b="1">
                 <a:latin typeface="Arial"/>
                 <a:solidFill>
-                  <a:srgbClr val="CA5651"/>
+                  <a:srgbClr val="1A1A1A"/>
                 </a:solidFill>
               </a:rPr>
               <a:t>Click to edit Master title style</a:t>
@@ -1231,7 +1231,7 @@
             <a:endParaRPr lang="en-PE" dirty="0" sz="2400" b="1">
               <a:latin typeface="Arial"/>
               <a:solidFill>
-                <a:srgbClr val="CA5651"/>
+                <a:srgbClr val="1A1A1A"/>
               </a:solidFill>
             </a:endParaRPr>
           </a:p>
@@ -1552,7 +1552,7 @@
               <a:rPr lang="en-US" dirty="0" sz="2400" b="1">
                 <a:latin typeface="Arial"/>
                 <a:solidFill>
-                  <a:srgbClr val="CA5651"/>
+                  <a:srgbClr val="1A1A1A"/>
                 </a:solidFill>
               </a:rPr>
               <a:t>Click to edit Master title style</a:t>
@@ -1560,7 +1560,7 @@
             <a:endParaRPr lang="en-PE" dirty="0" sz="2400" b="1">
               <a:latin typeface="Arial"/>
               <a:solidFill>
-                <a:srgbClr val="CA5651"/>
+                <a:srgbClr val="1A1A1A"/>
               </a:solidFill>
             </a:endParaRPr>
           </a:p>
@@ -1881,7 +1881,7 @@
               <a:rPr lang="en-US" dirty="0" sz="2400" b="1">
                 <a:latin typeface="Arial"/>
                 <a:solidFill>
-                  <a:srgbClr val="CA5651"/>
+                  <a:srgbClr val="1A1A1A"/>
                 </a:solidFill>
               </a:rPr>
               <a:t>Click to edit Master title style</a:t>
@@ -1889,7 +1889,7 @@
             <a:endParaRPr lang="en-PE" dirty="0" sz="2400" b="1">
               <a:latin typeface="Arial"/>
               <a:solidFill>
-                <a:srgbClr val="CA5651"/>
+                <a:srgbClr val="1A1A1A"/>
               </a:solidFill>
             </a:endParaRPr>
           </a:p>
@@ -2240,7 +2240,7 @@
               <a:rPr lang="en-US" dirty="0" sz="2400" b="1">
                 <a:latin typeface="Arial"/>
                 <a:solidFill>
-                  <a:srgbClr val="CA5651"/>
+                  <a:srgbClr val="1A1A1A"/>
                 </a:solidFill>
               </a:rPr>
               <a:t>Click to edit Master title style</a:t>
@@ -2248,7 +2248,7 @@
             <a:endParaRPr lang="en-PE" dirty="0" sz="2400" b="1">
               <a:latin typeface="Arial"/>
               <a:solidFill>
-                <a:srgbClr val="CA5651"/>
+                <a:srgbClr val="1A1A1A"/>
               </a:solidFill>
             </a:endParaRPr>
           </a:p>
@@ -10550,7 +10550,7 @@
               <a:defRPr sz="2400" b="1">
                 <a:latin typeface="Arial"/>
                 <a:solidFill>
-                  <a:srgbClr val="CA5651"/>
+                  <a:srgbClr val="1A1A1A"/>
                 </a:solidFill>
               </a:defRPr>
             </a:lvl1pPr>
@@ -10559,7 +10559,7 @@
             <a:endParaRPr lang="es-PE" dirty="0" sz="2400" b="1">
               <a:latin typeface="Arial"/>
               <a:solidFill>
-                <a:srgbClr val="CA5651"/>
+                <a:srgbClr val="1A1A1A"/>
               </a:solidFill>
             </a:endParaRPr>
           </a:p>
@@ -12272,7 +12272,7 @@
               <a:defRPr sz="2400" u="none" b="1">
                 <a:latin typeface="Arial"/>
                 <a:solidFill>
-                  <a:srgbClr val="CA5651"/>
+                  <a:srgbClr val="1A1A1A"/>
                 </a:solidFill>
               </a:defRPr>
             </a:lvl1pPr>
@@ -12291,7 +12291,7 @@
               <a:defRPr sz="2400" b="1">
                 <a:latin typeface="Arial"/>
                 <a:solidFill>
-                  <a:srgbClr val="CA5651"/>
+                  <a:srgbClr val="1A1A1A"/>
                 </a:solidFill>
               </a:defRPr>
             </a:lvl2pPr>
@@ -12310,7 +12310,7 @@
               <a:defRPr sz="2400" b="1">
                 <a:latin typeface="Arial"/>
                 <a:solidFill>
-                  <a:srgbClr val="CA5651"/>
+                  <a:srgbClr val="1A1A1A"/>
                 </a:solidFill>
               </a:defRPr>
             </a:lvl3pPr>
@@ -12329,7 +12329,7 @@
               <a:defRPr sz="2400" b="1">
                 <a:latin typeface="Arial"/>
                 <a:solidFill>
-                  <a:srgbClr val="CA5651"/>
+                  <a:srgbClr val="1A1A1A"/>
                 </a:solidFill>
               </a:defRPr>
             </a:lvl4pPr>
@@ -12348,7 +12348,7 @@
               <a:defRPr sz="2400" b="1">
                 <a:latin typeface="Arial"/>
                 <a:solidFill>
-                  <a:srgbClr val="CA5651"/>
+                  <a:srgbClr val="1A1A1A"/>
                 </a:solidFill>
               </a:defRPr>
             </a:lvl5pPr>
@@ -12367,7 +12367,7 @@
               <a:defRPr sz="2400" b="1">
                 <a:latin typeface="Arial"/>
                 <a:solidFill>
-                  <a:srgbClr val="CA5651"/>
+                  <a:srgbClr val="1A1A1A"/>
                 </a:solidFill>
               </a:defRPr>
             </a:lvl6pPr>
@@ -12386,7 +12386,7 @@
               <a:defRPr sz="2400" b="1">
                 <a:latin typeface="Arial"/>
                 <a:solidFill>
-                  <a:srgbClr val="CA5651"/>
+                  <a:srgbClr val="1A1A1A"/>
                 </a:solidFill>
               </a:defRPr>
             </a:lvl7pPr>
@@ -12405,7 +12405,7 @@
               <a:defRPr sz="2400" b="1">
                 <a:latin typeface="Arial"/>
                 <a:solidFill>
-                  <a:srgbClr val="CA5651"/>
+                  <a:srgbClr val="1A1A1A"/>
                 </a:solidFill>
               </a:defRPr>
             </a:lvl8pPr>
@@ -12424,7 +12424,7 @@
               <a:defRPr sz="2400" b="1">
                 <a:latin typeface="Arial"/>
                 <a:solidFill>
-                  <a:srgbClr val="CA5651"/>
+                  <a:srgbClr val="1A1A1A"/>
                 </a:solidFill>
               </a:defRPr>
             </a:lvl9pPr>
@@ -12434,7 +12434,7 @@
               <a:rPr lang="es-MX" sz="2400" b="1">
                 <a:latin typeface="Arial"/>
                 <a:solidFill>
-                  <a:srgbClr val="CA5651"/>
+                  <a:srgbClr val="1A1A1A"/>
                 </a:solidFill>
               </a:rPr>
               <a:t>Haz clic para modificar el estilo de título del patrón</a:t>
@@ -12442,7 +12442,7 @@
             <a:endParaRPr sz="2400" b="1">
               <a:latin typeface="Arial"/>
               <a:solidFill>
-                <a:srgbClr val="CA5651"/>
+                <a:srgbClr val="1A1A1A"/>
               </a:solidFill>
             </a:endParaRPr>
           </a:p>
@@ -12822,14 +12822,14 @@
                 <a:spcPts val="0"/>
               </a:spcAft>
               <a:buClr>
-                <a:srgbClr val="CA5651"/>
+                <a:srgbClr val="1A1A1A"/>
               </a:buClr>
               <a:buSzPts val="2400"/>
               <a:buFont typeface="Arial"/>
               <a:buNone/>
               <a:defRPr sz="2400" b="1" cap="none">
                 <a:solidFill>
-                  <a:srgbClr val="CA5651"/>
+                  <a:srgbClr val="1A1A1A"/>
                 </a:solidFill>
                 <a:latin typeface="Arial"/>
                 <a:ea typeface="Arial"/>
@@ -12852,7 +12852,7 @@
               <a:defRPr sz="2400" b="1">
                 <a:latin typeface="Arial"/>
                 <a:solidFill>
-                  <a:srgbClr val="CA5651"/>
+                  <a:srgbClr val="1A1A1A"/>
                 </a:solidFill>
               </a:defRPr>
             </a:lvl2pPr>
@@ -12871,7 +12871,7 @@
               <a:defRPr sz="2400" b="1">
                 <a:latin typeface="Arial"/>
                 <a:solidFill>
-                  <a:srgbClr val="CA5651"/>
+                  <a:srgbClr val="1A1A1A"/>
                 </a:solidFill>
               </a:defRPr>
             </a:lvl3pPr>
@@ -12890,7 +12890,7 @@
               <a:defRPr sz="2400" b="1">
                 <a:latin typeface="Arial"/>
                 <a:solidFill>
-                  <a:srgbClr val="CA5651"/>
+                  <a:srgbClr val="1A1A1A"/>
                 </a:solidFill>
               </a:defRPr>
             </a:lvl4pPr>
@@ -12909,7 +12909,7 @@
               <a:defRPr sz="2400" b="1">
                 <a:latin typeface="Arial"/>
                 <a:solidFill>
-                  <a:srgbClr val="CA5651"/>
+                  <a:srgbClr val="1A1A1A"/>
                 </a:solidFill>
               </a:defRPr>
             </a:lvl5pPr>
@@ -12928,7 +12928,7 @@
               <a:defRPr sz="2400" b="1">
                 <a:latin typeface="Arial"/>
                 <a:solidFill>
-                  <a:srgbClr val="CA5651"/>
+                  <a:srgbClr val="1A1A1A"/>
                 </a:solidFill>
               </a:defRPr>
             </a:lvl6pPr>
@@ -12947,7 +12947,7 @@
               <a:defRPr sz="2400" b="1">
                 <a:latin typeface="Arial"/>
                 <a:solidFill>
-                  <a:srgbClr val="CA5651"/>
+                  <a:srgbClr val="1A1A1A"/>
                 </a:solidFill>
               </a:defRPr>
             </a:lvl7pPr>
@@ -12966,7 +12966,7 @@
               <a:defRPr sz="2400" b="1">
                 <a:latin typeface="Arial"/>
                 <a:solidFill>
-                  <a:srgbClr val="CA5651"/>
+                  <a:srgbClr val="1A1A1A"/>
                 </a:solidFill>
               </a:defRPr>
             </a:lvl8pPr>
@@ -12985,7 +12985,7 @@
               <a:defRPr sz="2400" b="1">
                 <a:latin typeface="Arial"/>
                 <a:solidFill>
-                  <a:srgbClr val="CA5651"/>
+                  <a:srgbClr val="1A1A1A"/>
                 </a:solidFill>
               </a:defRPr>
             </a:lvl9pPr>
@@ -12995,7 +12995,7 @@
               <a:rPr lang="es-MX" sz="2400" b="1">
                 <a:latin typeface="Arial"/>
                 <a:solidFill>
-                  <a:srgbClr val="CA5651"/>
+                  <a:srgbClr val="1A1A1A"/>
                 </a:solidFill>
               </a:rPr>
               <a:t>Haz clic para modificar el estilo de título del patrón</a:t>
@@ -13003,7 +13003,7 @@
             <a:endParaRPr dirty="0" sz="2400" b="1">
               <a:latin typeface="Arial"/>
               <a:solidFill>
-                <a:srgbClr val="CA5651"/>
+                <a:srgbClr val="1A1A1A"/>
               </a:solidFill>
             </a:endParaRPr>
           </a:p>
@@ -13355,14 +13355,14 @@
                 <a:spcPts val="0"/>
               </a:spcAft>
               <a:buClr>
-                <a:srgbClr val="CA5651"/>
+                <a:srgbClr val="1A1A1A"/>
               </a:buClr>
               <a:buSzPts val="4400"/>
               <a:buFont typeface="Arial"/>
               <a:buNone/>
               <a:defRPr sz="2400" b="1" cap="none">
                 <a:solidFill>
-                  <a:srgbClr val="CA5651"/>
+                  <a:srgbClr val="1A1A1A"/>
                 </a:solidFill>
                 <a:latin typeface="Arial"/>
                 <a:ea typeface="Arial"/>
@@ -13385,7 +13385,7 @@
               <a:defRPr sz="2400" b="1">
                 <a:latin typeface="Arial"/>
                 <a:solidFill>
-                  <a:srgbClr val="CA5651"/>
+                  <a:srgbClr val="1A1A1A"/>
                 </a:solidFill>
               </a:defRPr>
             </a:lvl2pPr>
@@ -13404,7 +13404,7 @@
               <a:defRPr sz="2400" b="1">
                 <a:latin typeface="Arial"/>
                 <a:solidFill>
-                  <a:srgbClr val="CA5651"/>
+                  <a:srgbClr val="1A1A1A"/>
                 </a:solidFill>
               </a:defRPr>
             </a:lvl3pPr>
@@ -13423,7 +13423,7 @@
               <a:defRPr sz="2400" b="1">
                 <a:latin typeface="Arial"/>
                 <a:solidFill>
-                  <a:srgbClr val="CA5651"/>
+                  <a:srgbClr val="1A1A1A"/>
                 </a:solidFill>
               </a:defRPr>
             </a:lvl4pPr>
@@ -13442,7 +13442,7 @@
               <a:defRPr sz="2400" b="1">
                 <a:latin typeface="Arial"/>
                 <a:solidFill>
-                  <a:srgbClr val="CA5651"/>
+                  <a:srgbClr val="1A1A1A"/>
                 </a:solidFill>
               </a:defRPr>
             </a:lvl5pPr>
@@ -13461,7 +13461,7 @@
               <a:defRPr sz="2400" b="1">
                 <a:latin typeface="Arial"/>
                 <a:solidFill>
-                  <a:srgbClr val="CA5651"/>
+                  <a:srgbClr val="1A1A1A"/>
                 </a:solidFill>
               </a:defRPr>
             </a:lvl6pPr>
@@ -13480,7 +13480,7 @@
               <a:defRPr sz="2400" b="1">
                 <a:latin typeface="Arial"/>
                 <a:solidFill>
-                  <a:srgbClr val="CA5651"/>
+                  <a:srgbClr val="1A1A1A"/>
                 </a:solidFill>
               </a:defRPr>
             </a:lvl7pPr>
@@ -13499,7 +13499,7 @@
               <a:defRPr sz="2400" b="1">
                 <a:latin typeface="Arial"/>
                 <a:solidFill>
-                  <a:srgbClr val="CA5651"/>
+                  <a:srgbClr val="1A1A1A"/>
                 </a:solidFill>
               </a:defRPr>
             </a:lvl8pPr>
@@ -13518,7 +13518,7 @@
               <a:defRPr sz="2400" b="1">
                 <a:latin typeface="Arial"/>
                 <a:solidFill>
-                  <a:srgbClr val="CA5651"/>
+                  <a:srgbClr val="1A1A1A"/>
                 </a:solidFill>
               </a:defRPr>
             </a:lvl9pPr>
@@ -13528,7 +13528,7 @@
               <a:rPr lang="es-MX" dirty="0" sz="2400" b="1">
                 <a:latin typeface="Arial"/>
                 <a:solidFill>
-                  <a:srgbClr val="CA5651"/>
+                  <a:srgbClr val="1A1A1A"/>
                 </a:solidFill>
               </a:rPr>
               <a:t>Haz clic para modificar el estilo de título del patrón</a:t>
@@ -13536,7 +13536,7 @@
             <a:endParaRPr dirty="0" sz="2400" b="1">
               <a:latin typeface="Arial"/>
               <a:solidFill>
-                <a:srgbClr val="CA5651"/>
+                <a:srgbClr val="1A1A1A"/>
               </a:solidFill>
             </a:endParaRPr>
           </a:p>
@@ -13733,14 +13733,14 @@
                 <a:spcPts val="0"/>
               </a:spcAft>
               <a:buClr>
-                <a:srgbClr val="CA5651"/>
+                <a:srgbClr val="1A1A1A"/>
               </a:buClr>
               <a:buSzPts val="2400"/>
               <a:buFont typeface="Arial"/>
               <a:buNone/>
               <a:defRPr sz="2400" b="1" cap="none">
                 <a:solidFill>
-                  <a:srgbClr val="CA5651"/>
+                  <a:srgbClr val="1A1A1A"/>
                 </a:solidFill>
                 <a:latin typeface="Arial"/>
                 <a:ea typeface="Arial"/>
@@ -13763,7 +13763,7 @@
               <a:defRPr sz="2400" b="1">
                 <a:latin typeface="Arial"/>
                 <a:solidFill>
-                  <a:srgbClr val="CA5651"/>
+                  <a:srgbClr val="1A1A1A"/>
                 </a:solidFill>
               </a:defRPr>
             </a:lvl2pPr>
@@ -13782,7 +13782,7 @@
               <a:defRPr sz="2400" b="1">
                 <a:latin typeface="Arial"/>
                 <a:solidFill>
-                  <a:srgbClr val="CA5651"/>
+                  <a:srgbClr val="1A1A1A"/>
                 </a:solidFill>
               </a:defRPr>
             </a:lvl3pPr>
@@ -13801,7 +13801,7 @@
               <a:defRPr sz="2400" b="1">
                 <a:latin typeface="Arial"/>
                 <a:solidFill>
-                  <a:srgbClr val="CA5651"/>
+                  <a:srgbClr val="1A1A1A"/>
                 </a:solidFill>
               </a:defRPr>
             </a:lvl4pPr>
@@ -13820,7 +13820,7 @@
               <a:defRPr sz="2400" b="1">
                 <a:latin typeface="Arial"/>
                 <a:solidFill>
-                  <a:srgbClr val="CA5651"/>
+                  <a:srgbClr val="1A1A1A"/>
                 </a:solidFill>
               </a:defRPr>
             </a:lvl5pPr>
@@ -13839,7 +13839,7 @@
               <a:defRPr sz="2400" b="1">
                 <a:latin typeface="Arial"/>
                 <a:solidFill>
-                  <a:srgbClr val="CA5651"/>
+                  <a:srgbClr val="1A1A1A"/>
                 </a:solidFill>
               </a:defRPr>
             </a:lvl6pPr>
@@ -13858,7 +13858,7 @@
               <a:defRPr sz="2400" b="1">
                 <a:latin typeface="Arial"/>
                 <a:solidFill>
-                  <a:srgbClr val="CA5651"/>
+                  <a:srgbClr val="1A1A1A"/>
                 </a:solidFill>
               </a:defRPr>
             </a:lvl7pPr>
@@ -13877,7 +13877,7 @@
               <a:defRPr sz="2400" b="1">
                 <a:latin typeface="Arial"/>
                 <a:solidFill>
-                  <a:srgbClr val="CA5651"/>
+                  <a:srgbClr val="1A1A1A"/>
                 </a:solidFill>
               </a:defRPr>
             </a:lvl8pPr>
@@ -13896,7 +13896,7 @@
               <a:defRPr sz="2400" b="1">
                 <a:latin typeface="Arial"/>
                 <a:solidFill>
-                  <a:srgbClr val="CA5651"/>
+                  <a:srgbClr val="1A1A1A"/>
                 </a:solidFill>
               </a:defRPr>
             </a:lvl9pPr>
@@ -13906,7 +13906,7 @@
               <a:rPr lang="es-MX" sz="2400" b="1">
                 <a:latin typeface="Arial"/>
                 <a:solidFill>
-                  <a:srgbClr val="CA5651"/>
+                  <a:srgbClr val="1A1A1A"/>
                 </a:solidFill>
               </a:rPr>
               <a:t>Haz clic para modificar el estilo de título del patrón</a:t>
@@ -13914,7 +13914,7 @@
             <a:endParaRPr dirty="0" sz="2400" b="1">
               <a:latin typeface="Arial"/>
               <a:solidFill>
-                <a:srgbClr val="CA5651"/>
+                <a:srgbClr val="1A1A1A"/>
               </a:solidFill>
             </a:endParaRPr>
           </a:p>
@@ -14275,14 +14275,14 @@
                 <a:spcPts val="0"/>
               </a:spcAft>
               <a:buClr>
-                <a:srgbClr val="CA5651"/>
+                <a:srgbClr val="1A1A1A"/>
               </a:buClr>
               <a:buSzPts val="2400"/>
               <a:buFont typeface="Arial"/>
               <a:buNone/>
               <a:defRPr sz="2400" b="1" cap="none">
                 <a:solidFill>
-                  <a:srgbClr val="CA5651"/>
+                  <a:srgbClr val="1A1A1A"/>
                 </a:solidFill>
                 <a:latin typeface="Arial"/>
                 <a:ea typeface="Arial"/>
@@ -14305,7 +14305,7 @@
               <a:defRPr sz="2400" b="1">
                 <a:latin typeface="Arial"/>
                 <a:solidFill>
-                  <a:srgbClr val="CA5651"/>
+                  <a:srgbClr val="1A1A1A"/>
                 </a:solidFill>
               </a:defRPr>
             </a:lvl2pPr>
@@ -14324,7 +14324,7 @@
               <a:defRPr sz="2400" b="1">
                 <a:latin typeface="Arial"/>
                 <a:solidFill>
-                  <a:srgbClr val="CA5651"/>
+                  <a:srgbClr val="1A1A1A"/>
                 </a:solidFill>
               </a:defRPr>
             </a:lvl3pPr>
@@ -14343,7 +14343,7 @@
               <a:defRPr sz="2400" b="1">
                 <a:latin typeface="Arial"/>
                 <a:solidFill>
-                  <a:srgbClr val="CA5651"/>
+                  <a:srgbClr val="1A1A1A"/>
                 </a:solidFill>
               </a:defRPr>
             </a:lvl4pPr>
@@ -14362,7 +14362,7 @@
               <a:defRPr sz="2400" b="1">
                 <a:latin typeface="Arial"/>
                 <a:solidFill>
-                  <a:srgbClr val="CA5651"/>
+                  <a:srgbClr val="1A1A1A"/>
                 </a:solidFill>
               </a:defRPr>
             </a:lvl5pPr>
@@ -14381,7 +14381,7 @@
               <a:defRPr sz="2400" b="1">
                 <a:latin typeface="Arial"/>
                 <a:solidFill>
-                  <a:srgbClr val="CA5651"/>
+                  <a:srgbClr val="1A1A1A"/>
                 </a:solidFill>
               </a:defRPr>
             </a:lvl6pPr>
@@ -14400,7 +14400,7 @@
               <a:defRPr sz="2400" b="1">
                 <a:latin typeface="Arial"/>
                 <a:solidFill>
-                  <a:srgbClr val="CA5651"/>
+                  <a:srgbClr val="1A1A1A"/>
                 </a:solidFill>
               </a:defRPr>
             </a:lvl7pPr>
@@ -14419,7 +14419,7 @@
               <a:defRPr sz="2400" b="1">
                 <a:latin typeface="Arial"/>
                 <a:solidFill>
-                  <a:srgbClr val="CA5651"/>
+                  <a:srgbClr val="1A1A1A"/>
                 </a:solidFill>
               </a:defRPr>
             </a:lvl8pPr>
@@ -14438,7 +14438,7 @@
               <a:defRPr sz="2400" b="1">
                 <a:latin typeface="Arial"/>
                 <a:solidFill>
-                  <a:srgbClr val="CA5651"/>
+                  <a:srgbClr val="1A1A1A"/>
                 </a:solidFill>
               </a:defRPr>
             </a:lvl9pPr>
@@ -14448,7 +14448,7 @@
               <a:rPr lang="es-MX" sz="2400" b="1">
                 <a:latin typeface="Arial"/>
                 <a:solidFill>
-                  <a:srgbClr val="CA5651"/>
+                  <a:srgbClr val="1A1A1A"/>
                 </a:solidFill>
               </a:rPr>
               <a:t>Haz clic para modificar el estilo de título del patrón</a:t>
@@ -14456,7 +14456,7 @@
             <a:endParaRPr dirty="0" sz="2400" b="1">
               <a:latin typeface="Arial"/>
               <a:solidFill>
-                <a:srgbClr val="CA5651"/>
+                <a:srgbClr val="1A1A1A"/>
               </a:solidFill>
             </a:endParaRPr>
           </a:p>
@@ -14850,14 +14850,14 @@
                 <a:spcPts val="0"/>
               </a:spcAft>
               <a:buClr>
-                <a:srgbClr val="CA5651"/>
+                <a:srgbClr val="1A1A1A"/>
               </a:buClr>
               <a:buSzPts val="2400"/>
               <a:buFont typeface="Arial"/>
               <a:buNone/>
               <a:defRPr sz="2400" b="1" cap="none">
                 <a:solidFill>
-                  <a:srgbClr val="CA5651"/>
+                  <a:srgbClr val="1A1A1A"/>
                 </a:solidFill>
                 <a:latin typeface="Arial"/>
                 <a:ea typeface="Arial"/>
@@ -14880,7 +14880,7 @@
               <a:defRPr sz="2400" b="1">
                 <a:latin typeface="Arial"/>
                 <a:solidFill>
-                  <a:srgbClr val="CA5651"/>
+                  <a:srgbClr val="1A1A1A"/>
                 </a:solidFill>
               </a:defRPr>
             </a:lvl2pPr>
@@ -14899,7 +14899,7 @@
               <a:defRPr sz="2400" b="1">
                 <a:latin typeface="Arial"/>
                 <a:solidFill>
-                  <a:srgbClr val="CA5651"/>
+                  <a:srgbClr val="1A1A1A"/>
                 </a:solidFill>
               </a:defRPr>
             </a:lvl3pPr>
@@ -14918,7 +14918,7 @@
               <a:defRPr sz="2400" b="1">
                 <a:latin typeface="Arial"/>
                 <a:solidFill>
-                  <a:srgbClr val="CA5651"/>
+                  <a:srgbClr val="1A1A1A"/>
                 </a:solidFill>
               </a:defRPr>
             </a:lvl4pPr>
@@ -14937,7 +14937,7 @@
               <a:defRPr sz="2400" b="1">
                 <a:latin typeface="Arial"/>
                 <a:solidFill>
-                  <a:srgbClr val="CA5651"/>
+                  <a:srgbClr val="1A1A1A"/>
                 </a:solidFill>
               </a:defRPr>
             </a:lvl5pPr>
@@ -14956,7 +14956,7 @@
               <a:defRPr sz="2400" b="1">
                 <a:latin typeface="Arial"/>
                 <a:solidFill>
-                  <a:srgbClr val="CA5651"/>
+                  <a:srgbClr val="1A1A1A"/>
                 </a:solidFill>
               </a:defRPr>
             </a:lvl6pPr>
@@ -14975,7 +14975,7 @@
               <a:defRPr sz="2400" b="1">
                 <a:latin typeface="Arial"/>
                 <a:solidFill>
-                  <a:srgbClr val="CA5651"/>
+                  <a:srgbClr val="1A1A1A"/>
                 </a:solidFill>
               </a:defRPr>
             </a:lvl7pPr>
@@ -14994,7 +14994,7 @@
               <a:defRPr sz="2400" b="1">
                 <a:latin typeface="Arial"/>
                 <a:solidFill>
-                  <a:srgbClr val="CA5651"/>
+                  <a:srgbClr val="1A1A1A"/>
                 </a:solidFill>
               </a:defRPr>
             </a:lvl8pPr>
@@ -15013,7 +15013,7 @@
               <a:defRPr sz="2400" b="1">
                 <a:latin typeface="Arial"/>
                 <a:solidFill>
-                  <a:srgbClr val="CA5651"/>
+                  <a:srgbClr val="1A1A1A"/>
                 </a:solidFill>
               </a:defRPr>
             </a:lvl9pPr>
@@ -15023,7 +15023,7 @@
               <a:rPr lang="es-MX" sz="2400" b="1">
                 <a:latin typeface="Arial"/>
                 <a:solidFill>
-                  <a:srgbClr val="CA5651"/>
+                  <a:srgbClr val="1A1A1A"/>
                 </a:solidFill>
               </a:rPr>
               <a:t>Haz clic para modificar el estilo de título del patrón</a:t>
@@ -15031,7 +15031,7 @@
             <a:endParaRPr dirty="0" sz="2400" b="1">
               <a:latin typeface="Arial"/>
               <a:solidFill>
-                <a:srgbClr val="CA5651"/>
+                <a:srgbClr val="1A1A1A"/>
               </a:solidFill>
             </a:endParaRPr>
           </a:p>
@@ -15707,14 +15707,14 @@
                 <a:spcPts val="0"/>
               </a:spcAft>
               <a:buClr>
-                <a:srgbClr val="CA5651"/>
+                <a:srgbClr val="1A1A1A"/>
               </a:buClr>
               <a:buSzPts val="2400"/>
               <a:buFont typeface="Arial"/>
               <a:buNone/>
               <a:defRPr sz="2400" b="1" cap="none">
                 <a:solidFill>
-                  <a:srgbClr val="CA5651"/>
+                  <a:srgbClr val="1A1A1A"/>
                 </a:solidFill>
                 <a:latin typeface="Arial"/>
                 <a:ea typeface="Arial"/>
@@ -15737,7 +15737,7 @@
               <a:defRPr sz="2400" b="1">
                 <a:latin typeface="Arial"/>
                 <a:solidFill>
-                  <a:srgbClr val="CA5651"/>
+                  <a:srgbClr val="1A1A1A"/>
                 </a:solidFill>
               </a:defRPr>
             </a:lvl2pPr>
@@ -15756,7 +15756,7 @@
               <a:defRPr sz="2400" b="1">
                 <a:latin typeface="Arial"/>
                 <a:solidFill>
-                  <a:srgbClr val="CA5651"/>
+                  <a:srgbClr val="1A1A1A"/>
                 </a:solidFill>
               </a:defRPr>
             </a:lvl3pPr>
@@ -15775,7 +15775,7 @@
               <a:defRPr sz="2400" b="1">
                 <a:latin typeface="Arial"/>
                 <a:solidFill>
-                  <a:srgbClr val="CA5651"/>
+                  <a:srgbClr val="1A1A1A"/>
                 </a:solidFill>
               </a:defRPr>
             </a:lvl4pPr>
@@ -15794,7 +15794,7 @@
               <a:defRPr sz="2400" b="1">
                 <a:latin typeface="Arial"/>
                 <a:solidFill>
-                  <a:srgbClr val="CA5651"/>
+                  <a:srgbClr val="1A1A1A"/>
                 </a:solidFill>
               </a:defRPr>
             </a:lvl5pPr>
@@ -15813,7 +15813,7 @@
               <a:defRPr sz="2400" b="1">
                 <a:latin typeface="Arial"/>
                 <a:solidFill>
-                  <a:srgbClr val="CA5651"/>
+                  <a:srgbClr val="1A1A1A"/>
                 </a:solidFill>
               </a:defRPr>
             </a:lvl6pPr>
@@ -15832,7 +15832,7 @@
               <a:defRPr sz="2400" b="1">
                 <a:latin typeface="Arial"/>
                 <a:solidFill>
-                  <a:srgbClr val="CA5651"/>
+                  <a:srgbClr val="1A1A1A"/>
                 </a:solidFill>
               </a:defRPr>
             </a:lvl7pPr>
@@ -15851,7 +15851,7 @@
               <a:defRPr sz="2400" b="1">
                 <a:latin typeface="Arial"/>
                 <a:solidFill>
-                  <a:srgbClr val="CA5651"/>
+                  <a:srgbClr val="1A1A1A"/>
                 </a:solidFill>
               </a:defRPr>
             </a:lvl8pPr>
@@ -15870,7 +15870,7 @@
               <a:defRPr sz="2400" b="1">
                 <a:latin typeface="Arial"/>
                 <a:solidFill>
-                  <a:srgbClr val="CA5651"/>
+                  <a:srgbClr val="1A1A1A"/>
                 </a:solidFill>
               </a:defRPr>
             </a:lvl9pPr>
@@ -15880,7 +15880,7 @@
               <a:rPr lang="es-MX" dirty="0" sz="2400" b="1">
                 <a:latin typeface="Arial"/>
                 <a:solidFill>
-                  <a:srgbClr val="CA5651"/>
+                  <a:srgbClr val="1A1A1A"/>
                 </a:solidFill>
               </a:rPr>
               <a:t>Haz clic para modificar el estilo de título del patrón</a:t>
@@ -15888,7 +15888,7 @@
             <a:endParaRPr dirty="0" sz="2400" b="1">
               <a:latin typeface="Arial"/>
               <a:solidFill>
-                <a:srgbClr val="CA5651"/>
+                <a:srgbClr val="1A1A1A"/>
               </a:solidFill>
             </a:endParaRPr>
           </a:p>
@@ -16301,7 +16301,7 @@
               <a:rPr lang="es-MX" sz="2400" b="1">
                 <a:latin typeface="Arial"/>
                 <a:solidFill>
-                  <a:srgbClr val="CA5651"/>
+                  <a:srgbClr val="1A1A1A"/>
                 </a:solidFill>
               </a:rPr>
               <a:t>Haz clic para modificar el estilo de título del patrón</a:t>
@@ -16309,7 +16309,7 @@
             <a:endParaRPr lang="es-PE" sz="2400" b="1">
               <a:latin typeface="Arial"/>
               <a:solidFill>
-                <a:srgbClr val="CA5651"/>
+                <a:srgbClr val="1A1A1A"/>
               </a:solidFill>
             </a:endParaRPr>
           </a:p>
@@ -16400,14 +16400,14 @@
                 <a:spcPts val="0"/>
               </a:spcAft>
               <a:buClr>
-                <a:srgbClr val="CA5651"/>
+                <a:srgbClr val="1A1A1A"/>
               </a:buClr>
               <a:buSzPts val="2400"/>
               <a:buFont typeface="Arial"/>
               <a:buNone/>
               <a:defRPr sz="2400" b="1" cap="none">
                 <a:solidFill>
-                  <a:srgbClr val="CA5651"/>
+                  <a:srgbClr val="1A1A1A"/>
                 </a:solidFill>
                 <a:latin typeface="Arial"/>
                 <a:ea typeface="Arial"/>
@@ -16430,7 +16430,7 @@
               <a:defRPr sz="2400" b="1">
                 <a:latin typeface="Arial"/>
                 <a:solidFill>
-                  <a:srgbClr val="CA5651"/>
+                  <a:srgbClr val="1A1A1A"/>
                 </a:solidFill>
               </a:defRPr>
             </a:lvl2pPr>
@@ -16449,7 +16449,7 @@
               <a:defRPr sz="2400" b="1">
                 <a:latin typeface="Arial"/>
                 <a:solidFill>
-                  <a:srgbClr val="CA5651"/>
+                  <a:srgbClr val="1A1A1A"/>
                 </a:solidFill>
               </a:defRPr>
             </a:lvl3pPr>
@@ -16468,7 +16468,7 @@
               <a:defRPr sz="2400" b="1">
                 <a:latin typeface="Arial"/>
                 <a:solidFill>
-                  <a:srgbClr val="CA5651"/>
+                  <a:srgbClr val="1A1A1A"/>
                 </a:solidFill>
               </a:defRPr>
             </a:lvl4pPr>
@@ -16487,7 +16487,7 @@
               <a:defRPr sz="2400" b="1">
                 <a:latin typeface="Arial"/>
                 <a:solidFill>
-                  <a:srgbClr val="CA5651"/>
+                  <a:srgbClr val="1A1A1A"/>
                 </a:solidFill>
               </a:defRPr>
             </a:lvl5pPr>
@@ -16506,7 +16506,7 @@
               <a:defRPr sz="2400" b="1">
                 <a:latin typeface="Arial"/>
                 <a:solidFill>
-                  <a:srgbClr val="CA5651"/>
+                  <a:srgbClr val="1A1A1A"/>
                 </a:solidFill>
               </a:defRPr>
             </a:lvl6pPr>
@@ -16525,7 +16525,7 @@
               <a:defRPr sz="2400" b="1">
                 <a:latin typeface="Arial"/>
                 <a:solidFill>
-                  <a:srgbClr val="CA5651"/>
+                  <a:srgbClr val="1A1A1A"/>
                 </a:solidFill>
               </a:defRPr>
             </a:lvl7pPr>
@@ -16544,7 +16544,7 @@
               <a:defRPr sz="2400" b="1">
                 <a:latin typeface="Arial"/>
                 <a:solidFill>
-                  <a:srgbClr val="CA5651"/>
+                  <a:srgbClr val="1A1A1A"/>
                 </a:solidFill>
               </a:defRPr>
             </a:lvl8pPr>
@@ -16563,7 +16563,7 @@
               <a:defRPr sz="2400" b="1">
                 <a:latin typeface="Arial"/>
                 <a:solidFill>
-                  <a:srgbClr val="CA5651"/>
+                  <a:srgbClr val="1A1A1A"/>
                 </a:solidFill>
               </a:defRPr>
             </a:lvl9pPr>
@@ -16573,7 +16573,7 @@
               <a:rPr lang="es-MX" sz="2400" b="1">
                 <a:latin typeface="Arial"/>
                 <a:solidFill>
-                  <a:srgbClr val="CA5651"/>
+                  <a:srgbClr val="1A1A1A"/>
                 </a:solidFill>
               </a:rPr>
               <a:t>Haz clic para modificar el estilo de título del patrón</a:t>
@@ -16581,7 +16581,7 @@
             <a:endParaRPr dirty="0" sz="2400" b="1">
               <a:latin typeface="Arial"/>
               <a:solidFill>
-                <a:srgbClr val="CA5651"/>
+                <a:srgbClr val="1A1A1A"/>
               </a:solidFill>
             </a:endParaRPr>
           </a:p>
@@ -16912,14 +16912,14 @@
                 <a:spcPts val="0"/>
               </a:spcAft>
               <a:buClr>
-                <a:srgbClr val="CA5651"/>
+                <a:srgbClr val="1A1A1A"/>
               </a:buClr>
               <a:buSzPts val="2400"/>
               <a:buFont typeface="Arial"/>
               <a:buNone/>
               <a:defRPr sz="2400" b="1" cap="none">
                 <a:solidFill>
-                  <a:srgbClr val="CA5651"/>
+                  <a:srgbClr val="1A1A1A"/>
                 </a:solidFill>
                 <a:latin typeface="Arial"/>
                 <a:ea typeface="Arial"/>
@@ -16942,7 +16942,7 @@
               <a:defRPr sz="2400" b="1">
                 <a:latin typeface="Arial"/>
                 <a:solidFill>
-                  <a:srgbClr val="CA5651"/>
+                  <a:srgbClr val="1A1A1A"/>
                 </a:solidFill>
               </a:defRPr>
             </a:lvl2pPr>
@@ -16961,7 +16961,7 @@
               <a:defRPr sz="2400" b="1">
                 <a:latin typeface="Arial"/>
                 <a:solidFill>
-                  <a:srgbClr val="CA5651"/>
+                  <a:srgbClr val="1A1A1A"/>
                 </a:solidFill>
               </a:defRPr>
             </a:lvl3pPr>
@@ -16980,7 +16980,7 @@
               <a:defRPr sz="2400" b="1">
                 <a:latin typeface="Arial"/>
                 <a:solidFill>
-                  <a:srgbClr val="CA5651"/>
+                  <a:srgbClr val="1A1A1A"/>
                 </a:solidFill>
               </a:defRPr>
             </a:lvl4pPr>
@@ -16999,7 +16999,7 @@
               <a:defRPr sz="2400" b="1">
                 <a:latin typeface="Arial"/>
                 <a:solidFill>
-                  <a:srgbClr val="CA5651"/>
+                  <a:srgbClr val="1A1A1A"/>
                 </a:solidFill>
               </a:defRPr>
             </a:lvl5pPr>
@@ -17018,7 +17018,7 @@
               <a:defRPr sz="2400" b="1">
                 <a:latin typeface="Arial"/>
                 <a:solidFill>
-                  <a:srgbClr val="CA5651"/>
+                  <a:srgbClr val="1A1A1A"/>
                 </a:solidFill>
               </a:defRPr>
             </a:lvl6pPr>
@@ -17037,7 +17037,7 @@
               <a:defRPr sz="2400" b="1">
                 <a:latin typeface="Arial"/>
                 <a:solidFill>
-                  <a:srgbClr val="CA5651"/>
+                  <a:srgbClr val="1A1A1A"/>
                 </a:solidFill>
               </a:defRPr>
             </a:lvl7pPr>
@@ -17056,7 +17056,7 @@
               <a:defRPr sz="2400" b="1">
                 <a:latin typeface="Arial"/>
                 <a:solidFill>
-                  <a:srgbClr val="CA5651"/>
+                  <a:srgbClr val="1A1A1A"/>
                 </a:solidFill>
               </a:defRPr>
             </a:lvl8pPr>
@@ -17075,7 +17075,7 @@
               <a:defRPr sz="2400" b="1">
                 <a:latin typeface="Arial"/>
                 <a:solidFill>
-                  <a:srgbClr val="CA5651"/>
+                  <a:srgbClr val="1A1A1A"/>
                 </a:solidFill>
               </a:defRPr>
             </a:lvl9pPr>
@@ -17085,7 +17085,7 @@
               <a:rPr lang="es-MX" sz="2400" b="1">
                 <a:latin typeface="Arial"/>
                 <a:solidFill>
-                  <a:srgbClr val="CA5651"/>
+                  <a:srgbClr val="1A1A1A"/>
                 </a:solidFill>
               </a:rPr>
               <a:t>Haz clic para modificar el estilo de título del patrón</a:t>
@@ -17093,7 +17093,7 @@
             <a:endParaRPr dirty="0" sz="2400" b="1">
               <a:latin typeface="Arial"/>
               <a:solidFill>
-                <a:srgbClr val="CA5651"/>
+                <a:srgbClr val="1A1A1A"/>
               </a:solidFill>
             </a:endParaRPr>
           </a:p>
@@ -17361,14 +17361,14 @@
                 <a:spcPts val="0"/>
               </a:spcAft>
               <a:buClr>
-                <a:srgbClr val="CA5651"/>
+                <a:srgbClr val="1A1A1A"/>
               </a:buClr>
               <a:buSzPts val="2400"/>
               <a:buFont typeface="Arial"/>
               <a:buNone/>
               <a:defRPr sz="2400" b="1" cap="none">
                 <a:solidFill>
-                  <a:srgbClr val="CA5651"/>
+                  <a:srgbClr val="1A1A1A"/>
                 </a:solidFill>
                 <a:latin typeface="Arial"/>
                 <a:ea typeface="Arial"/>
@@ -17391,7 +17391,7 @@
               <a:defRPr sz="2400" b="1">
                 <a:latin typeface="Arial"/>
                 <a:solidFill>
-                  <a:srgbClr val="CA5651"/>
+                  <a:srgbClr val="1A1A1A"/>
                 </a:solidFill>
               </a:defRPr>
             </a:lvl2pPr>
@@ -17410,7 +17410,7 @@
               <a:defRPr sz="2400" b="1">
                 <a:latin typeface="Arial"/>
                 <a:solidFill>
-                  <a:srgbClr val="CA5651"/>
+                  <a:srgbClr val="1A1A1A"/>
                 </a:solidFill>
               </a:defRPr>
             </a:lvl3pPr>
@@ -17429,7 +17429,7 @@
               <a:defRPr sz="2400" b="1">
                 <a:latin typeface="Arial"/>
                 <a:solidFill>
-                  <a:srgbClr val="CA5651"/>
+                  <a:srgbClr val="1A1A1A"/>
                 </a:solidFill>
               </a:defRPr>
             </a:lvl4pPr>
@@ -17448,7 +17448,7 @@
               <a:defRPr sz="2400" b="1">
                 <a:latin typeface="Arial"/>
                 <a:solidFill>
-                  <a:srgbClr val="CA5651"/>
+                  <a:srgbClr val="1A1A1A"/>
                 </a:solidFill>
               </a:defRPr>
             </a:lvl5pPr>
@@ -17467,7 +17467,7 @@
               <a:defRPr sz="2400" b="1">
                 <a:latin typeface="Arial"/>
                 <a:solidFill>
-                  <a:srgbClr val="CA5651"/>
+                  <a:srgbClr val="1A1A1A"/>
                 </a:solidFill>
               </a:defRPr>
             </a:lvl6pPr>
@@ -17486,7 +17486,7 @@
               <a:defRPr sz="2400" b="1">
                 <a:latin typeface="Arial"/>
                 <a:solidFill>
-                  <a:srgbClr val="CA5651"/>
+                  <a:srgbClr val="1A1A1A"/>
                 </a:solidFill>
               </a:defRPr>
             </a:lvl7pPr>
@@ -17505,7 +17505,7 @@
               <a:defRPr sz="2400" b="1">
                 <a:latin typeface="Arial"/>
                 <a:solidFill>
-                  <a:srgbClr val="CA5651"/>
+                  <a:srgbClr val="1A1A1A"/>
                 </a:solidFill>
               </a:defRPr>
             </a:lvl8pPr>
@@ -17524,7 +17524,7 @@
               <a:defRPr sz="2400" b="1">
                 <a:latin typeface="Arial"/>
                 <a:solidFill>
-                  <a:srgbClr val="CA5651"/>
+                  <a:srgbClr val="1A1A1A"/>
                 </a:solidFill>
               </a:defRPr>
             </a:lvl9pPr>
@@ -17534,7 +17534,7 @@
               <a:rPr lang="es-MX" sz="2400" b="1">
                 <a:latin typeface="Arial"/>
                 <a:solidFill>
-                  <a:srgbClr val="CA5651"/>
+                  <a:srgbClr val="1A1A1A"/>
                 </a:solidFill>
               </a:rPr>
               <a:t>Haz clic para modificar el estilo de título del patrón</a:t>
@@ -17542,7 +17542,7 @@
             <a:endParaRPr dirty="0" sz="2400" b="1">
               <a:latin typeface="Arial"/>
               <a:solidFill>
-                <a:srgbClr val="CA5651"/>
+                <a:srgbClr val="1A1A1A"/>
               </a:solidFill>
             </a:endParaRPr>
           </a:p>
@@ -17810,14 +17810,14 @@
                 <a:spcPts val="0"/>
               </a:spcAft>
               <a:buClr>
-                <a:srgbClr val="CA5651"/>
+                <a:srgbClr val="1A1A1A"/>
               </a:buClr>
               <a:buSzPts val="2400"/>
               <a:buFont typeface="Arial"/>
               <a:buNone/>
               <a:defRPr sz="2400" b="1" cap="none">
                 <a:solidFill>
-                  <a:srgbClr val="CA5651"/>
+                  <a:srgbClr val="1A1A1A"/>
                 </a:solidFill>
                 <a:latin typeface="Arial"/>
                 <a:ea typeface="Arial"/>
@@ -17840,7 +17840,7 @@
               <a:defRPr sz="2400" b="1">
                 <a:latin typeface="Arial"/>
                 <a:solidFill>
-                  <a:srgbClr val="CA5651"/>
+                  <a:srgbClr val="1A1A1A"/>
                 </a:solidFill>
               </a:defRPr>
             </a:lvl2pPr>
@@ -17859,7 +17859,7 @@
               <a:defRPr sz="2400" b="1">
                 <a:latin typeface="Arial"/>
                 <a:solidFill>
-                  <a:srgbClr val="CA5651"/>
+                  <a:srgbClr val="1A1A1A"/>
                 </a:solidFill>
               </a:defRPr>
             </a:lvl3pPr>
@@ -17878,7 +17878,7 @@
               <a:defRPr sz="2400" b="1">
                 <a:latin typeface="Arial"/>
                 <a:solidFill>
-                  <a:srgbClr val="CA5651"/>
+                  <a:srgbClr val="1A1A1A"/>
                 </a:solidFill>
               </a:defRPr>
             </a:lvl4pPr>
@@ -17897,7 +17897,7 @@
               <a:defRPr sz="2400" b="1">
                 <a:latin typeface="Arial"/>
                 <a:solidFill>
-                  <a:srgbClr val="CA5651"/>
+                  <a:srgbClr val="1A1A1A"/>
                 </a:solidFill>
               </a:defRPr>
             </a:lvl5pPr>
@@ -17916,7 +17916,7 @@
               <a:defRPr sz="2400" b="1">
                 <a:latin typeface="Arial"/>
                 <a:solidFill>
-                  <a:srgbClr val="CA5651"/>
+                  <a:srgbClr val="1A1A1A"/>
                 </a:solidFill>
               </a:defRPr>
             </a:lvl6pPr>
@@ -17935,7 +17935,7 @@
               <a:defRPr sz="2400" b="1">
                 <a:latin typeface="Arial"/>
                 <a:solidFill>
-                  <a:srgbClr val="CA5651"/>
+                  <a:srgbClr val="1A1A1A"/>
                 </a:solidFill>
               </a:defRPr>
             </a:lvl7pPr>
@@ -17954,7 +17954,7 @@
               <a:defRPr sz="2400" b="1">
                 <a:latin typeface="Arial"/>
                 <a:solidFill>
-                  <a:srgbClr val="CA5651"/>
+                  <a:srgbClr val="1A1A1A"/>
                 </a:solidFill>
               </a:defRPr>
             </a:lvl8pPr>
@@ -17973,7 +17973,7 @@
               <a:defRPr sz="2400" b="1">
                 <a:latin typeface="Arial"/>
                 <a:solidFill>
-                  <a:srgbClr val="CA5651"/>
+                  <a:srgbClr val="1A1A1A"/>
                 </a:solidFill>
               </a:defRPr>
             </a:lvl9pPr>
@@ -17983,7 +17983,7 @@
               <a:rPr lang="es-MX" sz="2400" b="1">
                 <a:latin typeface="Arial"/>
                 <a:solidFill>
-                  <a:srgbClr val="CA5651"/>
+                  <a:srgbClr val="1A1A1A"/>
                 </a:solidFill>
               </a:rPr>
               <a:t>Haz clic para modificar el estilo de título del patrón</a:t>
@@ -17991,7 +17991,7 @@
             <a:endParaRPr dirty="0" sz="2400" b="1">
               <a:latin typeface="Arial"/>
               <a:solidFill>
-                <a:srgbClr val="CA5651"/>
+                <a:srgbClr val="1A1A1A"/>
               </a:solidFill>
             </a:endParaRPr>
           </a:p>
@@ -18259,14 +18259,14 @@
                 <a:spcPts val="0"/>
               </a:spcAft>
               <a:buClr>
-                <a:srgbClr val="CA5651"/>
+                <a:srgbClr val="1A1A1A"/>
               </a:buClr>
               <a:buSzPts val="2400"/>
               <a:buFont typeface="Arial"/>
               <a:buNone/>
               <a:defRPr sz="2400" b="1" cap="none">
                 <a:solidFill>
-                  <a:srgbClr val="CA5651"/>
+                  <a:srgbClr val="1A1A1A"/>
                 </a:solidFill>
                 <a:latin typeface="Arial"/>
                 <a:ea typeface="Arial"/>
@@ -18289,7 +18289,7 @@
               <a:defRPr sz="2400" b="1">
                 <a:latin typeface="Arial"/>
                 <a:solidFill>
-                  <a:srgbClr val="CA5651"/>
+                  <a:srgbClr val="1A1A1A"/>
                 </a:solidFill>
               </a:defRPr>
             </a:lvl2pPr>
@@ -18308,7 +18308,7 @@
               <a:defRPr sz="2400" b="1">
                 <a:latin typeface="Arial"/>
                 <a:solidFill>
-                  <a:srgbClr val="CA5651"/>
+                  <a:srgbClr val="1A1A1A"/>
                 </a:solidFill>
               </a:defRPr>
             </a:lvl3pPr>
@@ -18327,7 +18327,7 @@
               <a:defRPr sz="2400" b="1">
                 <a:latin typeface="Arial"/>
                 <a:solidFill>
-                  <a:srgbClr val="CA5651"/>
+                  <a:srgbClr val="1A1A1A"/>
                 </a:solidFill>
               </a:defRPr>
             </a:lvl4pPr>
@@ -18346,7 +18346,7 @@
               <a:defRPr sz="2400" b="1">
                 <a:latin typeface="Arial"/>
                 <a:solidFill>
-                  <a:srgbClr val="CA5651"/>
+                  <a:srgbClr val="1A1A1A"/>
                 </a:solidFill>
               </a:defRPr>
             </a:lvl5pPr>
@@ -18365,7 +18365,7 @@
               <a:defRPr sz="2400" b="1">
                 <a:latin typeface="Arial"/>
                 <a:solidFill>
-                  <a:srgbClr val="CA5651"/>
+                  <a:srgbClr val="1A1A1A"/>
                 </a:solidFill>
               </a:defRPr>
             </a:lvl6pPr>
@@ -18384,7 +18384,7 @@
               <a:defRPr sz="2400" b="1">
                 <a:latin typeface="Arial"/>
                 <a:solidFill>
-                  <a:srgbClr val="CA5651"/>
+                  <a:srgbClr val="1A1A1A"/>
                 </a:solidFill>
               </a:defRPr>
             </a:lvl7pPr>
@@ -18403,7 +18403,7 @@
               <a:defRPr sz="2400" b="1">
                 <a:latin typeface="Arial"/>
                 <a:solidFill>
-                  <a:srgbClr val="CA5651"/>
+                  <a:srgbClr val="1A1A1A"/>
                 </a:solidFill>
               </a:defRPr>
             </a:lvl8pPr>
@@ -18422,7 +18422,7 @@
               <a:defRPr sz="2400" b="1">
                 <a:latin typeface="Arial"/>
                 <a:solidFill>
-                  <a:srgbClr val="CA5651"/>
+                  <a:srgbClr val="1A1A1A"/>
                 </a:solidFill>
               </a:defRPr>
             </a:lvl9pPr>
@@ -18432,7 +18432,7 @@
               <a:rPr lang="es-MX" sz="2400" b="1">
                 <a:latin typeface="Arial"/>
                 <a:solidFill>
-                  <a:srgbClr val="CA5651"/>
+                  <a:srgbClr val="1A1A1A"/>
                 </a:solidFill>
               </a:rPr>
               <a:t>Haz clic para modificar el estilo de título del patrón</a:t>
@@ -18440,7 +18440,7 @@
             <a:endParaRPr dirty="0" sz="2400" b="1">
               <a:latin typeface="Arial"/>
               <a:solidFill>
-                <a:srgbClr val="CA5651"/>
+                <a:srgbClr val="1A1A1A"/>
               </a:solidFill>
             </a:endParaRPr>
           </a:p>
@@ -18729,7 +18729,7 @@
               <a:rPr lang="en-US" dirty="0" sz="2400" b="1">
                 <a:latin typeface="Arial"/>
                 <a:solidFill>
-                  <a:srgbClr val="CA5651"/>
+                  <a:srgbClr val="1A1A1A"/>
                 </a:solidFill>
               </a:rPr>
               <a:t>Click to edit Master title style</a:t>
@@ -18737,7 +18737,7 @@
             <a:endParaRPr lang="en-PE" dirty="0" sz="2400" b="1">
               <a:latin typeface="Arial"/>
               <a:solidFill>
-                <a:srgbClr val="CA5651"/>
+                <a:srgbClr val="1A1A1A"/>
               </a:solidFill>
             </a:endParaRPr>
           </a:p>
@@ -18892,14 +18892,14 @@
                 <a:spcPts val="0"/>
               </a:spcAft>
               <a:buClr>
-                <a:srgbClr val="CA5651"/>
+                <a:srgbClr val="1A1A1A"/>
               </a:buClr>
               <a:buSzPts val="2400"/>
               <a:buFont typeface="Arial"/>
               <a:buNone/>
               <a:defRPr sz="2400" b="1" cap="none">
                 <a:solidFill>
-                  <a:srgbClr val="CA5651"/>
+                  <a:srgbClr val="1A1A1A"/>
                 </a:solidFill>
                 <a:latin typeface="Arial"/>
                 <a:ea typeface="Arial"/>
@@ -18922,7 +18922,7 @@
               <a:defRPr sz="2400" b="1">
                 <a:latin typeface="Arial"/>
                 <a:solidFill>
-                  <a:srgbClr val="CA5651"/>
+                  <a:srgbClr val="1A1A1A"/>
                 </a:solidFill>
               </a:defRPr>
             </a:lvl2pPr>
@@ -18941,7 +18941,7 @@
               <a:defRPr sz="2400" b="1">
                 <a:latin typeface="Arial"/>
                 <a:solidFill>
-                  <a:srgbClr val="CA5651"/>
+                  <a:srgbClr val="1A1A1A"/>
                 </a:solidFill>
               </a:defRPr>
             </a:lvl3pPr>
@@ -18960,7 +18960,7 @@
               <a:defRPr sz="2400" b="1">
                 <a:latin typeface="Arial"/>
                 <a:solidFill>
-                  <a:srgbClr val="CA5651"/>
+                  <a:srgbClr val="1A1A1A"/>
                 </a:solidFill>
               </a:defRPr>
             </a:lvl4pPr>
@@ -18979,7 +18979,7 @@
               <a:defRPr sz="2400" b="1">
                 <a:latin typeface="Arial"/>
                 <a:solidFill>
-                  <a:srgbClr val="CA5651"/>
+                  <a:srgbClr val="1A1A1A"/>
                 </a:solidFill>
               </a:defRPr>
             </a:lvl5pPr>
@@ -18998,7 +18998,7 @@
               <a:defRPr sz="2400" b="1">
                 <a:latin typeface="Arial"/>
                 <a:solidFill>
-                  <a:srgbClr val="CA5651"/>
+                  <a:srgbClr val="1A1A1A"/>
                 </a:solidFill>
               </a:defRPr>
             </a:lvl6pPr>
@@ -19017,7 +19017,7 @@
               <a:defRPr sz="2400" b="1">
                 <a:latin typeface="Arial"/>
                 <a:solidFill>
-                  <a:srgbClr val="CA5651"/>
+                  <a:srgbClr val="1A1A1A"/>
                 </a:solidFill>
               </a:defRPr>
             </a:lvl7pPr>
@@ -19036,7 +19036,7 @@
               <a:defRPr sz="2400" b="1">
                 <a:latin typeface="Arial"/>
                 <a:solidFill>
-                  <a:srgbClr val="CA5651"/>
+                  <a:srgbClr val="1A1A1A"/>
                 </a:solidFill>
               </a:defRPr>
             </a:lvl8pPr>
@@ -19055,7 +19055,7 @@
               <a:defRPr sz="2400" b="1">
                 <a:latin typeface="Arial"/>
                 <a:solidFill>
-                  <a:srgbClr val="CA5651"/>
+                  <a:srgbClr val="1A1A1A"/>
                 </a:solidFill>
               </a:defRPr>
             </a:lvl9pPr>
@@ -19065,7 +19065,7 @@
               <a:rPr lang="es-MX" sz="2400" b="1">
                 <a:latin typeface="Arial"/>
                 <a:solidFill>
-                  <a:srgbClr val="CA5651"/>
+                  <a:srgbClr val="1A1A1A"/>
                 </a:solidFill>
               </a:rPr>
               <a:t>Haz clic para modificar el estilo de título del patrón</a:t>
@@ -19073,7 +19073,7 @@
             <a:endParaRPr dirty="0" sz="2400" b="1">
               <a:latin typeface="Arial"/>
               <a:solidFill>
-                <a:srgbClr val="CA5651"/>
+                <a:srgbClr val="1A1A1A"/>
               </a:solidFill>
             </a:endParaRPr>
           </a:p>
@@ -19308,14 +19308,14 @@
                 <a:spcPts val="0"/>
               </a:spcAft>
               <a:buClr>
-                <a:srgbClr val="CA5651"/>
+                <a:srgbClr val="1A1A1A"/>
               </a:buClr>
               <a:buSzPts val="2400"/>
               <a:buFont typeface="Arial"/>
               <a:buNone/>
               <a:defRPr sz="2400" b="1" cap="none">
                 <a:solidFill>
-                  <a:srgbClr val="CA5651"/>
+                  <a:srgbClr val="1A1A1A"/>
                 </a:solidFill>
                 <a:latin typeface="Arial"/>
                 <a:ea typeface="Arial"/>
@@ -19338,7 +19338,7 @@
               <a:defRPr sz="2400" b="1">
                 <a:latin typeface="Arial"/>
                 <a:solidFill>
-                  <a:srgbClr val="CA5651"/>
+                  <a:srgbClr val="1A1A1A"/>
                 </a:solidFill>
               </a:defRPr>
             </a:lvl2pPr>
@@ -19357,7 +19357,7 @@
               <a:defRPr sz="2400" b="1">
                 <a:latin typeface="Arial"/>
                 <a:solidFill>
-                  <a:srgbClr val="CA5651"/>
+                  <a:srgbClr val="1A1A1A"/>
                 </a:solidFill>
               </a:defRPr>
             </a:lvl3pPr>
@@ -19376,7 +19376,7 @@
               <a:defRPr sz="2400" b="1">
                 <a:latin typeface="Arial"/>
                 <a:solidFill>
-                  <a:srgbClr val="CA5651"/>
+                  <a:srgbClr val="1A1A1A"/>
                 </a:solidFill>
               </a:defRPr>
             </a:lvl4pPr>
@@ -19395,7 +19395,7 @@
               <a:defRPr sz="2400" b="1">
                 <a:latin typeface="Arial"/>
                 <a:solidFill>
-                  <a:srgbClr val="CA5651"/>
+                  <a:srgbClr val="1A1A1A"/>
                 </a:solidFill>
               </a:defRPr>
             </a:lvl5pPr>
@@ -19414,7 +19414,7 @@
               <a:defRPr sz="2400" b="1">
                 <a:latin typeface="Arial"/>
                 <a:solidFill>
-                  <a:srgbClr val="CA5651"/>
+                  <a:srgbClr val="1A1A1A"/>
                 </a:solidFill>
               </a:defRPr>
             </a:lvl6pPr>
@@ -19433,7 +19433,7 @@
               <a:defRPr sz="2400" b="1">
                 <a:latin typeface="Arial"/>
                 <a:solidFill>
-                  <a:srgbClr val="CA5651"/>
+                  <a:srgbClr val="1A1A1A"/>
                 </a:solidFill>
               </a:defRPr>
             </a:lvl7pPr>
@@ -19452,7 +19452,7 @@
               <a:defRPr sz="2400" b="1">
                 <a:latin typeface="Arial"/>
                 <a:solidFill>
-                  <a:srgbClr val="CA5651"/>
+                  <a:srgbClr val="1A1A1A"/>
                 </a:solidFill>
               </a:defRPr>
             </a:lvl8pPr>
@@ -19471,7 +19471,7 @@
               <a:defRPr sz="2400" b="1">
                 <a:latin typeface="Arial"/>
                 <a:solidFill>
-                  <a:srgbClr val="CA5651"/>
+                  <a:srgbClr val="1A1A1A"/>
                 </a:solidFill>
               </a:defRPr>
             </a:lvl9pPr>
@@ -19481,7 +19481,7 @@
               <a:rPr lang="es-MX" sz="2400" b="1">
                 <a:latin typeface="Arial"/>
                 <a:solidFill>
-                  <a:srgbClr val="CA5651"/>
+                  <a:srgbClr val="1A1A1A"/>
                 </a:solidFill>
               </a:rPr>
               <a:t>Haz clic para modificar el estilo de título del patrón</a:t>
@@ -19489,7 +19489,7 @@
             <a:endParaRPr dirty="0" sz="2400" b="1">
               <a:latin typeface="Arial"/>
               <a:solidFill>
-                <a:srgbClr val="CA5651"/>
+                <a:srgbClr val="1A1A1A"/>
               </a:solidFill>
             </a:endParaRPr>
           </a:p>
@@ -19724,14 +19724,14 @@
                 <a:spcPts val="0"/>
               </a:spcAft>
               <a:buClr>
-                <a:srgbClr val="CA5651"/>
+                <a:srgbClr val="1A1A1A"/>
               </a:buClr>
               <a:buSzPts val="2400"/>
               <a:buFont typeface="Arial"/>
               <a:buNone/>
               <a:defRPr sz="2400" b="1" cap="none">
                 <a:solidFill>
-                  <a:srgbClr val="CA5651"/>
+                  <a:srgbClr val="1A1A1A"/>
                 </a:solidFill>
                 <a:latin typeface="Arial"/>
                 <a:ea typeface="Arial"/>
@@ -19754,7 +19754,7 @@
               <a:defRPr sz="2400" b="1">
                 <a:latin typeface="Arial"/>
                 <a:solidFill>
-                  <a:srgbClr val="CA5651"/>
+                  <a:srgbClr val="1A1A1A"/>
                 </a:solidFill>
               </a:defRPr>
             </a:lvl2pPr>
@@ -19773,7 +19773,7 @@
               <a:defRPr sz="2400" b="1">
                 <a:latin typeface="Arial"/>
                 <a:solidFill>
-                  <a:srgbClr val="CA5651"/>
+                  <a:srgbClr val="1A1A1A"/>
                 </a:solidFill>
               </a:defRPr>
             </a:lvl3pPr>
@@ -19792,7 +19792,7 @@
               <a:defRPr sz="2400" b="1">
                 <a:latin typeface="Arial"/>
                 <a:solidFill>
-                  <a:srgbClr val="CA5651"/>
+                  <a:srgbClr val="1A1A1A"/>
                 </a:solidFill>
               </a:defRPr>
             </a:lvl4pPr>
@@ -19811,7 +19811,7 @@
               <a:defRPr sz="2400" b="1">
                 <a:latin typeface="Arial"/>
                 <a:solidFill>
-                  <a:srgbClr val="CA5651"/>
+                  <a:srgbClr val="1A1A1A"/>
                 </a:solidFill>
               </a:defRPr>
             </a:lvl5pPr>
@@ -19830,7 +19830,7 @@
               <a:defRPr sz="2400" b="1">
                 <a:latin typeface="Arial"/>
                 <a:solidFill>
-                  <a:srgbClr val="CA5651"/>
+                  <a:srgbClr val="1A1A1A"/>
                 </a:solidFill>
               </a:defRPr>
             </a:lvl6pPr>
@@ -19849,7 +19849,7 @@
               <a:defRPr sz="2400" b="1">
                 <a:latin typeface="Arial"/>
                 <a:solidFill>
-                  <a:srgbClr val="CA5651"/>
+                  <a:srgbClr val="1A1A1A"/>
                 </a:solidFill>
               </a:defRPr>
             </a:lvl7pPr>
@@ -19868,7 +19868,7 @@
               <a:defRPr sz="2400" b="1">
                 <a:latin typeface="Arial"/>
                 <a:solidFill>
-                  <a:srgbClr val="CA5651"/>
+                  <a:srgbClr val="1A1A1A"/>
                 </a:solidFill>
               </a:defRPr>
             </a:lvl8pPr>
@@ -19887,7 +19887,7 @@
               <a:defRPr sz="2400" b="1">
                 <a:latin typeface="Arial"/>
                 <a:solidFill>
-                  <a:srgbClr val="CA5651"/>
+                  <a:srgbClr val="1A1A1A"/>
                 </a:solidFill>
               </a:defRPr>
             </a:lvl9pPr>
@@ -19897,7 +19897,7 @@
               <a:rPr lang="es-MX" sz="2400" b="1">
                 <a:latin typeface="Arial"/>
                 <a:solidFill>
-                  <a:srgbClr val="CA5651"/>
+                  <a:srgbClr val="1A1A1A"/>
                 </a:solidFill>
               </a:rPr>
               <a:t>Haz clic para modificar el estilo de título del patrón</a:t>
@@ -19905,7 +19905,7 @@
             <a:endParaRPr dirty="0" sz="2400" b="1">
               <a:latin typeface="Arial"/>
               <a:solidFill>
-                <a:srgbClr val="CA5651"/>
+                <a:srgbClr val="1A1A1A"/>
               </a:solidFill>
             </a:endParaRPr>
           </a:p>
@@ -20236,14 +20236,14 @@
                 <a:spcPts val="0"/>
               </a:spcAft>
               <a:buClr>
-                <a:srgbClr val="CA5651"/>
+                <a:srgbClr val="1A1A1A"/>
               </a:buClr>
               <a:buSzPts val="2400"/>
               <a:buFont typeface="Arial"/>
               <a:buNone/>
               <a:defRPr sz="2400" b="1" cap="none">
                 <a:solidFill>
-                  <a:srgbClr val="CA5651"/>
+                  <a:srgbClr val="1A1A1A"/>
                 </a:solidFill>
                 <a:latin typeface="Arial"/>
                 <a:ea typeface="Arial"/>
@@ -20266,7 +20266,7 @@
               <a:defRPr sz="2400" b="1">
                 <a:latin typeface="Arial"/>
                 <a:solidFill>
-                  <a:srgbClr val="CA5651"/>
+                  <a:srgbClr val="1A1A1A"/>
                 </a:solidFill>
               </a:defRPr>
             </a:lvl2pPr>
@@ -20285,7 +20285,7 @@
               <a:defRPr sz="2400" b="1">
                 <a:latin typeface="Arial"/>
                 <a:solidFill>
-                  <a:srgbClr val="CA5651"/>
+                  <a:srgbClr val="1A1A1A"/>
                 </a:solidFill>
               </a:defRPr>
             </a:lvl3pPr>
@@ -20304,7 +20304,7 @@
               <a:defRPr sz="2400" b="1">
                 <a:latin typeface="Arial"/>
                 <a:solidFill>
-                  <a:srgbClr val="CA5651"/>
+                  <a:srgbClr val="1A1A1A"/>
                 </a:solidFill>
               </a:defRPr>
             </a:lvl4pPr>
@@ -20323,7 +20323,7 @@
               <a:defRPr sz="2400" b="1">
                 <a:latin typeface="Arial"/>
                 <a:solidFill>
-                  <a:srgbClr val="CA5651"/>
+                  <a:srgbClr val="1A1A1A"/>
                 </a:solidFill>
               </a:defRPr>
             </a:lvl5pPr>
@@ -20342,7 +20342,7 @@
               <a:defRPr sz="2400" b="1">
                 <a:latin typeface="Arial"/>
                 <a:solidFill>
-                  <a:srgbClr val="CA5651"/>
+                  <a:srgbClr val="1A1A1A"/>
                 </a:solidFill>
               </a:defRPr>
             </a:lvl6pPr>
@@ -20361,7 +20361,7 @@
               <a:defRPr sz="2400" b="1">
                 <a:latin typeface="Arial"/>
                 <a:solidFill>
-                  <a:srgbClr val="CA5651"/>
+                  <a:srgbClr val="1A1A1A"/>
                 </a:solidFill>
               </a:defRPr>
             </a:lvl7pPr>
@@ -20380,7 +20380,7 @@
               <a:defRPr sz="2400" b="1">
                 <a:latin typeface="Arial"/>
                 <a:solidFill>
-                  <a:srgbClr val="CA5651"/>
+                  <a:srgbClr val="1A1A1A"/>
                 </a:solidFill>
               </a:defRPr>
             </a:lvl8pPr>
@@ -20399,7 +20399,7 @@
               <a:defRPr sz="2400" b="1">
                 <a:latin typeface="Arial"/>
                 <a:solidFill>
-                  <a:srgbClr val="CA5651"/>
+                  <a:srgbClr val="1A1A1A"/>
                 </a:solidFill>
               </a:defRPr>
             </a:lvl9pPr>
@@ -20409,7 +20409,7 @@
               <a:rPr lang="es-MX" sz="2400" b="1">
                 <a:latin typeface="Arial"/>
                 <a:solidFill>
-                  <a:srgbClr val="CA5651"/>
+                  <a:srgbClr val="1A1A1A"/>
                 </a:solidFill>
               </a:rPr>
               <a:t>Haz clic para modificar el estilo de título del patrón</a:t>
@@ -20417,7 +20417,7 @@
             <a:endParaRPr dirty="0" sz="2400" b="1">
               <a:latin typeface="Arial"/>
               <a:solidFill>
-                <a:srgbClr val="CA5651"/>
+                <a:srgbClr val="1A1A1A"/>
               </a:solidFill>
             </a:endParaRPr>
           </a:p>
@@ -20748,14 +20748,14 @@
                 <a:spcPts val="0"/>
               </a:spcAft>
               <a:buClr>
-                <a:srgbClr val="CA5651"/>
+                <a:srgbClr val="1A1A1A"/>
               </a:buClr>
               <a:buSzPts val="2400"/>
               <a:buFont typeface="Arial"/>
               <a:buNone/>
               <a:defRPr sz="2400" b="1" cap="none">
                 <a:solidFill>
-                  <a:srgbClr val="CA5651"/>
+                  <a:srgbClr val="1A1A1A"/>
                 </a:solidFill>
                 <a:latin typeface="Arial"/>
                 <a:ea typeface="Arial"/>
@@ -20778,7 +20778,7 @@
               <a:defRPr sz="2400" b="1">
                 <a:latin typeface="Arial"/>
                 <a:solidFill>
-                  <a:srgbClr val="CA5651"/>
+                  <a:srgbClr val="1A1A1A"/>
                 </a:solidFill>
               </a:defRPr>
             </a:lvl2pPr>
@@ -20797,7 +20797,7 @@
               <a:defRPr sz="2400" b="1">
                 <a:latin typeface="Arial"/>
                 <a:solidFill>
-                  <a:srgbClr val="CA5651"/>
+                  <a:srgbClr val="1A1A1A"/>
                 </a:solidFill>
               </a:defRPr>
             </a:lvl3pPr>
@@ -20816,7 +20816,7 @@
               <a:defRPr sz="2400" b="1">
                 <a:latin typeface="Arial"/>
                 <a:solidFill>
-                  <a:srgbClr val="CA5651"/>
+                  <a:srgbClr val="1A1A1A"/>
                 </a:solidFill>
               </a:defRPr>
             </a:lvl4pPr>
@@ -20835,7 +20835,7 @@
               <a:defRPr sz="2400" b="1">
                 <a:latin typeface="Arial"/>
                 <a:solidFill>
-                  <a:srgbClr val="CA5651"/>
+                  <a:srgbClr val="1A1A1A"/>
                 </a:solidFill>
               </a:defRPr>
             </a:lvl5pPr>
@@ -20854,7 +20854,7 @@
               <a:defRPr sz="2400" b="1">
                 <a:latin typeface="Arial"/>
                 <a:solidFill>
-                  <a:srgbClr val="CA5651"/>
+                  <a:srgbClr val="1A1A1A"/>
                 </a:solidFill>
               </a:defRPr>
             </a:lvl6pPr>
@@ -20873,7 +20873,7 @@
               <a:defRPr sz="2400" b="1">
                 <a:latin typeface="Arial"/>
                 <a:solidFill>
-                  <a:srgbClr val="CA5651"/>
+                  <a:srgbClr val="1A1A1A"/>
                 </a:solidFill>
               </a:defRPr>
             </a:lvl7pPr>
@@ -20892,7 +20892,7 @@
               <a:defRPr sz="2400" b="1">
                 <a:latin typeface="Arial"/>
                 <a:solidFill>
-                  <a:srgbClr val="CA5651"/>
+                  <a:srgbClr val="1A1A1A"/>
                 </a:solidFill>
               </a:defRPr>
             </a:lvl8pPr>
@@ -20911,7 +20911,7 @@
               <a:defRPr sz="2400" b="1">
                 <a:latin typeface="Arial"/>
                 <a:solidFill>
-                  <a:srgbClr val="CA5651"/>
+                  <a:srgbClr val="1A1A1A"/>
                 </a:solidFill>
               </a:defRPr>
             </a:lvl9pPr>
@@ -20921,7 +20921,7 @@
               <a:rPr lang="es-MX" sz="2400" b="1">
                 <a:latin typeface="Arial"/>
                 <a:solidFill>
-                  <a:srgbClr val="CA5651"/>
+                  <a:srgbClr val="1A1A1A"/>
                 </a:solidFill>
               </a:rPr>
               <a:t>Haz clic para modificar el estilo de título del patrón</a:t>
@@ -20929,7 +20929,7 @@
             <a:endParaRPr dirty="0" sz="2400" b="1">
               <a:latin typeface="Arial"/>
               <a:solidFill>
-                <a:srgbClr val="CA5651"/>
+                <a:srgbClr val="1A1A1A"/>
               </a:solidFill>
             </a:endParaRPr>
           </a:p>
@@ -21323,14 +21323,14 @@
                 <a:spcPts val="0"/>
               </a:spcAft>
               <a:buClr>
-                <a:srgbClr val="CA5651"/>
+                <a:srgbClr val="1A1A1A"/>
               </a:buClr>
               <a:buSzPts val="2400"/>
               <a:buFont typeface="Arial"/>
               <a:buNone/>
               <a:defRPr sz="2400" b="1" cap="none">
                 <a:solidFill>
-                  <a:srgbClr val="CA5651"/>
+                  <a:srgbClr val="1A1A1A"/>
                 </a:solidFill>
                 <a:latin typeface="Arial"/>
                 <a:ea typeface="Arial"/>
@@ -21353,7 +21353,7 @@
               <a:defRPr sz="2400" b="1">
                 <a:latin typeface="Arial"/>
                 <a:solidFill>
-                  <a:srgbClr val="CA5651"/>
+                  <a:srgbClr val="1A1A1A"/>
                 </a:solidFill>
               </a:defRPr>
             </a:lvl2pPr>
@@ -21372,7 +21372,7 @@
               <a:defRPr sz="2400" b="1">
                 <a:latin typeface="Arial"/>
                 <a:solidFill>
-                  <a:srgbClr val="CA5651"/>
+                  <a:srgbClr val="1A1A1A"/>
                 </a:solidFill>
               </a:defRPr>
             </a:lvl3pPr>
@@ -21391,7 +21391,7 @@
               <a:defRPr sz="2400" b="1">
                 <a:latin typeface="Arial"/>
                 <a:solidFill>
-                  <a:srgbClr val="CA5651"/>
+                  <a:srgbClr val="1A1A1A"/>
                 </a:solidFill>
               </a:defRPr>
             </a:lvl4pPr>
@@ -21410,7 +21410,7 @@
               <a:defRPr sz="2400" b="1">
                 <a:latin typeface="Arial"/>
                 <a:solidFill>
-                  <a:srgbClr val="CA5651"/>
+                  <a:srgbClr val="1A1A1A"/>
                 </a:solidFill>
               </a:defRPr>
             </a:lvl5pPr>
@@ -21429,7 +21429,7 @@
               <a:defRPr sz="2400" b="1">
                 <a:latin typeface="Arial"/>
                 <a:solidFill>
-                  <a:srgbClr val="CA5651"/>
+                  <a:srgbClr val="1A1A1A"/>
                 </a:solidFill>
               </a:defRPr>
             </a:lvl6pPr>
@@ -21448,7 +21448,7 @@
               <a:defRPr sz="2400" b="1">
                 <a:latin typeface="Arial"/>
                 <a:solidFill>
-                  <a:srgbClr val="CA5651"/>
+                  <a:srgbClr val="1A1A1A"/>
                 </a:solidFill>
               </a:defRPr>
             </a:lvl7pPr>
@@ -21467,7 +21467,7 @@
               <a:defRPr sz="2400" b="1">
                 <a:latin typeface="Arial"/>
                 <a:solidFill>
-                  <a:srgbClr val="CA5651"/>
+                  <a:srgbClr val="1A1A1A"/>
                 </a:solidFill>
               </a:defRPr>
             </a:lvl8pPr>
@@ -21486,7 +21486,7 @@
               <a:defRPr sz="2400" b="1">
                 <a:latin typeface="Arial"/>
                 <a:solidFill>
-                  <a:srgbClr val="CA5651"/>
+                  <a:srgbClr val="1A1A1A"/>
                 </a:solidFill>
               </a:defRPr>
             </a:lvl9pPr>
@@ -21496,7 +21496,7 @@
               <a:rPr lang="es-MX" sz="2400" b="1">
                 <a:latin typeface="Arial"/>
                 <a:solidFill>
-                  <a:srgbClr val="CA5651"/>
+                  <a:srgbClr val="1A1A1A"/>
                 </a:solidFill>
               </a:rPr>
               <a:t>Haz clic para modificar el estilo de título del patrón</a:t>
@@ -21504,7 +21504,7 @@
             <a:endParaRPr dirty="0" sz="2400" b="1">
               <a:latin typeface="Arial"/>
               <a:solidFill>
-                <a:srgbClr val="CA5651"/>
+                <a:srgbClr val="1A1A1A"/>
               </a:solidFill>
             </a:endParaRPr>
           </a:p>
@@ -21826,7 +21826,7 @@
               <a:rPr lang="en-US" dirty="0" sz="2400" b="1">
                 <a:latin typeface="Arial"/>
                 <a:solidFill>
-                  <a:srgbClr val="CA5651"/>
+                  <a:srgbClr val="1A1A1A"/>
                 </a:solidFill>
               </a:rPr>
               <a:t>Click to edit Master title style</a:t>
@@ -21834,7 +21834,7 @@
             <a:endParaRPr lang="en-PE" dirty="0" sz="2400" b="1">
               <a:latin typeface="Arial"/>
               <a:solidFill>
-                <a:srgbClr val="CA5651"/>
+                <a:srgbClr val="1A1A1A"/>
               </a:solidFill>
             </a:endParaRPr>
           </a:p>
@@ -22092,7 +22092,7 @@
               <a:rPr lang="en-US" dirty="0" sz="2400" b="1">
                 <a:latin typeface="Arial"/>
                 <a:solidFill>
-                  <a:srgbClr val="CA5651"/>
+                  <a:srgbClr val="1A1A1A"/>
                 </a:solidFill>
               </a:rPr>
               <a:t>Click to edit Master title style</a:t>
@@ -22100,7 +22100,7 @@
             <a:endParaRPr lang="en-PE" dirty="0" sz="2400" b="1">
               <a:latin typeface="Arial"/>
               <a:solidFill>
-                <a:srgbClr val="CA5651"/>
+                <a:srgbClr val="1A1A1A"/>
               </a:solidFill>
             </a:endParaRPr>
           </a:p>
@@ -22358,7 +22358,7 @@
               <a:rPr lang="en-US" dirty="0" sz="2400" b="1">
                 <a:latin typeface="Arial"/>
                 <a:solidFill>
-                  <a:srgbClr val="CA5651"/>
+                  <a:srgbClr val="1A1A1A"/>
                 </a:solidFill>
               </a:rPr>
               <a:t>Click to edit Master title style</a:t>
@@ -22366,7 +22366,7 @@
             <a:endParaRPr lang="en-PE" dirty="0" sz="2400" b="1">
               <a:latin typeface="Arial"/>
               <a:solidFill>
-                <a:srgbClr val="CA5651"/>
+                <a:srgbClr val="1A1A1A"/>
               </a:solidFill>
             </a:endParaRPr>
           </a:p>
@@ -22654,7 +22654,7 @@
               <a:rPr lang="en-US" dirty="0" sz="2400" b="1">
                 <a:latin typeface="Arial"/>
                 <a:solidFill>
-                  <a:srgbClr val="CA5651"/>
+                  <a:srgbClr val="1A1A1A"/>
                 </a:solidFill>
               </a:rPr>
               <a:t>Click to edit Master title style</a:t>
@@ -22662,7 +22662,7 @@
             <a:endParaRPr lang="en-PE" dirty="0" sz="2400" b="1">
               <a:latin typeface="Arial"/>
               <a:solidFill>
-                <a:srgbClr val="CA5651"/>
+                <a:srgbClr val="1A1A1A"/>
               </a:solidFill>
             </a:endParaRPr>
           </a:p>
@@ -23010,7 +23010,7 @@
               <a:rPr lang="en-US" dirty="0" sz="2400" b="1">
                 <a:latin typeface="Arial"/>
                 <a:solidFill>
-                  <a:srgbClr val="CA5651"/>
+                  <a:srgbClr val="1A1A1A"/>
                 </a:solidFill>
               </a:rPr>
               <a:t>Click to edit Master title style</a:t>
@@ -23018,7 +23018,7 @@
             <a:endParaRPr lang="en-PE" dirty="0" sz="2400" b="1">
               <a:latin typeface="Arial"/>
               <a:solidFill>
-                <a:srgbClr val="CA5651"/>
+                <a:srgbClr val="1A1A1A"/>
               </a:solidFill>
             </a:endParaRPr>
           </a:p>
@@ -23387,7 +23387,7 @@
               <a:rPr lang="en-US" dirty="0" sz="2400" b="1">
                 <a:latin typeface="Arial"/>
                 <a:solidFill>
-                  <a:srgbClr val="CA5651"/>
+                  <a:srgbClr val="1A1A1A"/>
                 </a:solidFill>
               </a:rPr>
               <a:t>Click to edit Master title style</a:t>
@@ -23395,7 +23395,7 @@
             <a:endParaRPr lang="en-PE" dirty="0" sz="2400" b="1">
               <a:latin typeface="Arial"/>
               <a:solidFill>
-                <a:srgbClr val="CA5651"/>
+                <a:srgbClr val="1A1A1A"/>
               </a:solidFill>
             </a:endParaRPr>
           </a:p>
